--- a/sharing/out/ScribeFlow-前端技术分享.pptx
+++ b/sharing/out/ScribeFlow-前端技术分享.pptx
@@ -7008,7 +7008,7 @@
                 <a:ea typeface="微软雅黑" pitchFamily="34" charset="-122"/>
                 <a:cs typeface="微软雅黑" pitchFamily="34" charset="-120"/>
               </a:rPr>
-              <a:t>一次运行把界面按在地上 32 秒</a:t>
+              <a:t>节点编排画布</a:t>
             </a:r>
             <a:endParaRPr lang="en-US" sz="2200" dirty="0"/>
           </a:p>
@@ -7047,7 +7047,7 @@
                 <a:ea typeface="微软雅黑" pitchFamily="34" charset="-122"/>
                 <a:cs typeface="微软雅黑" pitchFamily="34" charset="-120"/>
               </a:rPr>
-              <a:t>一次运行要更新几百次界面，画布上每个节点都在变</a:t>
+              <a:t>16 种节点、5913 行代码，画布是这个产品的核心界面</a:t>
             </a:r>
             <a:endParaRPr lang="en-US" sz="1600" dirty="0"/>
           </a:p>
@@ -7352,7 +7352,7 @@
                 <a:ea typeface="微软雅黑" pitchFamily="34" charset="-122"/>
                 <a:cs typeface="微软雅黑" pitchFamily="34" charset="-120"/>
               </a:rPr>
-              <a:t>01 / 一次运行把界面按在地上 32 秒</a:t>
+              <a:t>01 / 节点编排画布</a:t>
             </a:r>
             <a:endParaRPr lang="en-US" sz="1200" dirty="0"/>
           </a:p>
@@ -7391,7 +7391,7 @@
                 <a:ea typeface="微软雅黑" pitchFamily="34" charset="-122"/>
                 <a:cs typeface="微软雅黑" pitchFamily="34" charset="-120"/>
               </a:rPr>
-              <a:t>服务端 268 毫秒跑完了</a:t>
+              <a:t>用了画布库</a:t>
             </a:r>
             <a:endParaRPr lang="en-US" sz="3800" dirty="0"/>
           </a:p>
@@ -7430,7 +7430,7 @@
                 <a:ea typeface="微软雅黑" pitchFamily="34" charset="-122"/>
                 <a:cs typeface="微软雅黑" pitchFamily="34" charset="-120"/>
               </a:rPr>
-              <a:t>前端卡了 32 秒</a:t>
+              <a:t>也不省产品级画布的工作量</a:t>
             </a:r>
             <a:endParaRPr lang="en-US" sz="3800" dirty="0"/>
           </a:p>
@@ -7469,7 +7469,7 @@
                 <a:ea typeface="微软雅黑" pitchFamily="34" charset="-122"/>
                 <a:cs typeface="微软雅黑" pitchFamily="34" charset="-120"/>
               </a:rPr>
-              <a:t>图是一张 200 节点的真实可跑链路，200 是这个产品的节点上限</a:t>
+              <a:t>5913 行画布代码里，真正调库 API 的不到 200 行</a:t>
             </a:r>
             <a:endParaRPr lang="en-US" sz="1500" dirty="0"/>
           </a:p>
@@ -7489,7 +7489,7 @@
     <p:bg>
       <p:bgPr>
         <a:solidFill>
-          <a:srgbClr val="16181D"/>
+          <a:srgbClr val="FFFFFF"/>
         </a:solidFill>
       </p:bgPr>
     </p:bg>
@@ -7534,13 +7534,13 @@
             <a:r>
               <a:rPr lang="en-US" sz="1200" spc="300" kern="0" dirty="0">
                 <a:solidFill>
-                  <a:srgbClr val="8A929E"/>
-                </a:solidFill>
-                <a:latin typeface="微软雅黑" pitchFamily="34" charset="0"/>
-                <a:ea typeface="微软雅黑" pitchFamily="34" charset="-122"/>
-                <a:cs typeface="微软雅黑" pitchFamily="34" charset="-120"/>
-              </a:rPr>
-              <a:t>01 / 修法不玄学，就两下</a:t>
+                  <a:srgbClr val="545B66"/>
+                </a:solidFill>
+                <a:latin typeface="微软雅黑" pitchFamily="34" charset="0"/>
+                <a:ea typeface="微软雅黑" pitchFamily="34" charset="-122"/>
+                <a:cs typeface="微软雅黑" pitchFamily="34" charset="-120"/>
+              </a:rPr>
+              <a:t>01 / 节点编排画布</a:t>
             </a:r>
             <a:endParaRPr lang="en-US" sz="1200" dirty="0"/>
           </a:p>
@@ -7573,13 +7573,13 @@
             <a:r>
               <a:rPr lang="en-US" sz="3000" b="1" dirty="0">
                 <a:solidFill>
-                  <a:srgbClr val="FFFFFF"/>
-                </a:solidFill>
-                <a:latin typeface="微软雅黑" pitchFamily="34" charset="0"/>
-                <a:ea typeface="微软雅黑" pitchFamily="34" charset="-122"/>
-                <a:cs typeface="微软雅黑" pitchFamily="34" charset="-120"/>
-              </a:rPr>
-              <a:t>32 秒 → 264 毫秒</a:t>
+                  <a:srgbClr val="16181D"/>
+                </a:solidFill>
+                <a:latin typeface="微软雅黑" pitchFamily="34" charset="0"/>
+                <a:ea typeface="微软雅黑" pitchFamily="34" charset="-122"/>
+                <a:cs typeface="微软雅黑" pitchFamily="34" charset="-120"/>
+              </a:rPr>
+              <a:t>16 种节点，只注册 1 个 nodeType</a:t>
             </a:r>
             <a:endParaRPr lang="en-US" sz="3000" dirty="0"/>
           </a:p>
@@ -7593,75 +7593,61 @@
         </p:nvSpPr>
         <p:spPr>
           <a:xfrm>
-            <a:off x="457200" y="1920240"/>
-            <a:ext cx="3566160" cy="1005840"/>
-          </a:xfrm>
-          <a:prstGeom prst="rect">
-            <a:avLst/>
-          </a:prstGeom>
-          <a:noFill/>
-          <a:ln/>
-        </p:spPr>
-        <p:txBody>
-          <a:bodyPr wrap="square" lIns="0" tIns="0" rIns="0" bIns="0" rtlCol="0" anchor="ctr"/>
-          <a:lstStyle/>
-          <a:p>
-            <a:pPr indent="0" marL="0">
-              <a:buNone/>
-            </a:pPr>
-            <a:r>
-              <a:rPr lang="en-US" sz="4000" b="1" dirty="0">
-                <a:solidFill>
-                  <a:srgbClr val="8A929E"/>
-                </a:solidFill>
-                <a:latin typeface="Consolas" pitchFamily="34" charset="0"/>
-                <a:ea typeface="Consolas" pitchFamily="34" charset="-122"/>
-                <a:cs typeface="Consolas" pitchFamily="34" charset="-120"/>
-              </a:rPr>
-              <a:t>32,655 ms</a:t>
-            </a:r>
-            <a:endParaRPr lang="en-US" sz="4000" dirty="0"/>
-          </a:p>
-        </p:txBody>
-      </p:sp>
-      <p:sp>
-        <p:nvSpPr>
-          <p:cNvPr id="5" name="Text 3"/>
-          <p:cNvSpPr/>
-          <p:nvPr/>
-        </p:nvSpPr>
-        <p:spPr>
-          <a:xfrm>
-            <a:off x="4069080" y="1920240"/>
-            <a:ext cx="822960" cy="1005840"/>
-          </a:xfrm>
-          <a:prstGeom prst="rect">
-            <a:avLst/>
-          </a:prstGeom>
-          <a:noFill/>
-          <a:ln/>
-        </p:spPr>
-        <p:txBody>
-          <a:bodyPr wrap="square" lIns="0" tIns="0" rIns="0" bIns="0" rtlCol="0" anchor="ctr"/>
-          <a:lstStyle/>
-          <a:p>
-            <a:pPr algn="ctr" indent="0" marL="0">
-              <a:buNone/>
-            </a:pPr>
-            <a:r>
-              <a:rPr lang="en-US" sz="3600" b="1" dirty="0">
-                <a:solidFill>
-                  <a:srgbClr val="00AEEC"/>
-                </a:solidFill>
-                <a:latin typeface="微软雅黑" pitchFamily="34" charset="0"/>
-                <a:ea typeface="微软雅黑" pitchFamily="34" charset="-122"/>
-                <a:cs typeface="微软雅黑" pitchFamily="34" charset="-120"/>
-              </a:rPr>
-              <a:t>→</a:t>
-            </a:r>
-            <a:endParaRPr lang="en-US" sz="3600" dirty="0"/>
-          </a:p>
-        </p:txBody>
+            <a:off x="457200" y="1600200"/>
+            <a:ext cx="11274552" cy="390144"/>
+          </a:xfrm>
+          <a:prstGeom prst="rect">
+            <a:avLst/>
+          </a:prstGeom>
+          <a:noFill/>
+          <a:ln/>
+        </p:spPr>
+        <p:txBody>
+          <a:bodyPr wrap="square" lIns="0" tIns="0" rIns="0" bIns="0" rtlCol="0" anchor="ctr"/>
+          <a:lstStyle/>
+          <a:p>
+            <a:pPr indent="0" marL="0">
+              <a:buNone/>
+            </a:pPr>
+            <a:r>
+              <a:rPr lang="en-US" sz="1600" dirty="0">
+                <a:solidFill>
+                  <a:srgbClr val="16181D"/>
+                </a:solidFill>
+                <a:latin typeface="微软雅黑" pitchFamily="34" charset="0"/>
+                <a:ea typeface="微软雅黑" pitchFamily="34" charset="-122"/>
+                <a:cs typeface="微软雅黑" pitchFamily="34" charset="-120"/>
+              </a:rPr>
+              <a:t>业务类型不放进画布的 type 字段，而是放进 data.nodeType；画布只认一个组件，卡片按类型分派。</a:t>
+            </a:r>
+            <a:endParaRPr lang="en-US" sz="1600" dirty="0"/>
+          </a:p>
+        </p:txBody>
+      </p:sp>
+      <p:sp>
+        <p:nvSpPr>
+          <p:cNvPr id="5" name="Shape 3"/>
+          <p:cNvSpPr/>
+          <p:nvPr/>
+        </p:nvSpPr>
+        <p:spPr>
+          <a:xfrm>
+            <a:off x="457200" y="2377440"/>
+            <a:ext cx="5454396" cy="1481328"/>
+          </a:xfrm>
+          <a:prstGeom prst="rect">
+            <a:avLst/>
+          </a:prstGeom>
+          <a:solidFill>
+            <a:srgbClr val="F4F5F6"/>
+          </a:solidFill>
+          <a:ln w="12700">
+            <a:solidFill>
+              <a:srgbClr val="E4E7EB"/>
+            </a:solidFill>
+            <a:prstDash val="solid"/>
+          </a:ln>
+        </p:spPr>
       </p:sp>
       <p:sp>
         <p:nvSpPr>
@@ -7671,34 +7657,34 @@
         </p:nvSpPr>
         <p:spPr>
           <a:xfrm>
-            <a:off x="4937760" y="1920240"/>
-            <a:ext cx="3291840" cy="1005840"/>
-          </a:xfrm>
-          <a:prstGeom prst="rect">
-            <a:avLst/>
-          </a:prstGeom>
-          <a:noFill/>
-          <a:ln/>
-        </p:spPr>
-        <p:txBody>
-          <a:bodyPr wrap="square" lIns="0" tIns="0" rIns="0" bIns="0" rtlCol="0" anchor="ctr"/>
-          <a:lstStyle/>
-          <a:p>
-            <a:pPr indent="0" marL="0">
-              <a:buNone/>
-            </a:pPr>
-            <a:r>
-              <a:rPr lang="en-US" sz="4000" b="1" dirty="0">
-                <a:solidFill>
-                  <a:srgbClr val="00AEEC"/>
-                </a:solidFill>
-                <a:latin typeface="Consolas" pitchFamily="34" charset="0"/>
-                <a:ea typeface="Consolas" pitchFamily="34" charset="-122"/>
-                <a:cs typeface="Consolas" pitchFamily="34" charset="-120"/>
-              </a:rPr>
-              <a:t>264 ms</a:t>
-            </a:r>
-            <a:endParaRPr lang="en-US" sz="4000" dirty="0"/>
+            <a:off x="749808" y="2560320"/>
+            <a:ext cx="4869180" cy="384048"/>
+          </a:xfrm>
+          <a:prstGeom prst="rect">
+            <a:avLst/>
+          </a:prstGeom>
+          <a:noFill/>
+          <a:ln/>
+        </p:spPr>
+        <p:txBody>
+          <a:bodyPr wrap="square" lIns="0" tIns="0" rIns="0" bIns="0" rtlCol="0" anchor="ctr"/>
+          <a:lstStyle/>
+          <a:p>
+            <a:pPr indent="0" marL="0">
+              <a:buNone/>
+            </a:pPr>
+            <a:r>
+              <a:rPr lang="en-US" sz="1600" b="1" dirty="0">
+                <a:solidFill>
+                  <a:srgbClr val="16181D"/>
+                </a:solidFill>
+                <a:latin typeface="微软雅黑" pitchFamily="34" charset="0"/>
+                <a:ea typeface="微软雅黑" pitchFamily="34" charset="-122"/>
+                <a:cs typeface="微软雅黑" pitchFamily="34" charset="-120"/>
+              </a:rPr>
+              <a:t>收益</a:t>
+            </a:r>
+            <a:endParaRPr lang="en-US" sz="1600" dirty="0"/>
           </a:p>
         </p:txBody>
       </p:sp>
@@ -7710,47 +7696,8 @@
         </p:nvSpPr>
         <p:spPr>
           <a:xfrm>
-            <a:off x="457200" y="2944368"/>
-            <a:ext cx="11274552" cy="329184"/>
-          </a:xfrm>
-          <a:prstGeom prst="rect">
-            <a:avLst/>
-          </a:prstGeom>
-          <a:noFill/>
-          <a:ln/>
-        </p:spPr>
-        <p:txBody>
-          <a:bodyPr wrap="square" lIns="0" tIns="0" rIns="0" bIns="0" rtlCol="0" anchor="ctr"/>
-          <a:lstStyle/>
-          <a:p>
-            <a:pPr indent="0" marL="0">
-              <a:buNone/>
-            </a:pPr>
-            <a:r>
-              <a:rPr lang="en-US" sz="1400" dirty="0">
-                <a:solidFill>
-                  <a:srgbClr val="8A929E"/>
-                </a:solidFill>
-                <a:latin typeface="微软雅黑" pitchFamily="34" charset="0"/>
-                <a:ea typeface="微软雅黑" pitchFamily="34" charset="-122"/>
-                <a:cs typeface="微软雅黑" pitchFamily="34" charset="-120"/>
-              </a:rPr>
-              <a:t>跑一次 200 节点链路时，主线程最长一次阻塞</a:t>
-            </a:r>
-            <a:endParaRPr lang="en-US" sz="1400" dirty="0"/>
-          </a:p>
-        </p:txBody>
-      </p:sp>
-      <p:sp>
-        <p:nvSpPr>
-          <p:cNvPr id="8" name="Text 6"/>
-          <p:cNvSpPr/>
-          <p:nvPr/>
-        </p:nvSpPr>
-        <p:spPr>
-          <a:xfrm>
-            <a:off x="548640" y="3520440"/>
-            <a:ext cx="2194560" cy="457200"/>
+            <a:off x="749808" y="3035808"/>
+            <a:ext cx="4869180" cy="635508"/>
           </a:xfrm>
           <a:prstGeom prst="rect">
             <a:avLst/>
@@ -7766,19 +7713,44 @@
               <a:buNone/>
             </a:pPr>
             <a:r>
-              <a:rPr lang="en-US" sz="1400" b="1" dirty="0">
-                <a:solidFill>
-                  <a:srgbClr val="FFFFFF"/>
-                </a:solidFill>
-                <a:latin typeface="微软雅黑" pitchFamily="34" charset="0"/>
-                <a:ea typeface="微软雅黑" pitchFamily="34" charset="-122"/>
-                <a:cs typeface="微软雅黑" pitchFamily="34" charset="-120"/>
-              </a:rPr>
-              <a:t>自动布局</a:t>
-            </a:r>
-            <a:endParaRPr lang="en-US" sz="1400" dirty="0"/>
-          </a:p>
-        </p:txBody>
+              <a:rPr lang="en-US" sz="1500" dirty="0">
+                <a:solidFill>
+                  <a:srgbClr val="545B66"/>
+                </a:solidFill>
+                <a:latin typeface="微软雅黑" pitchFamily="34" charset="0"/>
+                <a:ea typeface="微软雅黑" pitchFamily="34" charset="-122"/>
+                <a:cs typeface="微软雅黑" pitchFamily="34" charset="-120"/>
+              </a:rPr>
+              <a:t>端口、右键菜单、运行按钮、状态条、悬停预览、只读控制只写一遍，16 种节点共用同一个外壳。</a:t>
+            </a:r>
+            <a:endParaRPr lang="en-US" sz="1500" dirty="0"/>
+          </a:p>
+        </p:txBody>
+      </p:sp>
+      <p:sp>
+        <p:nvSpPr>
+          <p:cNvPr id="8" name="Shape 6"/>
+          <p:cNvSpPr/>
+          <p:nvPr/>
+        </p:nvSpPr>
+        <p:spPr>
+          <a:xfrm>
+            <a:off x="6277356" y="2377440"/>
+            <a:ext cx="5454396" cy="1481328"/>
+          </a:xfrm>
+          <a:prstGeom prst="rect">
+            <a:avLst/>
+          </a:prstGeom>
+          <a:solidFill>
+            <a:srgbClr val="F4F5F6"/>
+          </a:solidFill>
+          <a:ln w="12700">
+            <a:solidFill>
+              <a:srgbClr val="E4E7EB"/>
+            </a:solidFill>
+            <a:prstDash val="solid"/>
+          </a:ln>
+        </p:spPr>
       </p:sp>
       <p:sp>
         <p:nvSpPr>
@@ -7788,8 +7760,47 @@
         </p:nvSpPr>
         <p:spPr>
           <a:xfrm>
-            <a:off x="2743200" y="3520440"/>
-            <a:ext cx="8805672" cy="336804"/>
+            <a:off x="6569964" y="2560320"/>
+            <a:ext cx="4869180" cy="384048"/>
+          </a:xfrm>
+          <a:prstGeom prst="rect">
+            <a:avLst/>
+          </a:prstGeom>
+          <a:noFill/>
+          <a:ln/>
+        </p:spPr>
+        <p:txBody>
+          <a:bodyPr wrap="square" lIns="0" tIns="0" rIns="0" bIns="0" rtlCol="0" anchor="ctr"/>
+          <a:lstStyle/>
+          <a:p>
+            <a:pPr indent="0" marL="0">
+              <a:buNone/>
+            </a:pPr>
+            <a:r>
+              <a:rPr lang="en-US" sz="1600" b="1" dirty="0">
+                <a:solidFill>
+                  <a:srgbClr val="D23F4E"/>
+                </a:solidFill>
+                <a:latin typeface="微软雅黑" pitchFamily="34" charset="0"/>
+                <a:ea typeface="微软雅黑" pitchFamily="34" charset="-122"/>
+                <a:cs typeface="微软雅黑" pitchFamily="34" charset="-120"/>
+              </a:rPr>
+              <a:t>代价</a:t>
+            </a:r>
+            <a:endParaRPr lang="en-US" sz="1600" dirty="0"/>
+          </a:p>
+        </p:txBody>
+      </p:sp>
+      <p:sp>
+        <p:nvSpPr>
+          <p:cNvPr id="10" name="Text 8"/>
+          <p:cNvSpPr/>
+          <p:nvPr/>
+        </p:nvSpPr>
+        <p:spPr>
+          <a:xfrm>
+            <a:off x="6569964" y="3035808"/>
+            <a:ext cx="4869180" cy="635508"/>
           </a:xfrm>
           <a:prstGeom prst="rect">
             <a:avLst/>
@@ -7805,56 +7816,17 @@
               <a:buNone/>
             </a:pPr>
             <a:r>
-              <a:rPr lang="en-US" sz="1400" dirty="0">
-                <a:solidFill>
-                  <a:srgbClr val="8A929E"/>
-                </a:solidFill>
-                <a:latin typeface="微软雅黑" pitchFamily="34" charset="0"/>
-                <a:ea typeface="微软雅黑" pitchFamily="34" charset="-122"/>
-                <a:cs typeface="微软雅黑" pitchFamily="34" charset="-120"/>
-              </a:rPr>
-              <a:t>长任务合计 728 ms → 53 ms（−93%），最长掉帧 526 ms → 60 ms（−89%）</a:t>
-            </a:r>
-            <a:endParaRPr lang="en-US" sz="1400" dirty="0"/>
-          </a:p>
-        </p:txBody>
-      </p:sp>
-      <p:sp>
-        <p:nvSpPr>
-          <p:cNvPr id="10" name="Text 8"/>
-          <p:cNvSpPr/>
-          <p:nvPr/>
-        </p:nvSpPr>
-        <p:spPr>
-          <a:xfrm>
-            <a:off x="548640" y="4416552"/>
-            <a:ext cx="2194560" cy="457200"/>
-          </a:xfrm>
-          <a:prstGeom prst="rect">
-            <a:avLst/>
-          </a:prstGeom>
-          <a:noFill/>
-          <a:ln/>
-        </p:spPr>
-        <p:txBody>
-          <a:bodyPr wrap="square" lIns="0" tIns="0" rIns="0" bIns="0" rtlCol="0" anchor="t"/>
-          <a:lstStyle/>
-          <a:p>
-            <a:pPr indent="0" marL="0">
-              <a:buNone/>
-            </a:pPr>
-            <a:r>
-              <a:rPr lang="en-US" sz="1400" b="1" dirty="0">
-                <a:solidFill>
-                  <a:srgbClr val="FFFFFF"/>
-                </a:solidFill>
-                <a:latin typeface="微软雅黑" pitchFamily="34" charset="0"/>
-                <a:ea typeface="微软雅黑" pitchFamily="34" charset="-122"/>
-                <a:cs typeface="微软雅黑" pitchFamily="34" charset="-120"/>
-              </a:rPr>
-              <a:t>画布 DOM</a:t>
-            </a:r>
-            <a:endParaRPr lang="en-US" sz="1400" dirty="0"/>
+              <a:rPr lang="en-US" sz="1500" dirty="0">
+                <a:solidFill>
+                  <a:srgbClr val="545B66"/>
+                </a:solidFill>
+                <a:latin typeface="微软雅黑" pitchFamily="34" charset="0"/>
+                <a:ea typeface="微软雅黑" pitchFamily="34" charset="-122"/>
+                <a:cs typeface="微软雅黑" pitchFamily="34" charset="-120"/>
+              </a:rPr>
+              <a:t>外壳文件长到 3028 行，卡片分派是一条 16 段的 v-if 链；只有 6 张卡片拆成了独立组件。</a:t>
+            </a:r>
+            <a:endParaRPr lang="en-US" sz="1500" dirty="0"/>
           </a:p>
         </p:txBody>
       </p:sp>
@@ -7866,118 +7838,40 @@
         </p:nvSpPr>
         <p:spPr>
           <a:xfrm>
-            <a:off x="2743200" y="4416552"/>
-            <a:ext cx="8805672" cy="336804"/>
-          </a:xfrm>
-          <a:prstGeom prst="rect">
-            <a:avLst/>
-          </a:prstGeom>
-          <a:noFill/>
-          <a:ln/>
-        </p:spPr>
-        <p:txBody>
-          <a:bodyPr wrap="square" lIns="0" tIns="0" rIns="0" bIns="0" rtlCol="0" anchor="t"/>
-          <a:lstStyle/>
-          <a:p>
-            <a:pPr indent="0" marL="0">
-              <a:buNone/>
-            </a:pPr>
-            <a:r>
-              <a:rPr lang="en-US" sz="1400" dirty="0">
-                <a:solidFill>
-                  <a:srgbClr val="8A929E"/>
-                </a:solidFill>
-                <a:latin typeface="微软雅黑" pitchFamily="34" charset="0"/>
-                <a:ea typeface="微软雅黑" pitchFamily="34" charset="-122"/>
-                <a:cs typeface="微软雅黑" pitchFamily="34" charset="-120"/>
-              </a:rPr>
-              <a:t>8,926 → 2,099 个元素（−76%）；视口内只渲染 36 个节点，其余不再进 DOM</a:t>
-            </a:r>
-            <a:endParaRPr lang="en-US" sz="1400" dirty="0"/>
+            <a:off x="457200" y="4434840"/>
+            <a:ext cx="11274552" cy="457200"/>
+          </a:xfrm>
+          <a:prstGeom prst="rect">
+            <a:avLst/>
+          </a:prstGeom>
+          <a:noFill/>
+          <a:ln/>
+        </p:spPr>
+        <p:txBody>
+          <a:bodyPr wrap="square" lIns="0" tIns="0" rIns="0" bIns="0" rtlCol="0" anchor="ctr"/>
+          <a:lstStyle/>
+          <a:p>
+            <a:pPr indent="0" marL="0">
+              <a:buNone/>
+            </a:pPr>
+            <a:r>
+              <a:rPr lang="en-US" sz="1800" b="1" dirty="0">
+                <a:solidFill>
+                  <a:srgbClr val="16181D"/>
+                </a:solidFill>
+                <a:latin typeface="微软雅黑" pitchFamily="34" charset="0"/>
+                <a:ea typeface="微软雅黑" pitchFamily="34" charset="-122"/>
+                <a:cs typeface="微软雅黑" pitchFamily="34" charset="-120"/>
+              </a:rPr>
+              <a:t>要决策的是边界：哪些该共享外壳，哪些该拆成卡片</a:t>
+            </a:r>
+            <a:endParaRPr lang="en-US" sz="1800" dirty="0"/>
           </a:p>
         </p:txBody>
       </p:sp>
       <p:sp>
         <p:nvSpPr>
           <p:cNvPr id="12" name="Text 10"/>
-          <p:cNvSpPr/>
-          <p:nvPr/>
-        </p:nvSpPr>
-        <p:spPr>
-          <a:xfrm>
-            <a:off x="548640" y="5312664"/>
-            <a:ext cx="2194560" cy="457200"/>
-          </a:xfrm>
-          <a:prstGeom prst="rect">
-            <a:avLst/>
-          </a:prstGeom>
-          <a:noFill/>
-          <a:ln/>
-        </p:spPr>
-        <p:txBody>
-          <a:bodyPr wrap="square" lIns="0" tIns="0" rIns="0" bIns="0" rtlCol="0" anchor="t"/>
-          <a:lstStyle/>
-          <a:p>
-            <a:pPr indent="0" marL="0">
-              <a:buNone/>
-            </a:pPr>
-            <a:r>
-              <a:rPr lang="en-US" sz="1400" b="1" dirty="0">
-                <a:solidFill>
-                  <a:srgbClr val="FFFFFF"/>
-                </a:solidFill>
-                <a:latin typeface="微软雅黑" pitchFamily="34" charset="0"/>
-                <a:ea typeface="微软雅黑" pitchFamily="34" charset="-122"/>
-                <a:cs typeface="微软雅黑" pitchFamily="34" charset="-120"/>
-              </a:rPr>
-              <a:t>没改善的</a:t>
-            </a:r>
-            <a:endParaRPr lang="en-US" sz="1400" dirty="0"/>
-          </a:p>
-        </p:txBody>
-      </p:sp>
-      <p:sp>
-        <p:nvSpPr>
-          <p:cNvPr id="13" name="Text 11"/>
-          <p:cNvSpPr/>
-          <p:nvPr/>
-        </p:nvSpPr>
-        <p:spPr>
-          <a:xfrm>
-            <a:off x="2743200" y="5312664"/>
-            <a:ext cx="8805672" cy="336804"/>
-          </a:xfrm>
-          <a:prstGeom prst="rect">
-            <a:avLst/>
-          </a:prstGeom>
-          <a:noFill/>
-          <a:ln/>
-        </p:spPr>
-        <p:txBody>
-          <a:bodyPr wrap="square" lIns="0" tIns="0" rIns="0" bIns="0" rtlCol="0" anchor="t"/>
-          <a:lstStyle/>
-          <a:p>
-            <a:pPr indent="0" marL="0">
-              <a:buNone/>
-            </a:pPr>
-            <a:r>
-              <a:rPr lang="en-US" sz="1400" dirty="0">
-                <a:solidFill>
-                  <a:srgbClr val="8A929E"/>
-                </a:solidFill>
-                <a:latin typeface="微软雅黑" pitchFamily="34" charset="0"/>
-                <a:ea typeface="微软雅黑" pitchFamily="34" charset="-122"/>
-                <a:cs typeface="微软雅黑" pitchFamily="34" charset="-120"/>
-              </a:rPr>
-              <a:t>首屏把 200 个节点塞进 DOM：2,250 ms → 2,340 ms —— 裁剪省的是渲染，不是建对象</a:t>
-            </a:r>
-            <a:endParaRPr lang="en-US" sz="1400" dirty="0"/>
-          </a:p>
-        </p:txBody>
-      </p:sp>
-      <p:sp>
-        <p:nvSpPr>
-          <p:cNvPr id="14" name="Text 12"/>
           <p:cNvSpPr/>
           <p:nvPr/>
         </p:nvSpPr>
@@ -8002,13 +7896,13 @@
             <a:r>
               <a:rPr lang="en-US" sz="950" dirty="0">
                 <a:solidFill>
-                  <a:srgbClr val="8A929E"/>
-                </a:solidFill>
-                <a:latin typeface="微软雅黑" pitchFamily="34" charset="0"/>
-                <a:ea typeface="微软雅黑" pitchFamily="34" charset="-122"/>
-                <a:cs typeface="微软雅黑" pitchFamily="34" charset="-120"/>
-              </a:rPr>
-              <a:t>同一张图、同一台机器、同一组指标，每改一处单独重测；口径与三处改动见 docs/research/canvas-performance-optimization.md</a:t>
+                  <a:srgbClr val="545B66"/>
+                </a:solidFill>
+                <a:latin typeface="微软雅黑" pitchFamily="34" charset="0"/>
+                <a:ea typeface="微软雅黑" pitchFamily="34" charset="-122"/>
+                <a:cs typeface="微软雅黑" pitchFamily="34" charset="-120"/>
+              </a:rPr>
+              <a:t>FlowCanvas.vue 只注册 1 个 nodeType（:93）；卡片分派见 ScribeNode.vue（3028 行，:1014 起 16 段分支）</a:t>
             </a:r>
             <a:endParaRPr lang="en-US" sz="950" dirty="0"/>
           </a:p>
@@ -8079,7 +7973,7 @@
                 <a:ea typeface="微软雅黑" pitchFamily="34" charset="-122"/>
                 <a:cs typeface="微软雅黑" pitchFamily="34" charset="-120"/>
               </a:rPr>
-              <a:t>01 / 一次运行把界面按在地上 32 秒</a:t>
+              <a:t>01 / 节点编排画布</a:t>
             </a:r>
             <a:endParaRPr lang="en-US" sz="1200" dirty="0"/>
           </a:p>
@@ -8118,7 +8012,7 @@
                 <a:ea typeface="微软雅黑" pitchFamily="34" charset="-122"/>
                 <a:cs typeface="微软雅黑" pitchFamily="34" charset="-120"/>
               </a:rPr>
-              <a:t>每个事件都重建整张图</a:t>
+              <a:t>快照式撤销，和它带来的两个副作用</a:t>
             </a:r>
             <a:endParaRPr lang="en-US" sz="3000" dirty="0"/>
           </a:p>
@@ -8132,24 +8026,24 @@
         </p:nvSpPr>
         <p:spPr>
           <a:xfrm>
-            <a:off x="457200" y="1719072"/>
-            <a:ext cx="11274552" cy="635508"/>
-          </a:xfrm>
-          <a:prstGeom prst="rect">
-            <a:avLst/>
-          </a:prstGeom>
-          <a:noFill/>
-          <a:ln/>
-        </p:spPr>
-        <p:txBody>
-          <a:bodyPr wrap="square" lIns="0" tIns="0" rIns="0" bIns="0" rtlCol="0" anchor="t"/>
-          <a:lstStyle/>
-          <a:p>
-            <a:pPr indent="0" marL="0">
-              <a:buNone/>
-            </a:pPr>
-            <a:r>
-              <a:rPr lang="en-US" sz="1500" dirty="0">
+            <a:off x="457200" y="1600200"/>
+            <a:ext cx="11274552" cy="390144"/>
+          </a:xfrm>
+          <a:prstGeom prst="rect">
+            <a:avLst/>
+          </a:prstGeom>
+          <a:noFill/>
+          <a:ln/>
+        </p:spPr>
+        <p:txBody>
+          <a:bodyPr wrap="square" lIns="0" tIns="0" rIns="0" bIns="0" rtlCol="0" anchor="ctr"/>
+          <a:lstStyle/>
+          <a:p>
+            <a:pPr indent="0" marL="0">
+              <a:buNone/>
+            </a:pPr>
+            <a:r>
+              <a:rPr lang="en-US" sz="1600" dirty="0">
                 <a:solidFill>
                   <a:srgbClr val="16181D"/>
                 </a:solidFill>
@@ -8157,22 +8051,61 @@
                 <a:ea typeface="微软雅黑" pitchFamily="34" charset="-122"/>
                 <a:cs typeface="微软雅黑" pitchFamily="34" charset="-120"/>
               </a:rPr>
-              <a:t>一次运行要发几百个事件。原来每个事件都执行一次 nodesRef.value = nodesRef.value.map(...)，数组一换引用，画布就重新解析全部 200 个节点——几百次叠加，成了单个 32.7 秒的长任务。</a:t>
-            </a:r>
-            <a:endParaRPr lang="en-US" sz="1500" dirty="0"/>
-          </a:p>
-        </p:txBody>
-      </p:sp>
-      <p:sp>
-        <p:nvSpPr>
-          <p:cNvPr id="5" name="Shape 3"/>
-          <p:cNvSpPr/>
-          <p:nvPr/>
-        </p:nvSpPr>
-        <p:spPr>
-          <a:xfrm>
-            <a:off x="457200" y="2560320"/>
-            <a:ext cx="5454396" cy="1828800"/>
+              <a:t>不记命令，直接存整图快照；上限 50 步，出图时把运行态字段剥掉，刷新后不会卡在运行中。</a:t>
+            </a:r>
+            <a:endParaRPr lang="en-US" sz="1600" dirty="0"/>
+          </a:p>
+        </p:txBody>
+      </p:sp>
+      <p:sp>
+        <p:nvSpPr>
+          <p:cNvPr id="5" name="Text 3"/>
+          <p:cNvSpPr/>
+          <p:nvPr/>
+        </p:nvSpPr>
+        <p:spPr>
+          <a:xfrm>
+            <a:off x="457200" y="2103120"/>
+            <a:ext cx="11274552" cy="425196"/>
+          </a:xfrm>
+          <a:prstGeom prst="rect">
+            <a:avLst/>
+          </a:prstGeom>
+          <a:noFill/>
+          <a:ln/>
+        </p:spPr>
+        <p:txBody>
+          <a:bodyPr wrap="square" lIns="0" tIns="0" rIns="0" bIns="0" rtlCol="0" anchor="ctr"/>
+          <a:lstStyle/>
+          <a:p>
+            <a:pPr indent="0" marL="0">
+              <a:buNone/>
+            </a:pPr>
+            <a:r>
+              <a:rPr lang="en-US" sz="1800" b="1" dirty="0">
+                <a:solidFill>
+                  <a:srgbClr val="16181D"/>
+                </a:solidFill>
+                <a:latin typeface="微软雅黑" pitchFamily="34" charset="0"/>
+                <a:ea typeface="微软雅黑" pitchFamily="34" charset="-122"/>
+                <a:cs typeface="微软雅黑" pitchFamily="34" charset="-120"/>
+              </a:rPr>
+              <a:t>提交走双通道：输入框逐字改图但不记历史，失焦时才提交一次历史。</a:t>
+            </a:r>
+            <a:endParaRPr lang="en-US" sz="1800" dirty="0"/>
+          </a:p>
+        </p:txBody>
+      </p:sp>
+      <p:sp>
+        <p:nvSpPr>
+          <p:cNvPr id="6" name="Shape 4"/>
+          <p:cNvSpPr/>
+          <p:nvPr/>
+        </p:nvSpPr>
+        <p:spPr>
+          <a:xfrm>
+            <a:off x="457200" y="2788920"/>
+            <a:ext cx="5454396" cy="1481328"/>
           </a:xfrm>
           <a:prstGeom prst="rect">
             <a:avLst/>
@@ -8190,13 +8123,13 @@
       </p:sp>
       <p:sp>
         <p:nvSpPr>
-          <p:cNvPr id="6" name="Text 4"/>
-          <p:cNvSpPr/>
-          <p:nvPr/>
-        </p:nvSpPr>
-        <p:spPr>
-          <a:xfrm>
-            <a:off x="749808" y="2743200"/>
+          <p:cNvPr id="7" name="Text 5"/>
+          <p:cNvSpPr/>
+          <p:nvPr/>
+        </p:nvSpPr>
+        <p:spPr>
+          <a:xfrm>
+            <a:off x="749808" y="2971800"/>
             <a:ext cx="4869180" cy="384048"/>
           </a:xfrm>
           <a:prstGeom prst="rect">
@@ -8215,13 +8148,13 @@
             <a:r>
               <a:rPr lang="en-US" sz="1600" b="1" dirty="0">
                 <a:solidFill>
-                  <a:srgbClr val="16181D"/>
-                </a:solidFill>
-                <a:latin typeface="微软雅黑" pitchFamily="34" charset="0"/>
-                <a:ea typeface="微软雅黑" pitchFamily="34" charset="-122"/>
-                <a:cs typeface="微软雅黑" pitchFamily="34" charset="-120"/>
-              </a:rPr>
-              <a:t>改动一 · 只渲染看得见的节点</a:t>
+                  <a:srgbClr val="D23F4E"/>
+                </a:solidFill>
+                <a:latin typeface="微软雅黑" pitchFamily="34" charset="0"/>
+                <a:ea typeface="微软雅黑" pitchFamily="34" charset="-122"/>
+                <a:cs typeface="微软雅黑" pitchFamily="34" charset="-120"/>
+              </a:rPr>
+              <a:t>副作用一</a:t>
             </a:r>
             <a:endParaRPr lang="en-US" sz="1600" dirty="0"/>
           </a:p>
@@ -8229,14 +8162,14 @@
       </p:sp>
       <p:sp>
         <p:nvSpPr>
-          <p:cNvPr id="7" name="Text 5"/>
-          <p:cNvSpPr/>
-          <p:nvPr/>
-        </p:nvSpPr>
-        <p:spPr>
-          <a:xfrm>
-            <a:off x="749808" y="3182112"/>
-            <a:ext cx="4869180" cy="1133856"/>
+          <p:cNvPr id="8" name="Text 6"/>
+          <p:cNvSpPr/>
+          <p:nvPr/>
+        </p:nvSpPr>
+        <p:spPr>
+          <a:xfrm>
+            <a:off x="749808" y="3447288"/>
+            <a:ext cx="4869180" cy="635508"/>
           </a:xfrm>
           <a:prstGeom prst="rect">
             <a:avLst/>
@@ -8252,7 +8185,7 @@
               <a:buNone/>
             </a:pPr>
             <a:r>
-              <a:rPr lang="en-US" sz="1400" dirty="0">
+              <a:rPr lang="en-US" sz="1500" dirty="0">
                 <a:solidFill>
                   <a:srgbClr val="545B66"/>
                 </a:solidFill>
@@ -8260,22 +8193,22 @@
                 <a:ea typeface="微软雅黑" pitchFamily="34" charset="-122"/>
                 <a:cs typeface="微软雅黑" pitchFamily="34" charset="-120"/>
               </a:rPr>
-              <a:t>Vue Flow 的 onlyRenderVisibleElements 默认就是关的。打开后视口内只渲染 36 个节点，DOM 从 8,926 降到 2,099；主线程阻塞 32,655 → 11,633 ms，砍掉六成。</a:t>
-            </a:r>
-            <a:endParaRPr lang="en-US" sz="1400" dirty="0"/>
-          </a:p>
-        </p:txBody>
-      </p:sp>
-      <p:sp>
-        <p:nvSpPr>
-          <p:cNvPr id="8" name="Shape 6"/>
-          <p:cNvSpPr/>
-          <p:nvPr/>
-        </p:nvSpPr>
-        <p:spPr>
-          <a:xfrm>
-            <a:off x="6277356" y="2560320"/>
-            <a:ext cx="5454396" cy="1828800"/>
+              <a:t>提交时不做去重，点进输入框再点空白会压入一模一样的快照，用户按撤销会觉得没反应。</a:t>
+            </a:r>
+            <a:endParaRPr lang="en-US" sz="1500" dirty="0"/>
+          </a:p>
+        </p:txBody>
+      </p:sp>
+      <p:sp>
+        <p:nvSpPr>
+          <p:cNvPr id="9" name="Shape 7"/>
+          <p:cNvSpPr/>
+          <p:nvPr/>
+        </p:nvSpPr>
+        <p:spPr>
+          <a:xfrm>
+            <a:off x="6277356" y="2788920"/>
+            <a:ext cx="5454396" cy="1481328"/>
           </a:xfrm>
           <a:prstGeom prst="rect">
             <a:avLst/>
@@ -8293,13 +8226,13 @@
       </p:sp>
       <p:sp>
         <p:nvSpPr>
-          <p:cNvPr id="9" name="Text 7"/>
-          <p:cNvSpPr/>
-          <p:nvPr/>
-        </p:nvSpPr>
-        <p:spPr>
-          <a:xfrm>
-            <a:off x="6569964" y="2743200"/>
+          <p:cNvPr id="10" name="Text 8"/>
+          <p:cNvSpPr/>
+          <p:nvPr/>
+        </p:nvSpPr>
+        <p:spPr>
+          <a:xfrm>
+            <a:off x="6569964" y="2971800"/>
             <a:ext cx="4869180" cy="384048"/>
           </a:xfrm>
           <a:prstGeom prst="rect">
@@ -8318,13 +8251,13 @@
             <a:r>
               <a:rPr lang="en-US" sz="1600" b="1" dirty="0">
                 <a:solidFill>
-                  <a:srgbClr val="16181D"/>
-                </a:solidFill>
-                <a:latin typeface="微软雅黑" pitchFamily="34" charset="0"/>
-                <a:ea typeface="微软雅黑" pitchFamily="34" charset="-122"/>
-                <a:cs typeface="微软雅黑" pitchFamily="34" charset="-120"/>
-              </a:rPr>
-              <a:t>改动二 · 同一帧的事件合成一次更新</a:t>
+                  <a:srgbClr val="D23F4E"/>
+                </a:solidFill>
+                <a:latin typeface="微软雅黑" pitchFamily="34" charset="0"/>
+                <a:ea typeface="微软雅黑" pitchFamily="34" charset="-122"/>
+                <a:cs typeface="微软雅黑" pitchFamily="34" charset="-120"/>
+              </a:rPr>
+              <a:t>副作用二</a:t>
             </a:r>
             <a:endParaRPr lang="en-US" sz="1600" dirty="0"/>
           </a:p>
@@ -8332,14 +8265,14 @@
       </p:sp>
       <p:sp>
         <p:nvSpPr>
-          <p:cNvPr id="10" name="Text 8"/>
-          <p:cNvSpPr/>
-          <p:nvPr/>
-        </p:nvSpPr>
-        <p:spPr>
-          <a:xfrm>
-            <a:off x="6569964" y="3182112"/>
-            <a:ext cx="4869180" cy="1133856"/>
+          <p:cNvPr id="11" name="Text 9"/>
+          <p:cNvSpPr/>
+          <p:nvPr/>
+        </p:nvSpPr>
+        <p:spPr>
+          <a:xfrm>
+            <a:off x="6569964" y="3447288"/>
+            <a:ext cx="4869180" cy="635508"/>
           </a:xfrm>
           <a:prstGeom prst="rect">
             <a:avLst/>
@@ -8355,7 +8288,7 @@
               <a:buNone/>
             </a:pPr>
             <a:r>
-              <a:rPr lang="en-US" sz="1400" dirty="0">
+              <a:rPr lang="en-US" sz="1500" dirty="0">
                 <a:solidFill>
                   <a:srgbClr val="545B66"/>
                 </a:solidFill>
@@ -8363,79 +8296,15 @@
                 <a:ea typeface="微软雅黑" pitchFamily="34" charset="-122"/>
                 <a:cs typeface="微软雅黑" pitchFamily="34" charset="-120"/>
               </a:rPr>
-              <a:t>事件先记进待办表，每个动画帧只刷一次，而且只替换受影响的那几个节点对象，其余保持同一引用。11,633 → 264 ms，再砍掉九成八。</a:t>
-            </a:r>
-            <a:endParaRPr lang="en-US" sz="1400" dirty="0"/>
-          </a:p>
-        </p:txBody>
-      </p:sp>
-      <p:sp>
-        <p:nvSpPr>
-          <p:cNvPr id="11" name="Shape 9"/>
-          <p:cNvSpPr/>
-          <p:nvPr/>
-        </p:nvSpPr>
-        <p:spPr>
-          <a:xfrm>
-            <a:off x="457200" y="4937760"/>
-            <a:ext cx="11274552" cy="777240"/>
-          </a:xfrm>
-          <a:prstGeom prst="rect">
-            <a:avLst/>
-          </a:prstGeom>
-          <a:solidFill>
-            <a:srgbClr val="F4F5F6"/>
-          </a:solidFill>
-          <a:ln w="12700">
-            <a:solidFill>
-              <a:srgbClr val="E4E7EB"/>
-            </a:solidFill>
-            <a:prstDash val="solid"/>
-          </a:ln>
-        </p:spPr>
+              <a:t>视角本身也在快照里，所以撤销会顺带把镜头弹回当时的画面，这点容易被忽略。</a:t>
+            </a:r>
+            <a:endParaRPr lang="en-US" sz="1500" dirty="0"/>
+          </a:p>
+        </p:txBody>
       </p:sp>
       <p:sp>
         <p:nvSpPr>
           <p:cNvPr id="12" name="Text 10"/>
-          <p:cNvSpPr/>
-          <p:nvPr/>
-        </p:nvSpPr>
-        <p:spPr>
-          <a:xfrm>
-            <a:off x="777240" y="5029200"/>
-            <a:ext cx="10634472" cy="594360"/>
-          </a:xfrm>
-          <a:prstGeom prst="rect">
-            <a:avLst/>
-          </a:prstGeom>
-          <a:noFill/>
-          <a:ln/>
-        </p:spPr>
-        <p:txBody>
-          <a:bodyPr wrap="square" lIns="0" tIns="0" rIns="0" bIns="0" rtlCol="0" anchor="ctr"/>
-          <a:lstStyle/>
-          <a:p>
-            <a:pPr indent="0" marL="0">
-              <a:buNone/>
-            </a:pPr>
-            <a:r>
-              <a:rPr lang="en-US" sz="1600" b="1" dirty="0">
-                <a:solidFill>
-                  <a:srgbClr val="16181D"/>
-                </a:solidFill>
-                <a:latin typeface="微软雅黑" pitchFamily="34" charset="0"/>
-                <a:ea typeface="微软雅黑" pitchFamily="34" charset="-122"/>
-                <a:cs typeface="微软雅黑" pitchFamily="34" charset="-120"/>
-              </a:rPr>
-              <a:t>直觉是「增量更新更省」，但增量把正确性押在「事件不会丢」上，而事件一定会丢</a:t>
-            </a:r>
-            <a:endParaRPr lang="en-US" sz="1600" dirty="0"/>
-          </a:p>
-        </p:txBody>
-      </p:sp>
-      <p:sp>
-        <p:nvSpPr>
-          <p:cNvPr id="13" name="Text 11"/>
           <p:cNvSpPr/>
           <p:nvPr/>
         </p:nvSpPr>
@@ -8466,7 +8335,7 @@
                 <a:ea typeface="微软雅黑" pitchFamily="34" charset="-122"/>
                 <a:cs typeface="微软雅黑" pitchFamily="34" charset="-120"/>
               </a:rPr>
-              <a:t>合流见 FlowCanvas.vue:762 的 queueRunPatch 与 :751 的 flushRunEvents；视口裁剪见同文件模板 :908</a:t>
+              <a:t>快照与 50 步上限见 FlowCanvas.vue:82-111；失焦提交约定见 utils/flow.ts:39-40</a:t>
             </a:r>
             <a:endParaRPr lang="en-US" sz="950" dirty="0"/>
           </a:p>
@@ -8537,7 +8406,7 @@
                 <a:ea typeface="微软雅黑" pitchFamily="34" charset="-122"/>
                 <a:cs typeface="微软雅黑" pitchFamily="34" charset="-120"/>
               </a:rPr>
-              <a:t>01 / 一次运行把界面按在地上 32 秒</a:t>
+              <a:t>01 / 节点编排画布</a:t>
             </a:r>
             <a:endParaRPr lang="en-US" sz="1200" dirty="0"/>
           </a:p>

--- a/sharing/out/ScribeFlow-前端技术分享.pptx
+++ b/sharing/out/ScribeFlow-前端技术分享.pptx
@@ -2460,7 +2460,7 @@
                 <a:ea typeface="微软雅黑" pitchFamily="34" charset="-122"/>
                 <a:cs typeface="微软雅黑" pitchFamily="34" charset="-120"/>
               </a:rPr>
-              <a:t>三件在这个产品里最难做的前端事</a:t>
+              <a:t>一个画布式笔记工具：产品形态，与用户会碰到的两类事</a:t>
             </a:r>
             <a:endParaRPr lang="en-US" sz="2200" dirty="0"/>
           </a:p>
@@ -2609,7 +2609,7 @@
                 <a:ea typeface="微软雅黑" pitchFamily="34" charset="-122"/>
                 <a:cs typeface="微软雅黑" pitchFamily="34" charset="-120"/>
               </a:rPr>
-              <a:t>02 / 推送会撒谎，数据库不会</a:t>
+              <a:t>02 / 跑的时候</a:t>
             </a:r>
             <a:endParaRPr lang="en-US" sz="1200" dirty="0"/>
           </a:p>
@@ -2648,7 +2648,7 @@
                 <a:ea typeface="微软雅黑" pitchFamily="34" charset="-122"/>
                 <a:cs typeface="微软雅黑" pitchFamily="34" charset="-120"/>
               </a:rPr>
-              <a:t>放弃增量更新，换来重连正确</a:t>
+              <a:t>服务重启，把跑了一半的运行记成「你取消了」</a:t>
             </a:r>
             <a:endParaRPr lang="en-US" sz="3000" dirty="0"/>
           </a:p>
@@ -2656,14 +2656,53 @@
       </p:sp>
       <p:sp>
         <p:nvSpPr>
-          <p:cNvPr id="4" name="Shape 2"/>
-          <p:cNvSpPr/>
-          <p:nvPr/>
-        </p:nvSpPr>
-        <p:spPr>
-          <a:xfrm>
-            <a:off x="457200" y="2194560"/>
-            <a:ext cx="5454396" cy="1828800"/>
+          <p:cNvPr id="4" name="Text 2"/>
+          <p:cNvSpPr/>
+          <p:nvPr/>
+        </p:nvSpPr>
+        <p:spPr>
+          <a:xfrm>
+            <a:off x="457200" y="1719072"/>
+            <a:ext cx="11274552" cy="372618"/>
+          </a:xfrm>
+          <a:prstGeom prst="rect">
+            <a:avLst/>
+          </a:prstGeom>
+          <a:noFill/>
+          <a:ln/>
+        </p:spPr>
+        <p:txBody>
+          <a:bodyPr wrap="square" lIns="0" tIns="0" rIns="0" bIns="0" rtlCol="0" anchor="ctr"/>
+          <a:lstStyle/>
+          <a:p>
+            <a:pPr indent="0" marL="0">
+              <a:buNone/>
+            </a:pPr>
+            <a:r>
+              <a:rPr lang="en-US" sz="1500" dirty="0">
+                <a:solidFill>
+                  <a:srgbClr val="16181D"/>
+                </a:solidFill>
+                <a:latin typeface="微软雅黑" pitchFamily="34" charset="0"/>
+                <a:ea typeface="微软雅黑" pitchFamily="34" charset="-122"/>
+                <a:cs typeface="微软雅黑" pitchFamily="34" charset="-120"/>
+              </a:rPr>
+              <a:t>用户看到的：一条明明产出过东西的运行，记录里写着「已取消」——像是自己点的。</a:t>
+            </a:r>
+            <a:endParaRPr lang="en-US" sz="1500" dirty="0"/>
+          </a:p>
+        </p:txBody>
+      </p:sp>
+      <p:sp>
+        <p:nvSpPr>
+          <p:cNvPr id="5" name="Shape 3"/>
+          <p:cNvSpPr/>
+          <p:nvPr/>
+        </p:nvSpPr>
+        <p:spPr>
+          <a:xfrm>
+            <a:off x="457200" y="2331720"/>
+            <a:ext cx="5454396" cy="1463040"/>
           </a:xfrm>
           <a:prstGeom prst="rect">
             <a:avLst/>
@@ -2681,13 +2720,13 @@
       </p:sp>
       <p:sp>
         <p:nvSpPr>
-          <p:cNvPr id="5" name="Text 3"/>
-          <p:cNvSpPr/>
-          <p:nvPr/>
-        </p:nvSpPr>
-        <p:spPr>
-          <a:xfrm>
-            <a:off x="749808" y="2377440"/>
+          <p:cNvPr id="6" name="Text 4"/>
+          <p:cNvSpPr/>
+          <p:nvPr/>
+        </p:nvSpPr>
+        <p:spPr>
+          <a:xfrm>
+            <a:off x="749808" y="2514600"/>
             <a:ext cx="4869180" cy="384048"/>
           </a:xfrm>
           <a:prstGeom prst="rect">
@@ -2712,7 +2751,7 @@
                 <a:ea typeface="微软雅黑" pitchFamily="34" charset="-122"/>
                 <a:cs typeface="微软雅黑" pitchFamily="34" charset="-120"/>
               </a:rPr>
-              <a:t>增量更新 · 直觉做法</a:t>
+              <a:t>已取消 · 人自己停的</a:t>
             </a:r>
             <a:endParaRPr lang="en-US" sz="1600" dirty="0"/>
           </a:p>
@@ -2720,14 +2759,14 @@
       </p:sp>
       <p:sp>
         <p:nvSpPr>
-          <p:cNvPr id="6" name="Text 4"/>
-          <p:cNvSpPr/>
-          <p:nvPr/>
-        </p:nvSpPr>
-        <p:spPr>
-          <a:xfrm>
-            <a:off x="749808" y="2816352"/>
-            <a:ext cx="4869180" cy="1133856"/>
+          <p:cNvPr id="7" name="Text 5"/>
+          <p:cNvSpPr/>
+          <p:nvPr/>
+        </p:nvSpPr>
+        <p:spPr>
+          <a:xfrm>
+            <a:off x="749808" y="2953512"/>
+            <a:ext cx="4869180" cy="768096"/>
           </a:xfrm>
           <a:prstGeom prst="rect">
             <a:avLst/>
@@ -2751,39 +2790,22 @@
                 <a:ea typeface="微软雅黑" pitchFamily="34" charset="-122"/>
                 <a:cs typeface="微软雅黑" pitchFamily="34" charset="-120"/>
               </a:rPr>
-              <a:t>只传变化的那一点，看起来最省。</a:t>
+              <a:t>不该再提醒——用户知道刚才发生了什么，只需要记录留痕。</a:t>
             </a:r>
             <a:endParaRPr lang="en-US" sz="1400" dirty="0"/>
           </a:p>
-          <a:p>
-            <a:pPr indent="0" marL="0">
-              <a:buNone/>
-            </a:pPr>
-            <a:r>
-              <a:rPr lang="en-US" sz="1400" dirty="0">
-                <a:solidFill>
-                  <a:srgbClr val="545B66"/>
-                </a:solidFill>
-                <a:latin typeface="微软雅黑" pitchFamily="34" charset="0"/>
-                <a:ea typeface="微软雅黑" pitchFamily="34" charset="-122"/>
-                <a:cs typeface="微软雅黑" pitchFamily="34" charset="-120"/>
-              </a:rPr>
-              <a:t>但它要求「先收到全部前置事件」才算得对，于是重连就必须做事件重放——而这套系统的广播没有重放缓冲。</a:t>
-            </a:r>
-            <a:endParaRPr lang="en-US" sz="1400" dirty="0"/>
-          </a:p>
-        </p:txBody>
-      </p:sp>
-      <p:sp>
-        <p:nvSpPr>
-          <p:cNvPr id="7" name="Shape 5"/>
-          <p:cNvSpPr/>
-          <p:nvPr/>
-        </p:nvSpPr>
-        <p:spPr>
-          <a:xfrm>
-            <a:off x="6277356" y="2194560"/>
-            <a:ext cx="5454396" cy="1828800"/>
+        </p:txBody>
+      </p:sp>
+      <p:sp>
+        <p:nvSpPr>
+          <p:cNvPr id="8" name="Shape 6"/>
+          <p:cNvSpPr/>
+          <p:nvPr/>
+        </p:nvSpPr>
+        <p:spPr>
+          <a:xfrm>
+            <a:off x="6277356" y="2331720"/>
+            <a:ext cx="5454396" cy="1463040"/>
           </a:xfrm>
           <a:prstGeom prst="rect">
             <a:avLst/>
@@ -2801,13 +2823,13 @@
       </p:sp>
       <p:sp>
         <p:nvSpPr>
-          <p:cNvPr id="8" name="Text 6"/>
-          <p:cNvSpPr/>
-          <p:nvPr/>
-        </p:nvSpPr>
-        <p:spPr>
-          <a:xfrm>
-            <a:off x="6569964" y="2377440"/>
+          <p:cNvPr id="9" name="Text 7"/>
+          <p:cNvSpPr/>
+          <p:nvPr/>
+        </p:nvSpPr>
+        <p:spPr>
+          <a:xfrm>
+            <a:off x="6569964" y="2514600"/>
             <a:ext cx="4869180" cy="384048"/>
           </a:xfrm>
           <a:prstGeom prst="rect">
@@ -2826,13 +2848,13 @@
             <a:r>
               <a:rPr lang="en-US" sz="1600" b="1" dirty="0">
                 <a:solidFill>
-                  <a:srgbClr val="16181D"/>
-                </a:solidFill>
-                <a:latin typeface="微软雅黑" pitchFamily="34" charset="0"/>
-                <a:ea typeface="微软雅黑" pitchFamily="34" charset="-122"/>
-                <a:cs typeface="微软雅黑" pitchFamily="34" charset="-120"/>
-              </a:rPr>
-              <a:t>全量覆盖 · 实际做法</a:t>
+                  <a:srgbClr val="D23F4E"/>
+                </a:solidFill>
+                <a:latin typeface="微软雅黑" pitchFamily="34" charset="0"/>
+                <a:ea typeface="微软雅黑" pitchFamily="34" charset="-122"/>
+                <a:cs typeface="微软雅黑" pitchFamily="34" charset="-120"/>
+              </a:rPr>
+              <a:t>已中断 · 服务掐断的</a:t>
             </a:r>
             <a:endParaRPr lang="en-US" sz="1600" dirty="0"/>
           </a:p>
@@ -2840,14 +2862,14 @@
       </p:sp>
       <p:sp>
         <p:nvSpPr>
-          <p:cNvPr id="9" name="Text 7"/>
-          <p:cNvSpPr/>
-          <p:nvPr/>
-        </p:nvSpPr>
-        <p:spPr>
-          <a:xfrm>
-            <a:off x="6569964" y="2816352"/>
-            <a:ext cx="4869180" cy="1133856"/>
+          <p:cNvPr id="10" name="Text 8"/>
+          <p:cNvSpPr/>
+          <p:nvPr/>
+        </p:nvSpPr>
+        <p:spPr>
+          <a:xfrm>
+            <a:off x="6569964" y="2953512"/>
+            <a:ext cx="4869180" cy="768096"/>
           </a:xfrm>
           <a:prstGeom prst="rect">
             <a:avLst/>
@@ -2871,10 +2893,32 @@
                 <a:ea typeface="微软雅黑" pitchFamily="34" charset="-122"/>
                 <a:cs typeface="微软雅黑" pitchFamily="34" charset="-120"/>
               </a:rPr>
-              <a:t>每个事件构造补丁，整体覆盖字段。</a:t>
+              <a:t>要提醒，而且要让人一眼看出这次不是自己停的，产物还在。</a:t>
             </a:r>
             <a:endParaRPr lang="en-US" sz="1400" dirty="0"/>
           </a:p>
+        </p:txBody>
+      </p:sp>
+      <p:sp>
+        <p:nvSpPr>
+          <p:cNvPr id="11" name="Text 9"/>
+          <p:cNvSpPr/>
+          <p:nvPr/>
+        </p:nvSpPr>
+        <p:spPr>
+          <a:xfrm>
+            <a:off x="457200" y="4041648"/>
+            <a:ext cx="11274552" cy="355092"/>
+          </a:xfrm>
+          <a:prstGeom prst="rect">
+            <a:avLst/>
+          </a:prstGeom>
+          <a:noFill/>
+          <a:ln/>
+        </p:spPr>
+        <p:txBody>
+          <a:bodyPr wrap="square" lIns="0" tIns="0" rIns="0" bIns="0" rtlCol="0" anchor="ctr"/>
+          <a:lstStyle/>
           <a:p>
             <a:pPr indent="0" marL="0">
               <a:buNone/>
@@ -2888,7 +2932,7 @@
                 <a:ea typeface="微软雅黑" pitchFamily="34" charset="-122"/>
                 <a:cs typeface="微软雅黑" pitchFamily="34" charset="-120"/>
               </a:rPr>
-              <a:t>只给命中的节点建新对象，其余返回同一引用；重复、乱序的事件天然幂等，重连的正确性问题直接消失。</a:t>
+              <a:t>真实案例：run_3b007bff 里 4 个节点有 2 个已完成（2925 / 6558 字），2 个停在中途。</a:t>
             </a:r>
             <a:endParaRPr lang="en-US" sz="1400" dirty="0"/>
           </a:p>
@@ -2896,13 +2940,13 @@
       </p:sp>
       <p:sp>
         <p:nvSpPr>
-          <p:cNvPr id="10" name="Shape 8"/>
-          <p:cNvSpPr/>
-          <p:nvPr/>
-        </p:nvSpPr>
-        <p:spPr>
-          <a:xfrm>
-            <a:off x="457200" y="4709160"/>
+          <p:cNvPr id="12" name="Shape 10"/>
+          <p:cNvSpPr/>
+          <p:nvPr/>
+        </p:nvSpPr>
+        <p:spPr>
+          <a:xfrm>
+            <a:off x="457200" y="5029200"/>
             <a:ext cx="11274552" cy="777240"/>
           </a:xfrm>
           <a:prstGeom prst="rect">
@@ -2921,13 +2965,13 @@
       </p:sp>
       <p:sp>
         <p:nvSpPr>
-          <p:cNvPr id="11" name="Text 9"/>
-          <p:cNvSpPr/>
-          <p:nvPr/>
-        </p:nvSpPr>
-        <p:spPr>
-          <a:xfrm>
-            <a:off x="777240" y="4800600"/>
+          <p:cNvPr id="13" name="Text 11"/>
+          <p:cNvSpPr/>
+          <p:nvPr/>
+        </p:nvSpPr>
+        <p:spPr>
+          <a:xfrm>
+            <a:off x="777240" y="5120640"/>
             <a:ext cx="10634472" cy="594360"/>
           </a:xfrm>
           <a:prstGeom prst="rect">
@@ -2944,7 +2988,7 @@
               <a:buNone/>
             </a:pPr>
             <a:r>
-              <a:rPr lang="en-US" sz="1600" b="1" dirty="0">
+              <a:rPr lang="en-US" sz="1500" b="1" dirty="0">
                 <a:solidFill>
                   <a:srgbClr val="16181D"/>
                 </a:solidFill>
@@ -2952,15 +2996,15 @@
                 <a:ea typeface="微软雅黑" pitchFamily="34" charset="-122"/>
                 <a:cs typeface="微软雅黑" pitchFamily="34" charset="-120"/>
               </a:rPr>
-              <a:t>直觉是增量更省，但增量把正确性押在「事件不会丢」上，而事件一定会丢</a:t>
-            </a:r>
-            <a:endParaRPr lang="en-US" sz="1600" dirty="0"/>
-          </a:p>
-        </p:txBody>
-      </p:sp>
-      <p:sp>
-        <p:nvSpPr>
-          <p:cNvPr id="12" name="Text 10"/>
+              <a:t>运行记录也只写「名称 + 时间」：一列「成功 / 成功 / 已中断」里，成功每行重复等于没说</a:t>
+            </a:r>
+            <a:endParaRPr lang="en-US" sz="1500" dirty="0"/>
+          </a:p>
+        </p:txBody>
+      </p:sp>
+      <p:sp>
+        <p:nvSpPr>
+          <p:cNvPr id="14" name="Text 12"/>
           <p:cNvSpPr/>
           <p:nvPr/>
         </p:nvSpPr>
@@ -2991,7 +3035,7 @@
                 <a:ea typeface="微软雅黑" pitchFamily="34" charset="-122"/>
                 <a:cs typeface="微软雅黑" pitchFamily="34" charset="-120"/>
               </a:rPr>
-              <a:t>事件到状态的映射见 FlowCanvas.vue:768 的 applyRunEvent；补丁只命中受影响节点见同文件 :751-766</a:t>
+              <a:t>两个状态的语义与提醒规则见 lib/run-meta.ts 与 utils/run-alert.ts；记录只写名称与时间去见 components/workspace/RunRow.vue；由来见 CHANGELOG 2026-09-28</a:t>
             </a:r>
             <a:endParaRPr lang="en-US" sz="950" dirty="0"/>
           </a:p>
@@ -3062,7 +3106,7 @@
                 <a:ea typeface="微软雅黑" pitchFamily="34" charset="-122"/>
                 <a:cs typeface="微软雅黑" pitchFamily="34" charset="-120"/>
               </a:rPr>
-              <a:t>02 / 推送会撒谎，数据库不会</a:t>
+              <a:t>02 / 跑的时候</a:t>
             </a:r>
             <a:endParaRPr lang="en-US" sz="1200" dirty="0"/>
           </a:p>
@@ -3101,7 +3145,7 @@
                 <a:ea typeface="微软雅黑" pitchFamily="34" charset="-122"/>
                 <a:cs typeface="微软雅黑" pitchFamily="34" charset="-120"/>
               </a:rPr>
-              <a:t>连接这个动作，必须自带状态同步</a:t>
+              <a:t>换一条运行看，内容先消失、再出现</a:t>
             </a:r>
             <a:endParaRPr lang="en-US" sz="3000" dirty="0"/>
           </a:p>
@@ -3115,8 +3159,8 @@
         </p:nvSpPr>
         <p:spPr>
           <a:xfrm>
-            <a:off x="457200" y="1645920"/>
-            <a:ext cx="11274552" cy="670560"/>
+            <a:off x="548640" y="1645920"/>
+            <a:ext cx="2468880" cy="457200"/>
           </a:xfrm>
           <a:prstGeom prst="rect">
             <a:avLst/>
@@ -3132,7 +3176,7 @@
               <a:buNone/>
             </a:pPr>
             <a:r>
-              <a:rPr lang="en-US" sz="1600" dirty="0">
+              <a:rPr lang="en-US" sz="1400" b="1" dirty="0">
                 <a:solidFill>
                   <a:srgbClr val="16181D"/>
                 </a:solidFill>
@@ -3140,9 +3184,9 @@
                 <a:ea typeface="微软雅黑" pitchFamily="34" charset="-122"/>
                 <a:cs typeface="微软雅黑" pitchFamily="34" charset="-120"/>
               </a:rPr>
-              <a:t>后端的运行事件广播是一个内存集合，没有重放缓冲：运行结束 60 秒后整条记录就没了。</a:t>
-            </a:r>
-            <a:endParaRPr lang="en-US" sz="1600" dirty="0"/>
+              <a:t>用户看到的</a:t>
+            </a:r>
+            <a:endParaRPr lang="en-US" sz="1400" dirty="0"/>
           </a:p>
         </p:txBody>
       </p:sp>
@@ -3154,8 +3198,306 @@
         </p:nvSpPr>
         <p:spPr>
           <a:xfrm>
-            <a:off x="457200" y="2514600"/>
-            <a:ext cx="11274552" cy="425196"/>
+            <a:off x="3017520" y="1645920"/>
+            <a:ext cx="8531352" cy="336804"/>
+          </a:xfrm>
+          <a:prstGeom prst="rect">
+            <a:avLst/>
+          </a:prstGeom>
+          <a:noFill/>
+          <a:ln/>
+        </p:spPr>
+        <p:txBody>
+          <a:bodyPr wrap="square" lIns="0" tIns="0" rIns="0" bIns="0" rtlCol="0" anchor="t"/>
+          <a:lstStyle/>
+          <a:p>
+            <a:pPr indent="0" marL="0">
+              <a:buNone/>
+            </a:pPr>
+            <a:r>
+              <a:rPr lang="en-US" sz="1400" dirty="0">
+                <a:solidFill>
+                  <a:srgbClr val="545B66"/>
+                </a:solidFill>
+                <a:latin typeface="微软雅黑" pitchFamily="34" charset="0"/>
+                <a:ea typeface="微软雅黑" pitchFamily="34" charset="-122"/>
+                <a:cs typeface="微软雅黑" pitchFamily="34" charset="-120"/>
+              </a:rPr>
+              <a:t>点另一条运行，正文区先空一下再出内容——大约 100 毫秒的白</a:t>
+            </a:r>
+            <a:endParaRPr lang="en-US" sz="1400" dirty="0"/>
+          </a:p>
+        </p:txBody>
+      </p:sp>
+      <p:sp>
+        <p:nvSpPr>
+          <p:cNvPr id="6" name="Text 4"/>
+          <p:cNvSpPr/>
+          <p:nvPr/>
+        </p:nvSpPr>
+        <p:spPr>
+          <a:xfrm>
+            <a:off x="548640" y="2651760"/>
+            <a:ext cx="2468880" cy="457200"/>
+          </a:xfrm>
+          <a:prstGeom prst="rect">
+            <a:avLst/>
+          </a:prstGeom>
+          <a:noFill/>
+          <a:ln/>
+        </p:spPr>
+        <p:txBody>
+          <a:bodyPr wrap="square" lIns="0" tIns="0" rIns="0" bIns="0" rtlCol="0" anchor="t"/>
+          <a:lstStyle/>
+          <a:p>
+            <a:pPr indent="0" marL="0">
+              <a:buNone/>
+            </a:pPr>
+            <a:r>
+              <a:rPr lang="en-US" sz="1400" b="1" dirty="0">
+                <a:solidFill>
+                  <a:srgbClr val="16181D"/>
+                </a:solidFill>
+                <a:latin typeface="微软雅黑" pitchFamily="34" charset="0"/>
+                <a:ea typeface="微软雅黑" pitchFamily="34" charset="-122"/>
+                <a:cs typeface="微软雅黑" pitchFamily="34" charset="-120"/>
+              </a:rPr>
+              <a:t>实测</a:t>
+            </a:r>
+            <a:endParaRPr lang="en-US" sz="1400" dirty="0"/>
+          </a:p>
+        </p:txBody>
+      </p:sp>
+      <p:sp>
+        <p:nvSpPr>
+          <p:cNvPr id="7" name="Text 5"/>
+          <p:cNvSpPr/>
+          <p:nvPr/>
+        </p:nvSpPr>
+        <p:spPr>
+          <a:xfrm>
+            <a:off x="3017520" y="2651760"/>
+            <a:ext cx="8531352" cy="336804"/>
+          </a:xfrm>
+          <a:prstGeom prst="rect">
+            <a:avLst/>
+          </a:prstGeom>
+          <a:noFill/>
+          <a:ln/>
+        </p:spPr>
+        <p:txBody>
+          <a:bodyPr wrap="square" lIns="0" tIns="0" rIns="0" bIns="0" rtlCol="0" anchor="t"/>
+          <a:lstStyle/>
+          <a:p>
+            <a:pPr indent="0" marL="0">
+              <a:buNone/>
+            </a:pPr>
+            <a:r>
+              <a:rPr lang="en-US" sz="1400" dirty="0">
+                <a:solidFill>
+                  <a:srgbClr val="545B66"/>
+                </a:solidFill>
+                <a:latin typeface="微软雅黑" pitchFamily="34" charset="0"/>
+                <a:ea typeface="微软雅黑" pitchFamily="34" charset="-122"/>
+                <a:cs typeface="微软雅黑" pitchFamily="34" charset="-120"/>
+              </a:rPr>
+              <a:t>切换全程 533 次采样，阅读区消失 0 次、加载占位出现 0 次</a:t>
+            </a:r>
+            <a:endParaRPr lang="en-US" sz="1400" dirty="0"/>
+          </a:p>
+        </p:txBody>
+      </p:sp>
+      <p:sp>
+        <p:nvSpPr>
+          <p:cNvPr id="8" name="Text 6"/>
+          <p:cNvSpPr/>
+          <p:nvPr/>
+        </p:nvSpPr>
+        <p:spPr>
+          <a:xfrm>
+            <a:off x="548640" y="3657600"/>
+            <a:ext cx="2468880" cy="457200"/>
+          </a:xfrm>
+          <a:prstGeom prst="rect">
+            <a:avLst/>
+          </a:prstGeom>
+          <a:noFill/>
+          <a:ln/>
+        </p:spPr>
+        <p:txBody>
+          <a:bodyPr wrap="square" lIns="0" tIns="0" rIns="0" bIns="0" rtlCol="0" anchor="t"/>
+          <a:lstStyle/>
+          <a:p>
+            <a:pPr indent="0" marL="0">
+              <a:buNone/>
+            </a:pPr>
+            <a:r>
+              <a:rPr lang="en-US" sz="1400" b="1" dirty="0">
+                <a:solidFill>
+                  <a:srgbClr val="16181D"/>
+                </a:solidFill>
+                <a:latin typeface="微软雅黑" pitchFamily="34" charset="0"/>
+                <a:ea typeface="微软雅黑" pitchFamily="34" charset="-122"/>
+                <a:cs typeface="微软雅黑" pitchFamily="34" charset="-120"/>
+              </a:rPr>
+              <a:t>根因</a:t>
+            </a:r>
+            <a:endParaRPr lang="en-US" sz="1400" dirty="0"/>
+          </a:p>
+        </p:txBody>
+      </p:sp>
+      <p:sp>
+        <p:nvSpPr>
+          <p:cNvPr id="9" name="Text 7"/>
+          <p:cNvSpPr/>
+          <p:nvPr/>
+        </p:nvSpPr>
+        <p:spPr>
+          <a:xfrm>
+            <a:off x="3017520" y="3657600"/>
+            <a:ext cx="8531352" cy="336804"/>
+          </a:xfrm>
+          <a:prstGeom prst="rect">
+            <a:avLst/>
+          </a:prstGeom>
+          <a:noFill/>
+          <a:ln/>
+        </p:spPr>
+        <p:txBody>
+          <a:bodyPr wrap="square" lIns="0" tIns="0" rIns="0" bIns="0" rtlCol="0" anchor="t"/>
+          <a:lstStyle/>
+          <a:p>
+            <a:pPr indent="0" marL="0">
+              <a:buNone/>
+            </a:pPr>
+            <a:r>
+              <a:rPr lang="en-US" sz="1400" dirty="0">
+                <a:solidFill>
+                  <a:srgbClr val="545B66"/>
+                </a:solidFill>
+                <a:latin typeface="微软雅黑" pitchFamily="34" charset="0"/>
+                <a:ea typeface="微软雅黑" pitchFamily="34" charset="-122"/>
+                <a:cs typeface="微软雅黑" pitchFamily="34" charset="-120"/>
+              </a:rPr>
+              <a:t>请求只占 9 毫秒，其余全是渲染——所以「加个 loading」是错的解法</a:t>
+            </a:r>
+            <a:endParaRPr lang="en-US" sz="1400" dirty="0"/>
+          </a:p>
+        </p:txBody>
+      </p:sp>
+      <p:sp>
+        <p:nvSpPr>
+          <p:cNvPr id="10" name="Text 8"/>
+          <p:cNvSpPr/>
+          <p:nvPr/>
+        </p:nvSpPr>
+        <p:spPr>
+          <a:xfrm>
+            <a:off x="548640" y="4663440"/>
+            <a:ext cx="2468880" cy="457200"/>
+          </a:xfrm>
+          <a:prstGeom prst="rect">
+            <a:avLst/>
+          </a:prstGeom>
+          <a:noFill/>
+          <a:ln/>
+        </p:spPr>
+        <p:txBody>
+          <a:bodyPr wrap="square" lIns="0" tIns="0" rIns="0" bIns="0" rtlCol="0" anchor="t"/>
+          <a:lstStyle/>
+          <a:p>
+            <a:pPr indent="0" marL="0">
+              <a:buNone/>
+            </a:pPr>
+            <a:r>
+              <a:rPr lang="en-US" sz="1400" b="1" dirty="0">
+                <a:solidFill>
+                  <a:srgbClr val="16181D"/>
+                </a:solidFill>
+                <a:latin typeface="微软雅黑" pitchFamily="34" charset="0"/>
+                <a:ea typeface="微软雅黑" pitchFamily="34" charset="-122"/>
+                <a:cs typeface="微软雅黑" pitchFamily="34" charset="-120"/>
+              </a:rPr>
+              <a:t>解法</a:t>
+            </a:r>
+            <a:endParaRPr lang="en-US" sz="1400" dirty="0"/>
+          </a:p>
+        </p:txBody>
+      </p:sp>
+      <p:sp>
+        <p:nvSpPr>
+          <p:cNvPr id="11" name="Text 9"/>
+          <p:cNvSpPr/>
+          <p:nvPr/>
+        </p:nvSpPr>
+        <p:spPr>
+          <a:xfrm>
+            <a:off x="3017520" y="4663440"/>
+            <a:ext cx="8531352" cy="336804"/>
+          </a:xfrm>
+          <a:prstGeom prst="rect">
+            <a:avLst/>
+          </a:prstGeom>
+          <a:noFill/>
+          <a:ln/>
+        </p:spPr>
+        <p:txBody>
+          <a:bodyPr wrap="square" lIns="0" tIns="0" rIns="0" bIns="0" rtlCol="0" anchor="t"/>
+          <a:lstStyle/>
+          <a:p>
+            <a:pPr indent="0" marL="0">
+              <a:buNone/>
+            </a:pPr>
+            <a:r>
+              <a:rPr lang="en-US" sz="1400" dirty="0">
+                <a:solidFill>
+                  <a:srgbClr val="545B66"/>
+                </a:solidFill>
+                <a:latin typeface="微软雅黑" pitchFamily="34" charset="0"/>
+                <a:ea typeface="微软雅黑" pitchFamily="34" charset="-122"/>
+                <a:cs typeface="微软雅黑" pitchFamily="34" charset="-120"/>
+              </a:rPr>
+              <a:t>保留旧内容、压暗，新数据就绪后一次性替换；忙碌提示延迟 180 毫秒才出现</a:t>
+            </a:r>
+            <a:endParaRPr lang="en-US" sz="1400" dirty="0"/>
+          </a:p>
+        </p:txBody>
+      </p:sp>
+      <p:sp>
+        <p:nvSpPr>
+          <p:cNvPr id="12" name="Shape 10"/>
+          <p:cNvSpPr/>
+          <p:nvPr/>
+        </p:nvSpPr>
+        <p:spPr>
+          <a:xfrm>
+            <a:off x="457200" y="5440680"/>
+            <a:ext cx="11274552" cy="777240"/>
+          </a:xfrm>
+          <a:prstGeom prst="rect">
+            <a:avLst/>
+          </a:prstGeom>
+          <a:solidFill>
+            <a:srgbClr val="F4F5F6"/>
+          </a:solidFill>
+          <a:ln w="12700">
+            <a:solidFill>
+              <a:srgbClr val="E4E7EB"/>
+            </a:solidFill>
+            <a:prstDash val="solid"/>
+          </a:ln>
+        </p:spPr>
+      </p:sp>
+      <p:sp>
+        <p:nvSpPr>
+          <p:cNvPr id="13" name="Text 11"/>
+          <p:cNvSpPr/>
+          <p:nvPr/>
+        </p:nvSpPr>
+        <p:spPr>
+          <a:xfrm>
+            <a:off x="777240" y="5532120"/>
+            <a:ext cx="10634472" cy="594360"/>
           </a:xfrm>
           <a:prstGeom prst="rect">
             <a:avLst/>
@@ -3171,7 +3513,7 @@
               <a:buNone/>
             </a:pPr>
             <a:r>
-              <a:rPr lang="en-US" sz="1800" b="1" dirty="0">
+              <a:rPr lang="en-US" sz="1500" b="1" dirty="0">
                 <a:solidFill>
                   <a:srgbClr val="16181D"/>
                 </a:solidFill>
@@ -3179,321 +3521,9 @@
                 <a:ea typeface="微软雅黑" pitchFamily="34" charset="-122"/>
                 <a:cs typeface="微软雅黑" pitchFamily="34" charset="-120"/>
               </a:rPr>
-              <a:t>所以建连时服务端先补一份全量快照，再进增量流。</a:t>
-            </a:r>
-            <a:endParaRPr lang="en-US" sz="1800" dirty="0"/>
-          </a:p>
-        </p:txBody>
-      </p:sp>
-      <p:sp>
-        <p:nvSpPr>
-          <p:cNvPr id="6" name="Text 4"/>
-          <p:cNvSpPr/>
-          <p:nvPr/>
-        </p:nvSpPr>
-        <p:spPr>
-          <a:xfrm>
-            <a:off x="731520" y="3246120"/>
-            <a:ext cx="1280160" cy="457200"/>
-          </a:xfrm>
-          <a:prstGeom prst="rect">
-            <a:avLst/>
-          </a:prstGeom>
-          <a:noFill/>
-          <a:ln/>
-        </p:spPr>
-        <p:txBody>
-          <a:bodyPr wrap="square" lIns="0" tIns="0" rIns="0" bIns="0" rtlCol="0" anchor="ctr"/>
-          <a:lstStyle/>
-          <a:p>
-            <a:pPr indent="0" marL="0">
-              <a:buNone/>
-            </a:pPr>
-            <a:r>
-              <a:rPr lang="en-US" sz="1400" b="1" dirty="0">
-                <a:solidFill>
-                  <a:srgbClr val="16181D"/>
-                </a:solidFill>
-                <a:latin typeface="微软雅黑" pitchFamily="34" charset="0"/>
-                <a:ea typeface="微软雅黑" pitchFamily="34" charset="-122"/>
-                <a:cs typeface="微软雅黑" pitchFamily="34" charset="-120"/>
-              </a:rPr>
-              <a:t>已完成</a:t>
-            </a:r>
-            <a:endParaRPr lang="en-US" sz="1400" dirty="0"/>
-          </a:p>
-        </p:txBody>
-      </p:sp>
-      <p:sp>
-        <p:nvSpPr>
-          <p:cNvPr id="7" name="Text 5"/>
-          <p:cNvSpPr/>
-          <p:nvPr/>
-        </p:nvSpPr>
-        <p:spPr>
-          <a:xfrm>
-            <a:off x="2103120" y="3246120"/>
-            <a:ext cx="9628632" cy="457200"/>
-          </a:xfrm>
-          <a:prstGeom prst="rect">
-            <a:avLst/>
-          </a:prstGeom>
-          <a:noFill/>
-          <a:ln/>
-        </p:spPr>
-        <p:txBody>
-          <a:bodyPr wrap="square" lIns="0" tIns="0" rIns="0" bIns="0" rtlCol="0" anchor="ctr"/>
-          <a:lstStyle/>
-          <a:p>
-            <a:pPr indent="0" marL="0">
-              <a:buNone/>
-            </a:pPr>
-            <a:r>
-              <a:rPr lang="en-US" sz="1400" dirty="0">
-                <a:solidFill>
-                  <a:srgbClr val="545B66"/>
-                </a:solidFill>
-                <a:latin typeface="微软雅黑" pitchFamily="34" charset="0"/>
-                <a:ea typeface="微软雅黑" pitchFamily="34" charset="-122"/>
-                <a:cs typeface="微软雅黑" pitchFamily="34" charset="-120"/>
-              </a:rPr>
-              <a:t>补成完成事件，并带上摘要与预览</a:t>
-            </a:r>
-            <a:endParaRPr lang="en-US" sz="1400" dirty="0"/>
-          </a:p>
-        </p:txBody>
-      </p:sp>
-      <p:sp>
-        <p:nvSpPr>
-          <p:cNvPr id="8" name="Text 6"/>
-          <p:cNvSpPr/>
-          <p:nvPr/>
-        </p:nvSpPr>
-        <p:spPr>
-          <a:xfrm>
-            <a:off x="731520" y="3813048"/>
-            <a:ext cx="1280160" cy="457200"/>
-          </a:xfrm>
-          <a:prstGeom prst="rect">
-            <a:avLst/>
-          </a:prstGeom>
-          <a:noFill/>
-          <a:ln/>
-        </p:spPr>
-        <p:txBody>
-          <a:bodyPr wrap="square" lIns="0" tIns="0" rIns="0" bIns="0" rtlCol="0" anchor="ctr"/>
-          <a:lstStyle/>
-          <a:p>
-            <a:pPr indent="0" marL="0">
-              <a:buNone/>
-            </a:pPr>
-            <a:r>
-              <a:rPr lang="en-US" sz="1400" b="1" dirty="0">
-                <a:solidFill>
-                  <a:srgbClr val="16181D"/>
-                </a:solidFill>
-                <a:latin typeface="微软雅黑" pitchFamily="34" charset="0"/>
-                <a:ea typeface="微软雅黑" pitchFamily="34" charset="-122"/>
-                <a:cs typeface="微软雅黑" pitchFamily="34" charset="-120"/>
-              </a:rPr>
-              <a:t>失败</a:t>
-            </a:r>
-            <a:endParaRPr lang="en-US" sz="1400" dirty="0"/>
-          </a:p>
-        </p:txBody>
-      </p:sp>
-      <p:sp>
-        <p:nvSpPr>
-          <p:cNvPr id="9" name="Text 7"/>
-          <p:cNvSpPr/>
-          <p:nvPr/>
-        </p:nvSpPr>
-        <p:spPr>
-          <a:xfrm>
-            <a:off x="2103120" y="3813048"/>
-            <a:ext cx="9628632" cy="457200"/>
-          </a:xfrm>
-          <a:prstGeom prst="rect">
-            <a:avLst/>
-          </a:prstGeom>
-          <a:noFill/>
-          <a:ln/>
-        </p:spPr>
-        <p:txBody>
-          <a:bodyPr wrap="square" lIns="0" tIns="0" rIns="0" bIns="0" rtlCol="0" anchor="ctr"/>
-          <a:lstStyle/>
-          <a:p>
-            <a:pPr indent="0" marL="0">
-              <a:buNone/>
-            </a:pPr>
-            <a:r>
-              <a:rPr lang="en-US" sz="1400" dirty="0">
-                <a:solidFill>
-                  <a:srgbClr val="545B66"/>
-                </a:solidFill>
-                <a:latin typeface="微软雅黑" pitchFamily="34" charset="0"/>
-                <a:ea typeface="微软雅黑" pitchFamily="34" charset="-122"/>
-                <a:cs typeface="微软雅黑" pitchFamily="34" charset="-120"/>
-              </a:rPr>
-              <a:t>补成失败事件，带上错误信息</a:t>
-            </a:r>
-            <a:endParaRPr lang="en-US" sz="1400" dirty="0"/>
-          </a:p>
-        </p:txBody>
-      </p:sp>
-      <p:sp>
-        <p:nvSpPr>
-          <p:cNvPr id="10" name="Text 8"/>
-          <p:cNvSpPr/>
-          <p:nvPr/>
-        </p:nvSpPr>
-        <p:spPr>
-          <a:xfrm>
-            <a:off x="731520" y="4379976"/>
-            <a:ext cx="1280160" cy="457200"/>
-          </a:xfrm>
-          <a:prstGeom prst="rect">
-            <a:avLst/>
-          </a:prstGeom>
-          <a:noFill/>
-          <a:ln/>
-        </p:spPr>
-        <p:txBody>
-          <a:bodyPr wrap="square" lIns="0" tIns="0" rIns="0" bIns="0" rtlCol="0" anchor="ctr"/>
-          <a:lstStyle/>
-          <a:p>
-            <a:pPr indent="0" marL="0">
-              <a:buNone/>
-            </a:pPr>
-            <a:r>
-              <a:rPr lang="en-US" sz="1400" b="1" dirty="0">
-                <a:solidFill>
-                  <a:srgbClr val="16181D"/>
-                </a:solidFill>
-                <a:latin typeface="微软雅黑" pitchFamily="34" charset="0"/>
-                <a:ea typeface="微软雅黑" pitchFamily="34" charset="-122"/>
-                <a:cs typeface="微软雅黑" pitchFamily="34" charset="-120"/>
-              </a:rPr>
-              <a:t>进行中</a:t>
-            </a:r>
-            <a:endParaRPr lang="en-US" sz="1400" dirty="0"/>
-          </a:p>
-        </p:txBody>
-      </p:sp>
-      <p:sp>
-        <p:nvSpPr>
-          <p:cNvPr id="11" name="Text 9"/>
-          <p:cNvSpPr/>
-          <p:nvPr/>
-        </p:nvSpPr>
-        <p:spPr>
-          <a:xfrm>
-            <a:off x="2103120" y="4379976"/>
-            <a:ext cx="9628632" cy="457200"/>
-          </a:xfrm>
-          <a:prstGeom prst="rect">
-            <a:avLst/>
-          </a:prstGeom>
-          <a:noFill/>
-          <a:ln/>
-        </p:spPr>
-        <p:txBody>
-          <a:bodyPr wrap="square" lIns="0" tIns="0" rIns="0" bIns="0" rtlCol="0" anchor="ctr"/>
-          <a:lstStyle/>
-          <a:p>
-            <a:pPr indent="0" marL="0">
-              <a:buNone/>
-            </a:pPr>
-            <a:r>
-              <a:rPr lang="en-US" sz="1400" dirty="0">
-                <a:solidFill>
-                  <a:srgbClr val="545B66"/>
-                </a:solidFill>
-                <a:latin typeface="微软雅黑" pitchFamily="34" charset="0"/>
-                <a:ea typeface="微软雅黑" pitchFamily="34" charset="-122"/>
-                <a:cs typeface="微软雅黑" pitchFamily="34" charset="-120"/>
-              </a:rPr>
-              <a:t>补一次「已开始」，否则重连后节点不再有动效</a:t>
-            </a:r>
-            <a:endParaRPr lang="en-US" sz="1400" dirty="0"/>
-          </a:p>
-        </p:txBody>
-      </p:sp>
-      <p:sp>
-        <p:nvSpPr>
-          <p:cNvPr id="12" name="Text 10"/>
-          <p:cNvSpPr/>
-          <p:nvPr/>
-        </p:nvSpPr>
-        <p:spPr>
-          <a:xfrm>
-            <a:off x="731520" y="4946904"/>
-            <a:ext cx="1280160" cy="457200"/>
-          </a:xfrm>
-          <a:prstGeom prst="rect">
-            <a:avLst/>
-          </a:prstGeom>
-          <a:noFill/>
-          <a:ln/>
-        </p:spPr>
-        <p:txBody>
-          <a:bodyPr wrap="square" lIns="0" tIns="0" rIns="0" bIns="0" rtlCol="0" anchor="ctr"/>
-          <a:lstStyle/>
-          <a:p>
-            <a:pPr indent="0" marL="0">
-              <a:buNone/>
-            </a:pPr>
-            <a:r>
-              <a:rPr lang="en-US" sz="1400" b="1" dirty="0">
-                <a:solidFill>
-                  <a:srgbClr val="16181D"/>
-                </a:solidFill>
-                <a:latin typeface="微软雅黑" pitchFamily="34" charset="0"/>
-                <a:ea typeface="微软雅黑" pitchFamily="34" charset="-122"/>
-                <a:cs typeface="微软雅黑" pitchFamily="34" charset="-120"/>
-              </a:rPr>
-              <a:t>已结束</a:t>
-            </a:r>
-            <a:endParaRPr lang="en-US" sz="1400" dirty="0"/>
-          </a:p>
-        </p:txBody>
-      </p:sp>
-      <p:sp>
-        <p:nvSpPr>
-          <p:cNvPr id="13" name="Text 11"/>
-          <p:cNvSpPr/>
-          <p:nvPr/>
-        </p:nvSpPr>
-        <p:spPr>
-          <a:xfrm>
-            <a:off x="2103120" y="4946904"/>
-            <a:ext cx="9628632" cy="457200"/>
-          </a:xfrm>
-          <a:prstGeom prst="rect">
-            <a:avLst/>
-          </a:prstGeom>
-          <a:noFill/>
-          <a:ln/>
-        </p:spPr>
-        <p:txBody>
-          <a:bodyPr wrap="square" lIns="0" tIns="0" rIns="0" bIns="0" rtlCol="0" anchor="ctr"/>
-          <a:lstStyle/>
-          <a:p>
-            <a:pPr indent="0" marL="0">
-              <a:buNone/>
-            </a:pPr>
-            <a:r>
-              <a:rPr lang="en-US" sz="1400" dirty="0">
-                <a:solidFill>
-                  <a:srgbClr val="545B66"/>
-                </a:solidFill>
-                <a:latin typeface="微软雅黑" pitchFamily="34" charset="0"/>
-                <a:ea typeface="微软雅黑" pitchFamily="34" charset="-122"/>
-                <a:cs typeface="微软雅黑" pitchFamily="34" charset="-120"/>
-              </a:rPr>
-              <a:t>补一条结束事件，然后直接断开</a:t>
-            </a:r>
-            <a:endParaRPr lang="en-US" sz="1400" dirty="0"/>
+              <a:t>同一个范式也用在设置弹窗：它原来要等 Obsidian 目录扫描 280–840 毫秒才填表，而设置本身只要 4–22 毫秒</a:t>
+            </a:r>
+            <a:endParaRPr lang="en-US" sz="1500" dirty="0"/>
           </a:p>
         </p:txBody>
       </p:sp>
@@ -3530,7 +3560,7 @@
                 <a:ea typeface="微软雅黑" pitchFamily="34" charset="-122"/>
                 <a:cs typeface="微软雅黑" pitchFamily="34" charset="-120"/>
               </a:rPr>
-              <a:t>建连补快照见 apps/server/src/routes/runs.ts:202；广播无重放见 engine.ts:2116（60 秒后删除运行态）</a:t>
+              <a:t>实测数据原文见 CHANGELOG.md 的 2026-09-29 段（作者实测记录，未在本机复现）；代码见 RunDetailView.vue:80 与 :1129、DocsDialog.vue:52</a:t>
             </a:r>
             <a:endParaRPr lang="en-US" sz="950" dirty="0"/>
           </a:p>
@@ -3547,6 +3577,194 @@
 <file path=ppt/slides/slide12.xml><?xml version="1.0" encoding="utf-8"?>
 <p:sld xmlns:a="http://schemas.openxmlformats.org/drawingml/2006/main" xmlns:r="http://schemas.openxmlformats.org/officeDocument/2006/relationships" xmlns:p="http://schemas.openxmlformats.org/presentationml/2006/main">
   <p:cSld name="Slide 12">
+    <p:bg>
+      <p:bgPr>
+        <a:solidFill>
+          <a:srgbClr val="16181D"/>
+        </a:solidFill>
+      </p:bgPr>
+    </p:bg>
+    <p:spTree>
+      <p:nvGrpSpPr>
+        <p:cNvPr id="1" name=""/>
+        <p:cNvGrpSpPr/>
+        <p:nvPr/>
+      </p:nvGrpSpPr>
+      <p:grpSpPr>
+        <a:xfrm>
+          <a:off x="0" y="0"/>
+          <a:ext cx="0" cy="0"/>
+          <a:chOff x="0" y="0"/>
+          <a:chExt cx="0" cy="0"/>
+        </a:xfrm>
+      </p:grpSpPr>
+      <p:sp>
+        <p:nvSpPr>
+          <p:cNvPr id="2" name="Text 0"/>
+          <p:cNvSpPr/>
+          <p:nvPr/>
+        </p:nvSpPr>
+        <p:spPr>
+          <a:xfrm>
+            <a:off x="457200" y="384048"/>
+            <a:ext cx="11274552" cy="310896"/>
+          </a:xfrm>
+          <a:prstGeom prst="rect">
+            <a:avLst/>
+          </a:prstGeom>
+          <a:noFill/>
+          <a:ln/>
+        </p:spPr>
+        <p:txBody>
+          <a:bodyPr wrap="square" lIns="0" tIns="0" rIns="0" bIns="0" rtlCol="0" anchor="ctr"/>
+          <a:lstStyle/>
+          <a:p>
+            <a:pPr indent="0" marL="0">
+              <a:buNone/>
+            </a:pPr>
+            <a:r>
+              <a:rPr lang="en-US" sz="1200" spc="300" kern="0" dirty="0">
+                <a:solidFill>
+                  <a:srgbClr val="8A929E"/>
+                </a:solidFill>
+                <a:latin typeface="微软雅黑" pitchFamily="34" charset="0"/>
+                <a:ea typeface="微软雅黑" pitchFamily="34" charset="-122"/>
+                <a:cs typeface="微软雅黑" pitchFamily="34" charset="-120"/>
+              </a:rPr>
+              <a:t>03 / 读的时候</a:t>
+            </a:r>
+            <a:endParaRPr lang="en-US" sz="1200" dirty="0"/>
+          </a:p>
+        </p:txBody>
+      </p:sp>
+      <p:sp>
+        <p:nvSpPr>
+          <p:cNvPr id="3" name="Text 1"/>
+          <p:cNvSpPr/>
+          <p:nvPr/>
+        </p:nvSpPr>
+        <p:spPr>
+          <a:xfrm>
+            <a:off x="457200" y="2331720"/>
+            <a:ext cx="11274552" cy="868680"/>
+          </a:xfrm>
+          <a:prstGeom prst="rect">
+            <a:avLst/>
+          </a:prstGeom>
+          <a:noFill/>
+          <a:ln/>
+        </p:spPr>
+        <p:txBody>
+          <a:bodyPr wrap="square" lIns="0" tIns="0" rIns="0" bIns="0" rtlCol="0" anchor="ctr"/>
+          <a:lstStyle/>
+          <a:p>
+            <a:pPr indent="0" marL="0">
+              <a:buNone/>
+            </a:pPr>
+            <a:r>
+              <a:rPr lang="en-US" sz="3800" b="1" dirty="0">
+                <a:solidFill>
+                  <a:srgbClr val="FFFFFF"/>
+                </a:solidFill>
+                <a:latin typeface="微软雅黑" pitchFamily="34" charset="0"/>
+                <a:ea typeface="微软雅黑" pitchFamily="34" charset="-122"/>
+                <a:cs typeface="微软雅黑" pitchFamily="34" charset="-120"/>
+              </a:rPr>
+              <a:t>引擎给一份拼接产物</a:t>
+            </a:r>
+            <a:endParaRPr lang="en-US" sz="3800" dirty="0"/>
+          </a:p>
+        </p:txBody>
+      </p:sp>
+      <p:sp>
+        <p:nvSpPr>
+          <p:cNvPr id="4" name="Text 2"/>
+          <p:cNvSpPr/>
+          <p:nvPr/>
+        </p:nvSpPr>
+        <p:spPr>
+          <a:xfrm>
+            <a:off x="457200" y="3200400"/>
+            <a:ext cx="11274552" cy="868680"/>
+          </a:xfrm>
+          <a:prstGeom prst="rect">
+            <a:avLst/>
+          </a:prstGeom>
+          <a:noFill/>
+          <a:ln/>
+        </p:spPr>
+        <p:txBody>
+          <a:bodyPr wrap="square" lIns="0" tIns="0" rIns="0" bIns="0" rtlCol="0" anchor="ctr"/>
+          <a:lstStyle/>
+          <a:p>
+            <a:pPr indent="0" marL="0">
+              <a:buNone/>
+            </a:pPr>
+            <a:r>
+              <a:rPr lang="en-US" sz="3800" b="1" dirty="0">
+                <a:solidFill>
+                  <a:srgbClr val="00AEEC"/>
+                </a:solidFill>
+                <a:latin typeface="微软雅黑" pitchFamily="34" charset="0"/>
+                <a:ea typeface="微软雅黑" pitchFamily="34" charset="-122"/>
+                <a:cs typeface="微软雅黑" pitchFamily="34" charset="-120"/>
+              </a:rPr>
+              <a:t>人却要按视频逐段读</a:t>
+            </a:r>
+            <a:endParaRPr lang="en-US" sz="3800" dirty="0"/>
+          </a:p>
+        </p:txBody>
+      </p:sp>
+      <p:sp>
+        <p:nvSpPr>
+          <p:cNvPr id="5" name="Text 3"/>
+          <p:cNvSpPr/>
+          <p:nvPr/>
+        </p:nvSpPr>
+        <p:spPr>
+          <a:xfrm>
+            <a:off x="457200" y="4251960"/>
+            <a:ext cx="11274552" cy="365760"/>
+          </a:xfrm>
+          <a:prstGeom prst="rect">
+            <a:avLst/>
+          </a:prstGeom>
+          <a:noFill/>
+          <a:ln/>
+        </p:spPr>
+        <p:txBody>
+          <a:bodyPr wrap="square" lIns="0" tIns="0" rIns="0" bIns="0" rtlCol="0" anchor="ctr"/>
+          <a:lstStyle/>
+          <a:p>
+            <a:pPr indent="0" marL="0">
+              <a:buNone/>
+            </a:pPr>
+            <a:r>
+              <a:rPr lang="en-US" sz="1500" dirty="0">
+                <a:solidFill>
+                  <a:srgbClr val="8A929E"/>
+                </a:solidFill>
+                <a:latin typeface="微软雅黑" pitchFamily="34" charset="0"/>
+                <a:ea typeface="微软雅黑" pitchFamily="34" charset="-122"/>
+                <a:cs typeface="微软雅黑" pitchFamily="34" charset="-120"/>
+              </a:rPr>
+              <a:t>一张卡挂 8 个视频，读完要一段一段来；AI 的产物坏了也得有降级</a:t>
+            </a:r>
+            <a:endParaRPr lang="en-US" sz="1500" dirty="0"/>
+          </a:p>
+        </p:txBody>
+      </p:sp>
+    </p:spTree>
+  </p:cSld>
+  <p:clrMapOvr>
+    <a:masterClrMapping/>
+  </p:clrMapOvr>
+</p:sld>
+</file>
+
+<file path=ppt/slides/slide13.xml><?xml version="1.0" encoding="utf-8"?>
+<p:sld xmlns:a="http://schemas.openxmlformats.org/drawingml/2006/main" xmlns:r="http://schemas.openxmlformats.org/officeDocument/2006/relationships" xmlns:p="http://schemas.openxmlformats.org/presentationml/2006/main">
+  <p:cSld name="Slide 13">
     <p:bg>
       <p:bgPr>
         <a:solidFill>
@@ -3601,7 +3819,7 @@
                 <a:ea typeface="微软雅黑" pitchFamily="34" charset="-122"/>
                 <a:cs typeface="微软雅黑" pitchFamily="34" charset="-120"/>
               </a:rPr>
-              <a:t>02 / 推送会撒谎，数据库不会</a:t>
+              <a:t>03 / 读的时候</a:t>
             </a:r>
             <a:endParaRPr lang="en-US" sz="1200" dirty="0"/>
           </a:p>
@@ -3640,7 +3858,7 @@
                 <a:ea typeface="微软雅黑" pitchFamily="34" charset="-122"/>
                 <a:cs typeface="微软雅黑" pitchFamily="34" charset="-120"/>
               </a:rPr>
-              <a:t>局部重跑是一次新运行</a:t>
+              <a:t>八个视频，读的时候得一段一段自己找</a:t>
             </a:r>
             <a:endParaRPr lang="en-US" sz="3000" dirty="0"/>
           </a:p>
@@ -3654,24 +3872,24 @@
         </p:nvSpPr>
         <p:spPr>
           <a:xfrm>
-            <a:off x="457200" y="1691640"/>
-            <a:ext cx="11274552" cy="390144"/>
-          </a:xfrm>
-          <a:prstGeom prst="rect">
-            <a:avLst/>
-          </a:prstGeom>
-          <a:noFill/>
-          <a:ln/>
-        </p:spPr>
-        <p:txBody>
-          <a:bodyPr wrap="square" lIns="0" tIns="0" rIns="0" bIns="0" rtlCol="0" anchor="ctr"/>
-          <a:lstStyle/>
-          <a:p>
-            <a:pPr indent="0" marL="0">
-              <a:buNone/>
-            </a:pPr>
-            <a:r>
-              <a:rPr lang="en-US" sz="1600" dirty="0">
+            <a:off x="548640" y="1645920"/>
+            <a:ext cx="2468880" cy="457200"/>
+          </a:xfrm>
+          <a:prstGeom prst="rect">
+            <a:avLst/>
+          </a:prstGeom>
+          <a:noFill/>
+          <a:ln/>
+        </p:spPr>
+        <p:txBody>
+          <a:bodyPr wrap="square" lIns="0" tIns="0" rIns="0" bIns="0" rtlCol="0" anchor="t"/>
+          <a:lstStyle/>
+          <a:p>
+            <a:pPr indent="0" marL="0">
+              <a:buNone/>
+            </a:pPr>
+            <a:r>
+              <a:rPr lang="en-US" sz="1400" b="1" dirty="0">
                 <a:solidFill>
                   <a:srgbClr val="16181D"/>
                 </a:solidFill>
@@ -3679,22 +3897,295 @@
                 <a:ea typeface="微软雅黑" pitchFamily="34" charset="-122"/>
                 <a:cs typeface="微软雅黑" pitchFamily="34" charset="-120"/>
               </a:rPr>
-              <a:t>点「从此节点运行」不会复用旧运行，而是新开一次。这是结果合并存在的根本原因。</a:t>
-            </a:r>
-            <a:endParaRPr lang="en-US" sz="1600" dirty="0"/>
-          </a:p>
-        </p:txBody>
-      </p:sp>
-      <p:sp>
-        <p:nvSpPr>
-          <p:cNvPr id="5" name="Shape 3"/>
-          <p:cNvSpPr/>
-          <p:nvPr/>
-        </p:nvSpPr>
-        <p:spPr>
-          <a:xfrm>
-            <a:off x="457200" y="2377440"/>
-            <a:ext cx="3361944" cy="1234440"/>
+              <a:t>用户看到的</a:t>
+            </a:r>
+            <a:endParaRPr lang="en-US" sz="1400" dirty="0"/>
+          </a:p>
+        </p:txBody>
+      </p:sp>
+      <p:sp>
+        <p:nvSpPr>
+          <p:cNvPr id="5" name="Text 3"/>
+          <p:cNvSpPr/>
+          <p:nvPr/>
+        </p:nvSpPr>
+        <p:spPr>
+          <a:xfrm>
+            <a:off x="3017520" y="1645920"/>
+            <a:ext cx="8531352" cy="336804"/>
+          </a:xfrm>
+          <a:prstGeom prst="rect">
+            <a:avLst/>
+          </a:prstGeom>
+          <a:noFill/>
+          <a:ln/>
+        </p:spPr>
+        <p:txBody>
+          <a:bodyPr wrap="square" lIns="0" tIns="0" rIns="0" bIns="0" rtlCol="0" anchor="t"/>
+          <a:lstStyle/>
+          <a:p>
+            <a:pPr indent="0" marL="0">
+              <a:buNone/>
+            </a:pPr>
+            <a:r>
+              <a:rPr lang="en-US" sz="1400" dirty="0">
+                <a:solidFill>
+                  <a:srgbClr val="545B66"/>
+                </a:solidFill>
+                <a:latin typeface="微软雅黑" pitchFamily="34" charset="0"/>
+                <a:ea typeface="微软雅黑" pitchFamily="34" charset="-122"/>
+                <a:cs typeface="微软雅黑" pitchFamily="34" charset="-120"/>
+              </a:rPr>
+              <a:t>一份几万字的产物里混着 8 个视频的内容，只能靠滚轮找「下一个视频从哪开始」</a:t>
+            </a:r>
+            <a:endParaRPr lang="en-US" sz="1400" dirty="0"/>
+          </a:p>
+        </p:txBody>
+      </p:sp>
+      <p:sp>
+        <p:nvSpPr>
+          <p:cNvPr id="6" name="Text 4"/>
+          <p:cNvSpPr/>
+          <p:nvPr/>
+        </p:nvSpPr>
+        <p:spPr>
+          <a:xfrm>
+            <a:off x="548640" y="2651760"/>
+            <a:ext cx="2468880" cy="457200"/>
+          </a:xfrm>
+          <a:prstGeom prst="rect">
+            <a:avLst/>
+          </a:prstGeom>
+          <a:noFill/>
+          <a:ln/>
+        </p:spPr>
+        <p:txBody>
+          <a:bodyPr wrap="square" lIns="0" tIns="0" rIns="0" bIns="0" rtlCol="0" anchor="t"/>
+          <a:lstStyle/>
+          <a:p>
+            <a:pPr indent="0" marL="0">
+              <a:buNone/>
+            </a:pPr>
+            <a:r>
+              <a:rPr lang="en-US" sz="1400" b="1" dirty="0">
+                <a:solidFill>
+                  <a:srgbClr val="16181D"/>
+                </a:solidFill>
+                <a:latin typeface="微软雅黑" pitchFamily="34" charset="0"/>
+                <a:ea typeface="微软雅黑" pitchFamily="34" charset="-122"/>
+                <a:cs typeface="微软雅黑" pitchFamily="34" charset="-120"/>
+              </a:rPr>
+              <a:t>分段哪来的</a:t>
+            </a:r>
+            <a:endParaRPr lang="en-US" sz="1400" dirty="0"/>
+          </a:p>
+        </p:txBody>
+      </p:sp>
+      <p:sp>
+        <p:nvSpPr>
+          <p:cNvPr id="7" name="Text 5"/>
+          <p:cNvSpPr/>
+          <p:nvPr/>
+        </p:nvSpPr>
+        <p:spPr>
+          <a:xfrm>
+            <a:off x="3017520" y="2651760"/>
+            <a:ext cx="8531352" cy="336804"/>
+          </a:xfrm>
+          <a:prstGeom prst="rect">
+            <a:avLst/>
+          </a:prstGeom>
+          <a:noFill/>
+          <a:ln/>
+        </p:spPr>
+        <p:txBody>
+          <a:bodyPr wrap="square" lIns="0" tIns="0" rIns="0" bIns="0" rtlCol="0" anchor="t"/>
+          <a:lstStyle/>
+          <a:p>
+            <a:pPr indent="0" marL="0">
+              <a:buNone/>
+            </a:pPr>
+            <a:r>
+              <a:rPr lang="en-US" sz="1400" dirty="0">
+                <a:solidFill>
+                  <a:srgbClr val="545B66"/>
+                </a:solidFill>
+                <a:latin typeface="微软雅黑" pitchFamily="34" charset="0"/>
+                <a:ea typeface="微软雅黑" pitchFamily="34" charset="-122"/>
+                <a:cs typeface="微软雅黑" pitchFamily="34" charset="-120"/>
+              </a:rPr>
+              <a:t>不是后端存的，是拿运行时记录的「每个输入一行」反推——历史运行不用重跑也能切开读</a:t>
+            </a:r>
+            <a:endParaRPr lang="en-US" sz="1400" dirty="0"/>
+          </a:p>
+        </p:txBody>
+      </p:sp>
+      <p:sp>
+        <p:nvSpPr>
+          <p:cNvPr id="8" name="Text 6"/>
+          <p:cNvSpPr/>
+          <p:nvPr/>
+        </p:nvSpPr>
+        <p:spPr>
+          <a:xfrm>
+            <a:off x="548640" y="3657600"/>
+            <a:ext cx="2468880" cy="457200"/>
+          </a:xfrm>
+          <a:prstGeom prst="rect">
+            <a:avLst/>
+          </a:prstGeom>
+          <a:noFill/>
+          <a:ln/>
+        </p:spPr>
+        <p:txBody>
+          <a:bodyPr wrap="square" lIns="0" tIns="0" rIns="0" bIns="0" rtlCol="0" anchor="t"/>
+          <a:lstStyle/>
+          <a:p>
+            <a:pPr indent="0" marL="0">
+              <a:buNone/>
+            </a:pPr>
+            <a:r>
+              <a:rPr lang="en-US" sz="1400" b="1" dirty="0">
+                <a:solidFill>
+                  <a:srgbClr val="16181D"/>
+                </a:solidFill>
+                <a:latin typeface="微软雅黑" pitchFamily="34" charset="0"/>
+                <a:ea typeface="微软雅黑" pitchFamily="34" charset="-122"/>
+                <a:cs typeface="微软雅黑" pitchFamily="34" charset="-120"/>
+              </a:rPr>
+              <a:t>标题怎么来的</a:t>
+            </a:r>
+            <a:endParaRPr lang="en-US" sz="1400" dirty="0"/>
+          </a:p>
+        </p:txBody>
+      </p:sp>
+      <p:sp>
+        <p:nvSpPr>
+          <p:cNvPr id="9" name="Text 7"/>
+          <p:cNvSpPr/>
+          <p:nvPr/>
+        </p:nvSpPr>
+        <p:spPr>
+          <a:xfrm>
+            <a:off x="3017520" y="3657600"/>
+            <a:ext cx="8531352" cy="336804"/>
+          </a:xfrm>
+          <a:prstGeom prst="rect">
+            <a:avLst/>
+          </a:prstGeom>
+          <a:noFill/>
+          <a:ln/>
+        </p:spPr>
+        <p:txBody>
+          <a:bodyPr wrap="square" lIns="0" tIns="0" rIns="0" bIns="0" rtlCol="0" anchor="t"/>
+          <a:lstStyle/>
+          <a:p>
+            <a:pPr indent="0" marL="0">
+              <a:buNone/>
+            </a:pPr>
+            <a:r>
+              <a:rPr lang="en-US" sz="1400" dirty="0">
+                <a:solidFill>
+                  <a:srgbClr val="545B66"/>
+                </a:solidFill>
+                <a:latin typeface="微软雅黑" pitchFamily="34" charset="0"/>
+                <a:ea typeface="微软雅黑" pitchFamily="34" charset="-122"/>
+                <a:cs typeface="微软雅黑" pitchFamily="34" charset="-120"/>
+              </a:rPr>
+              <a:t>沿链路向上游回溯最多 12 层，取原始视频的名字</a:t>
+            </a:r>
+            <a:endParaRPr lang="en-US" sz="1400" dirty="0"/>
+          </a:p>
+        </p:txBody>
+      </p:sp>
+      <p:sp>
+        <p:nvSpPr>
+          <p:cNvPr id="10" name="Text 8"/>
+          <p:cNvSpPr/>
+          <p:nvPr/>
+        </p:nvSpPr>
+        <p:spPr>
+          <a:xfrm>
+            <a:off x="548640" y="4663440"/>
+            <a:ext cx="2468880" cy="457200"/>
+          </a:xfrm>
+          <a:prstGeom prst="rect">
+            <a:avLst/>
+          </a:prstGeom>
+          <a:noFill/>
+          <a:ln/>
+        </p:spPr>
+        <p:txBody>
+          <a:bodyPr wrap="square" lIns="0" tIns="0" rIns="0" bIns="0" rtlCol="0" anchor="t"/>
+          <a:lstStyle/>
+          <a:p>
+            <a:pPr indent="0" marL="0">
+              <a:buNone/>
+            </a:pPr>
+            <a:r>
+              <a:rPr lang="en-US" sz="1400" b="1" dirty="0">
+                <a:solidFill>
+                  <a:srgbClr val="16181D"/>
+                </a:solidFill>
+                <a:latin typeface="微软雅黑" pitchFamily="34" charset="0"/>
+                <a:ea typeface="微软雅黑" pitchFamily="34" charset="-122"/>
+                <a:cs typeface="微软雅黑" pitchFamily="34" charset="-120"/>
+              </a:rPr>
+              <a:t>导航长什么样</a:t>
+            </a:r>
+            <a:endParaRPr lang="en-US" sz="1400" dirty="0"/>
+          </a:p>
+        </p:txBody>
+      </p:sp>
+      <p:sp>
+        <p:nvSpPr>
+          <p:cNvPr id="11" name="Text 9"/>
+          <p:cNvSpPr/>
+          <p:nvPr/>
+        </p:nvSpPr>
+        <p:spPr>
+          <a:xfrm>
+            <a:off x="3017520" y="4663440"/>
+            <a:ext cx="8531352" cy="336804"/>
+          </a:xfrm>
+          <a:prstGeom prst="rect">
+            <a:avLst/>
+          </a:prstGeom>
+          <a:noFill/>
+          <a:ln/>
+        </p:spPr>
+        <p:txBody>
+          <a:bodyPr wrap="square" lIns="0" tIns="0" rIns="0" bIns="0" rtlCol="0" anchor="t"/>
+          <a:lstStyle/>
+          <a:p>
+            <a:pPr indent="0" marL="0">
+              <a:buNone/>
+            </a:pPr>
+            <a:r>
+              <a:rPr lang="en-US" sz="1400" dirty="0">
+                <a:solidFill>
+                  <a:srgbClr val="545B66"/>
+                </a:solidFill>
+                <a:latin typeface="微软雅黑" pitchFamily="34" charset="0"/>
+                <a:ea typeface="微软雅黑" pitchFamily="34" charset="-122"/>
+                <a:cs typeface="微软雅黑" pitchFamily="34" charset="-120"/>
+              </a:rPr>
+              <a:t>右侧常驻大纲 + ‹ 3/8 › 翻页 + ↑↓ / jk / Home / End 键盘；段数 &gt; 12 才出现筛选框</a:t>
+            </a:r>
+            <a:endParaRPr lang="en-US" sz="1400" dirty="0"/>
+          </a:p>
+        </p:txBody>
+      </p:sp>
+      <p:sp>
+        <p:nvSpPr>
+          <p:cNvPr id="12" name="Shape 10"/>
+          <p:cNvSpPr/>
+          <p:nvPr/>
+        </p:nvSpPr>
+        <p:spPr>
+          <a:xfrm>
+            <a:off x="457200" y="5440680"/>
+            <a:ext cx="11274552" cy="777240"/>
           </a:xfrm>
           <a:prstGeom prst="rect">
             <a:avLst/>
@@ -3712,14 +4203,14 @@
       </p:sp>
       <p:sp>
         <p:nvSpPr>
-          <p:cNvPr id="6" name="Text 4"/>
-          <p:cNvSpPr/>
-          <p:nvPr/>
-        </p:nvSpPr>
-        <p:spPr>
-          <a:xfrm>
-            <a:off x="731520" y="2560320"/>
-            <a:ext cx="2813304" cy="411480"/>
+          <p:cNvPr id="13" name="Text 11"/>
+          <p:cNvSpPr/>
+          <p:nvPr/>
+        </p:nvSpPr>
+        <p:spPr>
+          <a:xfrm>
+            <a:off x="777240" y="5532120"/>
+            <a:ext cx="10634472" cy="594360"/>
           </a:xfrm>
           <a:prstGeom prst="rect">
             <a:avLst/>
@@ -3735,7 +4226,7 @@
               <a:buNone/>
             </a:pPr>
             <a:r>
-              <a:rPr lang="en-US" sz="1700" b="1" dirty="0">
+              <a:rPr lang="en-US" sz="1500" b="1" dirty="0">
                 <a:solidFill>
                   <a:srgbClr val="16181D"/>
                 </a:solidFill>
@@ -3743,425 +4234,15 @@
                 <a:ea typeface="微软雅黑" pitchFamily="34" charset="-122"/>
                 <a:cs typeface="微软雅黑" pitchFamily="34" charset="-120"/>
               </a:rPr>
-              <a:t>新运行</a:t>
-            </a:r>
-            <a:endParaRPr lang="en-US" sz="1700" dirty="0"/>
-          </a:p>
-        </p:txBody>
-      </p:sp>
-      <p:sp>
-        <p:nvSpPr>
-          <p:cNvPr id="7" name="Text 5"/>
-          <p:cNvSpPr/>
-          <p:nvPr/>
-        </p:nvSpPr>
-        <p:spPr>
-          <a:xfrm>
-            <a:off x="731520" y="3063240"/>
-            <a:ext cx="2813304" cy="355092"/>
-          </a:xfrm>
-          <a:prstGeom prst="rect">
-            <a:avLst/>
-          </a:prstGeom>
-          <a:noFill/>
-          <a:ln/>
-        </p:spPr>
-        <p:txBody>
-          <a:bodyPr wrap="square" lIns="0" tIns="0" rIns="0" bIns="0" rtlCol="0" anchor="t"/>
-          <a:lstStyle/>
-          <a:p>
-            <a:pPr indent="0" marL="0">
-              <a:buNone/>
-            </a:pPr>
-            <a:r>
-              <a:rPr lang="en-US" sz="1400" dirty="0">
-                <a:solidFill>
-                  <a:srgbClr val="545B66"/>
-                </a:solidFill>
-                <a:latin typeface="微软雅黑" pitchFamily="34" charset="0"/>
-                <a:ea typeface="微软雅黑" pitchFamily="34" charset="-122"/>
-                <a:cs typeface="微软雅黑" pitchFamily="34" charset="-120"/>
-              </a:rPr>
-              <a:t>每次运行都新开一个 id</a:t>
-            </a:r>
-            <a:endParaRPr lang="en-US" sz="1400" dirty="0"/>
-          </a:p>
-        </p:txBody>
-      </p:sp>
-      <p:sp>
-        <p:nvSpPr>
-          <p:cNvPr id="8" name="Shape 6"/>
-          <p:cNvSpPr/>
-          <p:nvPr/>
-        </p:nvSpPr>
-        <p:spPr>
-          <a:xfrm>
-            <a:off x="3892296" y="2990088"/>
-            <a:ext cx="448056" cy="0"/>
-          </a:xfrm>
-          <a:prstGeom prst="line">
-            <a:avLst/>
-          </a:prstGeom>
-          <a:noFill/>
-          <a:ln w="25400">
-            <a:solidFill>
-              <a:srgbClr val="00AEEC"/>
-            </a:solidFill>
-            <a:prstDash val="solid"/>
-            <a:tailEnd type="triangle"/>
-          </a:ln>
-        </p:spPr>
-      </p:sp>
-      <p:sp>
-        <p:nvSpPr>
-          <p:cNvPr id="9" name="Shape 7"/>
-          <p:cNvSpPr/>
-          <p:nvPr/>
-        </p:nvSpPr>
-        <p:spPr>
-          <a:xfrm>
-            <a:off x="4413504" y="2377440"/>
-            <a:ext cx="3361944" cy="1234440"/>
-          </a:xfrm>
-          <a:prstGeom prst="rect">
-            <a:avLst/>
-          </a:prstGeom>
-          <a:solidFill>
-            <a:srgbClr val="F4F5F6"/>
-          </a:solidFill>
-          <a:ln w="12700">
-            <a:solidFill>
-              <a:srgbClr val="E4E7EB"/>
-            </a:solidFill>
-            <a:prstDash val="solid"/>
-          </a:ln>
-        </p:spPr>
-      </p:sp>
-      <p:sp>
-        <p:nvSpPr>
-          <p:cNvPr id="10" name="Text 8"/>
-          <p:cNvSpPr/>
-          <p:nvPr/>
-        </p:nvSpPr>
-        <p:spPr>
-          <a:xfrm>
-            <a:off x="4687824" y="2560320"/>
-            <a:ext cx="2813304" cy="411480"/>
-          </a:xfrm>
-          <a:prstGeom prst="rect">
-            <a:avLst/>
-          </a:prstGeom>
-          <a:noFill/>
-          <a:ln/>
-        </p:spPr>
-        <p:txBody>
-          <a:bodyPr wrap="square" lIns="0" tIns="0" rIns="0" bIns="0" rtlCol="0" anchor="ctr"/>
-          <a:lstStyle/>
-          <a:p>
-            <a:pPr indent="0" marL="0">
-              <a:buNone/>
-            </a:pPr>
-            <a:r>
-              <a:rPr lang="en-US" sz="1700" b="1" dirty="0">
-                <a:solidFill>
-                  <a:srgbClr val="16181D"/>
-                </a:solidFill>
-                <a:latin typeface="微软雅黑" pitchFamily="34" charset="0"/>
-                <a:ea typeface="微软雅黑" pitchFamily="34" charset="-122"/>
-                <a:cs typeface="微软雅黑" pitchFamily="34" charset="-120"/>
-              </a:rPr>
-              <a:t>结果不全</a:t>
-            </a:r>
-            <a:endParaRPr lang="en-US" sz="1700" dirty="0"/>
-          </a:p>
-        </p:txBody>
-      </p:sp>
-      <p:sp>
-        <p:nvSpPr>
-          <p:cNvPr id="11" name="Text 9"/>
-          <p:cNvSpPr/>
-          <p:nvPr/>
-        </p:nvSpPr>
-        <p:spPr>
-          <a:xfrm>
-            <a:off x="4687824" y="3063240"/>
-            <a:ext cx="2813304" cy="355092"/>
-          </a:xfrm>
-          <a:prstGeom prst="rect">
-            <a:avLst/>
-          </a:prstGeom>
-          <a:noFill/>
-          <a:ln/>
-        </p:spPr>
-        <p:txBody>
-          <a:bodyPr wrap="square" lIns="0" tIns="0" rIns="0" bIns="0" rtlCol="0" anchor="t"/>
-          <a:lstStyle/>
-          <a:p>
-            <a:pPr indent="0" marL="0">
-              <a:buNone/>
-            </a:pPr>
-            <a:r>
-              <a:rPr lang="en-US" sz="1400" dirty="0">
-                <a:solidFill>
-                  <a:srgbClr val="545B66"/>
-                </a:solidFill>
-                <a:latin typeface="微软雅黑" pitchFamily="34" charset="0"/>
-                <a:ea typeface="微软雅黑" pitchFamily="34" charset="-122"/>
-                <a:cs typeface="微软雅黑" pitchFamily="34" charset="-120"/>
-              </a:rPr>
-              <a:t>只包含本次范围内的节点</a:t>
-            </a:r>
-            <a:endParaRPr lang="en-US" sz="1400" dirty="0"/>
-          </a:p>
-        </p:txBody>
-      </p:sp>
-      <p:sp>
-        <p:nvSpPr>
-          <p:cNvPr id="12" name="Shape 10"/>
-          <p:cNvSpPr/>
-          <p:nvPr/>
-        </p:nvSpPr>
-        <p:spPr>
-          <a:xfrm>
-            <a:off x="7848600" y="2990088"/>
-            <a:ext cx="448056" cy="0"/>
-          </a:xfrm>
-          <a:prstGeom prst="line">
-            <a:avLst/>
-          </a:prstGeom>
-          <a:noFill/>
-          <a:ln w="25400">
-            <a:solidFill>
-              <a:srgbClr val="00AEEC"/>
-            </a:solidFill>
-            <a:prstDash val="solid"/>
-            <a:tailEnd type="triangle"/>
-          </a:ln>
-        </p:spPr>
-      </p:sp>
-      <p:sp>
-        <p:nvSpPr>
-          <p:cNvPr id="13" name="Shape 11"/>
-          <p:cNvSpPr/>
-          <p:nvPr/>
-        </p:nvSpPr>
-        <p:spPr>
-          <a:xfrm>
-            <a:off x="8369808" y="2377440"/>
-            <a:ext cx="3361944" cy="1234440"/>
-          </a:xfrm>
-          <a:prstGeom prst="rect">
-            <a:avLst/>
-          </a:prstGeom>
-          <a:solidFill>
-            <a:srgbClr val="F4F5F6"/>
-          </a:solidFill>
-          <a:ln w="12700">
-            <a:solidFill>
-              <a:srgbClr val="E4E7EB"/>
-            </a:solidFill>
-            <a:prstDash val="solid"/>
-          </a:ln>
-        </p:spPr>
+              <a:t>旧的「8 个横排胶囊」是被规范否掉的：Apple HIG 说分段控件上限 5，M3 说 tab 只用于并列内容</a:t>
+            </a:r>
+            <a:endParaRPr lang="en-US" sz="1500" dirty="0"/>
+          </a:p>
+        </p:txBody>
       </p:sp>
       <p:sp>
         <p:nvSpPr>
           <p:cNvPr id="14" name="Text 12"/>
-          <p:cNvSpPr/>
-          <p:nvPr/>
-        </p:nvSpPr>
-        <p:spPr>
-          <a:xfrm>
-            <a:off x="8644128" y="2560320"/>
-            <a:ext cx="2813304" cy="411480"/>
-          </a:xfrm>
-          <a:prstGeom prst="rect">
-            <a:avLst/>
-          </a:prstGeom>
-          <a:noFill/>
-          <a:ln/>
-        </p:spPr>
-        <p:txBody>
-          <a:bodyPr wrap="square" lIns="0" tIns="0" rIns="0" bIns="0" rtlCol="0" anchor="ctr"/>
-          <a:lstStyle/>
-          <a:p>
-            <a:pPr indent="0" marL="0">
-              <a:buNone/>
-            </a:pPr>
-            <a:r>
-              <a:rPr lang="en-US" sz="1700" b="1" dirty="0">
-                <a:solidFill>
-                  <a:srgbClr val="16181D"/>
-                </a:solidFill>
-                <a:latin typeface="微软雅黑" pitchFamily="34" charset="0"/>
-                <a:ea typeface="微软雅黑" pitchFamily="34" charset="-122"/>
-                <a:cs typeface="微软雅黑" pitchFamily="34" charset="-120"/>
-              </a:rPr>
-              <a:t>视图回填</a:t>
-            </a:r>
-            <a:endParaRPr lang="en-US" sz="1700" dirty="0"/>
-          </a:p>
-        </p:txBody>
-      </p:sp>
-      <p:sp>
-        <p:nvSpPr>
-          <p:cNvPr id="15" name="Text 13"/>
-          <p:cNvSpPr/>
-          <p:nvPr/>
-        </p:nvSpPr>
-        <p:spPr>
-          <a:xfrm>
-            <a:off x="8644128" y="3063240"/>
-            <a:ext cx="2813304" cy="355092"/>
-          </a:xfrm>
-          <a:prstGeom prst="rect">
-            <a:avLst/>
-          </a:prstGeom>
-          <a:noFill/>
-          <a:ln/>
-        </p:spPr>
-        <p:txBody>
-          <a:bodyPr wrap="square" lIns="0" tIns="0" rIns="0" bIns="0" rtlCol="0" anchor="t"/>
-          <a:lstStyle/>
-          <a:p>
-            <a:pPr indent="0" marL="0">
-              <a:buNone/>
-            </a:pPr>
-            <a:r>
-              <a:rPr lang="en-US" sz="1400" dirty="0">
-                <a:solidFill>
-                  <a:srgbClr val="545B66"/>
-                </a:solidFill>
-                <a:latin typeface="微软雅黑" pitchFamily="34" charset="0"/>
-                <a:ea typeface="微软雅黑" pitchFamily="34" charset="-122"/>
-                <a:cs typeface="微软雅黑" pitchFamily="34" charset="-120"/>
-              </a:rPr>
-              <a:t>从更早的成功运行补回缺失节点</a:t>
-            </a:r>
-            <a:endParaRPr lang="en-US" sz="1400" dirty="0"/>
-          </a:p>
-        </p:txBody>
-      </p:sp>
-      <p:sp>
-        <p:nvSpPr>
-          <p:cNvPr id="16" name="Text 14"/>
-          <p:cNvSpPr/>
-          <p:nvPr/>
-        </p:nvSpPr>
-        <p:spPr>
-          <a:xfrm>
-            <a:off x="457200" y="4069080"/>
-            <a:ext cx="11274552" cy="372618"/>
-          </a:xfrm>
-          <a:prstGeom prst="rect">
-            <a:avLst/>
-          </a:prstGeom>
-          <a:noFill/>
-          <a:ln/>
-        </p:spPr>
-        <p:txBody>
-          <a:bodyPr wrap="square" lIns="0" tIns="0" rIns="0" bIns="0" rtlCol="0" anchor="ctr"/>
-          <a:lstStyle/>
-          <a:p>
-            <a:pPr indent="0" marL="0">
-              <a:buNone/>
-            </a:pPr>
-            <a:r>
-              <a:rPr lang="en-US" sz="1500" dirty="0">
-                <a:solidFill>
-                  <a:srgbClr val="545B66"/>
-                </a:solidFill>
-                <a:latin typeface="微软雅黑" pitchFamily="34" charset="0"/>
-                <a:ea typeface="微软雅黑" pitchFamily="34" charset="-122"/>
-                <a:cs typeface="微软雅黑" pitchFamily="34" charset="-120"/>
-              </a:rPr>
-              <a:t>前端的解法：按时间倒序，从更早的成功运行里把缺失节点的完成结果回填到视图。</a:t>
-            </a:r>
-            <a:endParaRPr lang="en-US" sz="1500" dirty="0"/>
-          </a:p>
-        </p:txBody>
-      </p:sp>
-      <p:sp>
-        <p:nvSpPr>
-          <p:cNvPr id="17" name="Text 15"/>
-          <p:cNvSpPr/>
-          <p:nvPr/>
-        </p:nvSpPr>
-        <p:spPr>
-          <a:xfrm>
-            <a:off x="457200" y="4572000"/>
-            <a:ext cx="11274552" cy="372618"/>
-          </a:xfrm>
-          <a:prstGeom prst="rect">
-            <a:avLst/>
-          </a:prstGeom>
-          <a:noFill/>
-          <a:ln/>
-        </p:spPr>
-        <p:txBody>
-          <a:bodyPr wrap="square" lIns="0" tIns="0" rIns="0" bIns="0" rtlCol="0" anchor="ctr"/>
-          <a:lstStyle/>
-          <a:p>
-            <a:pPr indent="0" marL="0">
-              <a:buNone/>
-            </a:pPr>
-            <a:r>
-              <a:rPr lang="en-US" sz="1500" dirty="0">
-                <a:solidFill>
-                  <a:srgbClr val="545B66"/>
-                </a:solidFill>
-                <a:latin typeface="微软雅黑" pitchFamily="34" charset="0"/>
-                <a:ea typeface="微软雅黑" pitchFamily="34" charset="-122"/>
-                <a:cs typeface="微软雅黑" pitchFamily="34" charset="-120"/>
-              </a:rPr>
-              <a:t>后端的对称做法：上游不在本次范围内时，从历史运行里取该节点的产物当输入。</a:t>
-            </a:r>
-            <a:endParaRPr lang="en-US" sz="1500" dirty="0"/>
-          </a:p>
-        </p:txBody>
-      </p:sp>
-      <p:sp>
-        <p:nvSpPr>
-          <p:cNvPr id="18" name="Text 16"/>
-          <p:cNvSpPr/>
-          <p:nvPr/>
-        </p:nvSpPr>
-        <p:spPr>
-          <a:xfrm>
-            <a:off x="457200" y="5257800"/>
-            <a:ext cx="11274552" cy="457200"/>
-          </a:xfrm>
-          <a:prstGeom prst="rect">
-            <a:avLst/>
-          </a:prstGeom>
-          <a:noFill/>
-          <a:ln/>
-        </p:spPr>
-        <p:txBody>
-          <a:bodyPr wrap="square" lIns="0" tIns="0" rIns="0" bIns="0" rtlCol="0" anchor="ctr"/>
-          <a:lstStyle/>
-          <a:p>
-            <a:pPr indent="0" marL="0">
-              <a:buNone/>
-            </a:pPr>
-            <a:r>
-              <a:rPr lang="en-US" sz="1700" b="1" dirty="0">
-                <a:solidFill>
-                  <a:srgbClr val="16181D"/>
-                </a:solidFill>
-                <a:latin typeface="微软雅黑" pitchFamily="34" charset="0"/>
-                <a:ea typeface="微软雅黑" pitchFamily="34" charset="-122"/>
-                <a:cs typeface="微软雅黑" pitchFamily="34" charset="-120"/>
-              </a:rPr>
-              <a:t>把复杂度从「前端状态机」挪到了「纯函数式的快照合并」，能一眼看懂，也好写测试</a:t>
-            </a:r>
-            <a:endParaRPr lang="en-US" sz="1700" dirty="0"/>
-          </a:p>
-        </p:txBody>
-      </p:sp>
-      <p:sp>
-        <p:nvSpPr>
-          <p:cNvPr id="19" name="Text 17"/>
           <p:cNvSpPr/>
           <p:nvPr/>
         </p:nvSpPr>
@@ -4192,197 +4273,9 @@
                 <a:ea typeface="微软雅黑" pitchFamily="34" charset="-122"/>
                 <a:cs typeface="微软雅黑" pitchFamily="34" charset="-120"/>
               </a:rPr>
-              <a:t>视图层合并见 ProjectEditorView.vue:424-443 与 utils/run-restore.ts:29；服务端对称做法见 engine.ts:779 的 previousOutputs</a:t>
+              <a:t>分段重建见 apps/web/src/utils/run-segments.ts（回溯上限 12 见 :87 与 :131）；选型依据见 docs/research/segment-navigation-research.md；筛选阈值见 RunDetailView.vue:2094</a:t>
             </a:r>
             <a:endParaRPr lang="en-US" sz="950" dirty="0"/>
-          </a:p>
-        </p:txBody>
-      </p:sp>
-    </p:spTree>
-  </p:cSld>
-  <p:clrMapOvr>
-    <a:masterClrMapping/>
-  </p:clrMapOvr>
-</p:sld>
-</file>
-
-<file path=ppt/slides/slide13.xml><?xml version="1.0" encoding="utf-8"?>
-<p:sld xmlns:a="http://schemas.openxmlformats.org/drawingml/2006/main" xmlns:r="http://schemas.openxmlformats.org/officeDocument/2006/relationships" xmlns:p="http://schemas.openxmlformats.org/presentationml/2006/main">
-  <p:cSld name="Slide 13">
-    <p:bg>
-      <p:bgPr>
-        <a:solidFill>
-          <a:srgbClr val="16181D"/>
-        </a:solidFill>
-      </p:bgPr>
-    </p:bg>
-    <p:spTree>
-      <p:nvGrpSpPr>
-        <p:cNvPr id="1" name=""/>
-        <p:cNvGrpSpPr/>
-        <p:nvPr/>
-      </p:nvGrpSpPr>
-      <p:grpSpPr>
-        <a:xfrm>
-          <a:off x="0" y="0"/>
-          <a:ext cx="0" cy="0"/>
-          <a:chOff x="0" y="0"/>
-          <a:chExt cx="0" cy="0"/>
-        </a:xfrm>
-      </p:grpSpPr>
-      <p:sp>
-        <p:nvSpPr>
-          <p:cNvPr id="2" name="Text 0"/>
-          <p:cNvSpPr/>
-          <p:nvPr/>
-        </p:nvSpPr>
-        <p:spPr>
-          <a:xfrm>
-            <a:off x="457200" y="384048"/>
-            <a:ext cx="11274552" cy="310896"/>
-          </a:xfrm>
-          <a:prstGeom prst="rect">
-            <a:avLst/>
-          </a:prstGeom>
-          <a:noFill/>
-          <a:ln/>
-        </p:spPr>
-        <p:txBody>
-          <a:bodyPr wrap="square" lIns="0" tIns="0" rIns="0" bIns="0" rtlCol="0" anchor="ctr"/>
-          <a:lstStyle/>
-          <a:p>
-            <a:pPr indent="0" marL="0">
-              <a:buNone/>
-            </a:pPr>
-            <a:r>
-              <a:rPr lang="en-US" sz="1200" spc="300" kern="0" dirty="0">
-                <a:solidFill>
-                  <a:srgbClr val="8A929E"/>
-                </a:solidFill>
-                <a:latin typeface="微软雅黑" pitchFamily="34" charset="0"/>
-                <a:ea typeface="微软雅黑" pitchFamily="34" charset="-122"/>
-                <a:cs typeface="微软雅黑" pitchFamily="34" charset="-120"/>
-              </a:rPr>
-              <a:t>03 / 把 AI 的输出当成会坏的东西</a:t>
-            </a:r>
-            <a:endParaRPr lang="en-US" sz="1200" dirty="0"/>
-          </a:p>
-        </p:txBody>
-      </p:sp>
-      <p:sp>
-        <p:nvSpPr>
-          <p:cNvPr id="3" name="Text 1"/>
-          <p:cNvSpPr/>
-          <p:nvPr/>
-        </p:nvSpPr>
-        <p:spPr>
-          <a:xfrm>
-            <a:off x="457200" y="2331720"/>
-            <a:ext cx="11274552" cy="868680"/>
-          </a:xfrm>
-          <a:prstGeom prst="rect">
-            <a:avLst/>
-          </a:prstGeom>
-          <a:noFill/>
-          <a:ln/>
-        </p:spPr>
-        <p:txBody>
-          <a:bodyPr wrap="square" lIns="0" tIns="0" rIns="0" bIns="0" rtlCol="0" anchor="ctr"/>
-          <a:lstStyle/>
-          <a:p>
-            <a:pPr indent="0" marL="0">
-              <a:buNone/>
-            </a:pPr>
-            <a:r>
-              <a:rPr lang="en-US" sz="3800" b="1" dirty="0">
-                <a:solidFill>
-                  <a:srgbClr val="FFFFFF"/>
-                </a:solidFill>
-                <a:latin typeface="微软雅黑" pitchFamily="34" charset="0"/>
-                <a:ea typeface="微软雅黑" pitchFamily="34" charset="-122"/>
-                <a:cs typeface="微软雅黑" pitchFamily="34" charset="-120"/>
-              </a:rPr>
-              <a:t>引擎给一份拼接产物</a:t>
-            </a:r>
-            <a:endParaRPr lang="en-US" sz="3800" dirty="0"/>
-          </a:p>
-        </p:txBody>
-      </p:sp>
-      <p:sp>
-        <p:nvSpPr>
-          <p:cNvPr id="4" name="Text 2"/>
-          <p:cNvSpPr/>
-          <p:nvPr/>
-        </p:nvSpPr>
-        <p:spPr>
-          <a:xfrm>
-            <a:off x="457200" y="3200400"/>
-            <a:ext cx="11274552" cy="868680"/>
-          </a:xfrm>
-          <a:prstGeom prst="rect">
-            <a:avLst/>
-          </a:prstGeom>
-          <a:noFill/>
-          <a:ln/>
-        </p:spPr>
-        <p:txBody>
-          <a:bodyPr wrap="square" lIns="0" tIns="0" rIns="0" bIns="0" rtlCol="0" anchor="ctr"/>
-          <a:lstStyle/>
-          <a:p>
-            <a:pPr indent="0" marL="0">
-              <a:buNone/>
-            </a:pPr>
-            <a:r>
-              <a:rPr lang="en-US" sz="3800" b="1" dirty="0">
-                <a:solidFill>
-                  <a:srgbClr val="00AEEC"/>
-                </a:solidFill>
-                <a:latin typeface="微软雅黑" pitchFamily="34" charset="0"/>
-                <a:ea typeface="微软雅黑" pitchFamily="34" charset="-122"/>
-                <a:cs typeface="微软雅黑" pitchFamily="34" charset="-120"/>
-              </a:rPr>
-              <a:t>用户要按视频逐段读</a:t>
-            </a:r>
-            <a:endParaRPr lang="en-US" sz="3800" dirty="0"/>
-          </a:p>
-        </p:txBody>
-      </p:sp>
-      <p:sp>
-        <p:nvSpPr>
-          <p:cNvPr id="5" name="Text 3"/>
-          <p:cNvSpPr/>
-          <p:nvPr/>
-        </p:nvSpPr>
-        <p:spPr>
-          <a:xfrm>
-            <a:off x="457200" y="4251960"/>
-            <a:ext cx="11274552" cy="365760"/>
-          </a:xfrm>
-          <a:prstGeom prst="rect">
-            <a:avLst/>
-          </a:prstGeom>
-          <a:noFill/>
-          <a:ln/>
-        </p:spPr>
-        <p:txBody>
-          <a:bodyPr wrap="square" lIns="0" tIns="0" rIns="0" bIns="0" rtlCol="0" anchor="ctr"/>
-          <a:lstStyle/>
-          <a:p>
-            <a:pPr indent="0" marL="0">
-              <a:buNone/>
-            </a:pPr>
-            <a:r>
-              <a:rPr lang="en-US" sz="1500" dirty="0">
-                <a:solidFill>
-                  <a:srgbClr val="8A929E"/>
-                </a:solidFill>
-                <a:latin typeface="微软雅黑" pitchFamily="34" charset="0"/>
-                <a:ea typeface="微软雅黑" pitchFamily="34" charset="-122"/>
-                <a:cs typeface="微软雅黑" pitchFamily="34" charset="-120"/>
-              </a:rPr>
-              <a:t>一张卡挂 8 个视频，引擎把它们拼成一份，人却要一个一个读</a:t>
-            </a:r>
-            <a:endParaRPr lang="en-US" sz="1500" dirty="0"/>
           </a:p>
         </p:txBody>
       </p:sp>
@@ -4451,7 +4344,7 @@
                 <a:ea typeface="微软雅黑" pitchFamily="34" charset="-122"/>
                 <a:cs typeface="微软雅黑" pitchFamily="34" charset="-120"/>
               </a:rPr>
-              <a:t>03 / 把 AI 的输出当成会坏的东西</a:t>
+              <a:t>03 / 读的时候</a:t>
             </a:r>
             <a:endParaRPr lang="en-US" sz="1200" dirty="0"/>
           </a:p>
@@ -4490,7 +4383,7 @@
                 <a:ea typeface="微软雅黑" pitchFamily="34" charset="-122"/>
                 <a:cs typeface="微软雅黑" pitchFamily="34" charset="-120"/>
               </a:rPr>
-              <a:t>坏条目逐条丢弃，但原因必须是人话</a:t>
+              <a:t>我们曾经把练习题渲染成一张空表格</a:t>
             </a:r>
             <a:endParaRPr lang="en-US" sz="3000" dirty="0"/>
           </a:p>
@@ -4504,8 +4397,8 @@
         </p:nvSpPr>
         <p:spPr>
           <a:xfrm>
-            <a:off x="548640" y="2145030"/>
-            <a:ext cx="2194560" cy="457200"/>
+            <a:off x="548640" y="1645920"/>
+            <a:ext cx="2468880" cy="457200"/>
           </a:xfrm>
           <a:prstGeom prst="rect">
             <a:avLst/>
@@ -4529,7 +4422,7 @@
                 <a:ea typeface="微软雅黑" pitchFamily="34" charset="-122"/>
                 <a:cs typeface="微软雅黑" pitchFamily="34" charset="-120"/>
               </a:rPr>
-              <a:t>逐条丢弃</a:t>
+              <a:t>用户看到的</a:t>
             </a:r>
             <a:endParaRPr lang="en-US" sz="1400" dirty="0"/>
           </a:p>
@@ -4543,8 +4436,8 @@
         </p:nvSpPr>
         <p:spPr>
           <a:xfrm>
-            <a:off x="2743200" y="2145030"/>
-            <a:ext cx="8805672" cy="336804"/>
+            <a:off x="3017520" y="1645920"/>
+            <a:ext cx="8531352" cy="336804"/>
           </a:xfrm>
           <a:prstGeom prst="rect">
             <a:avLst/>
@@ -4568,7 +4461,7 @@
                 <a:ea typeface="微软雅黑" pitchFamily="34" charset="-122"/>
                 <a:cs typeface="微软雅黑" pitchFamily="34" charset="-120"/>
               </a:rPr>
-              <a:t>坏条目单独丢掉，但每一条都要给出人话原因；丢弃率本身当质量指标在看</a:t>
+              <a:t>点开「练一练」标签页，是一张空的溯源表格——产品里其实有题，是渲染认错了类型</a:t>
             </a:r>
             <a:endParaRPr lang="en-US" sz="1400" dirty="0"/>
           </a:p>
@@ -4582,8 +4475,8 @@
         </p:nvSpPr>
         <p:spPr>
           <a:xfrm>
-            <a:off x="548640" y="3224022"/>
-            <a:ext cx="2194560" cy="457200"/>
+            <a:off x="548640" y="2651760"/>
+            <a:ext cx="2468880" cy="457200"/>
           </a:xfrm>
           <a:prstGeom prst="rect">
             <a:avLst/>
@@ -4607,7 +4500,7 @@
                 <a:ea typeface="微软雅黑" pitchFamily="34" charset="-122"/>
                 <a:cs typeface="微软雅黑" pitchFamily="34" charset="-120"/>
               </a:rPr>
-              <a:t>不判两次死刑</a:t>
+              <a:t>根因</a:t>
             </a:r>
             <a:endParaRPr lang="en-US" sz="1400" dirty="0"/>
           </a:p>
@@ -4621,8 +4514,8 @@
         </p:nvSpPr>
         <p:spPr>
           <a:xfrm>
-            <a:off x="2743200" y="3224022"/>
-            <a:ext cx="8805672" cy="336804"/>
+            <a:off x="3017520" y="2651760"/>
+            <a:ext cx="8531352" cy="336804"/>
           </a:xfrm>
           <a:prstGeom prst="rect">
             <a:avLst/>
@@ -4646,7 +4539,7 @@
                 <a:ea typeface="微软雅黑" pitchFamily="34" charset="-122"/>
                 <a:cs typeface="微软雅黑" pitchFamily="34" charset="-120"/>
               </a:rPr>
-              <a:t>生成期严格校验，展示期只做结构解析——同一份数据不被两套标准各否一次</a:t>
+              <a:t>按内容特征嗅探产物类型，但一开始没写互斥规则，练习题被当成溯源报告渲染</a:t>
             </a:r>
             <a:endParaRPr lang="en-US" sz="1400" dirty="0"/>
           </a:p>
@@ -4660,8 +4553,8 @@
         </p:nvSpPr>
         <p:spPr>
           <a:xfrm>
-            <a:off x="548640" y="4303014"/>
-            <a:ext cx="2194560" cy="457200"/>
+            <a:off x="548640" y="3657600"/>
+            <a:ext cx="2468880" cy="457200"/>
           </a:xfrm>
           <a:prstGeom prst="rect">
             <a:avLst/>
@@ -4685,7 +4578,7 @@
                 <a:ea typeface="微软雅黑" pitchFamily="34" charset="-122"/>
                 <a:cs typeface="微软雅黑" pitchFamily="34" charset="-120"/>
               </a:rPr>
-              <a:t>要有降级形态</a:t>
+              <a:t>现在怎么防</a:t>
             </a:r>
             <a:endParaRPr lang="en-US" sz="1400" dirty="0"/>
           </a:p>
@@ -4699,8 +4592,8 @@
         </p:nvSpPr>
         <p:spPr>
           <a:xfrm>
-            <a:off x="2743200" y="4303014"/>
-            <a:ext cx="8805672" cy="336804"/>
+            <a:off x="3017520" y="3657600"/>
+            <a:ext cx="8531352" cy="336804"/>
           </a:xfrm>
           <a:prstGeom prst="rect">
             <a:avLst/>
@@ -4724,7 +4617,7 @@
                 <a:ea typeface="微软雅黑" pitchFamily="34" charset="-122"/>
                 <a:cs typeface="微软雅黑" pitchFamily="34" charset="-120"/>
               </a:rPr>
-              <a:t>结构化 JSON 与可读 Markdown 互相兜底；引用定位不到时说人话，不报错</a:t>
+              <a:t>先排除练习题、再判溯源；坏条目逐条丢弃，但每一条都要给出人话原因</a:t>
             </a:r>
             <a:endParaRPr lang="en-US" sz="1400" dirty="0"/>
           </a:p>
@@ -4738,8 +4631,8 @@
         </p:nvSpPr>
         <p:spPr>
           <a:xfrm>
-            <a:off x="548640" y="5382006"/>
-            <a:ext cx="2194560" cy="457200"/>
+            <a:off x="548640" y="4663440"/>
+            <a:ext cx="2468880" cy="457200"/>
           </a:xfrm>
           <a:prstGeom prst="rect">
             <a:avLst/>
@@ -4763,7 +4656,7 @@
                 <a:ea typeface="微软雅黑" pitchFamily="34" charset="-122"/>
                 <a:cs typeface="微软雅黑" pitchFamily="34" charset="-120"/>
               </a:rPr>
-              <a:t>产物类型要嗅探</a:t>
+              <a:t>一条安全底线</a:t>
             </a:r>
             <a:endParaRPr lang="en-US" sz="1400" dirty="0"/>
           </a:p>
@@ -4777,8 +4670,8 @@
         </p:nvSpPr>
         <p:spPr>
           <a:xfrm>
-            <a:off x="2743200" y="5382006"/>
-            <a:ext cx="8805672" cy="336804"/>
+            <a:off x="3017520" y="4663440"/>
+            <a:ext cx="8531352" cy="336804"/>
           </a:xfrm>
           <a:prstGeom prst="rect">
             <a:avLst/>
@@ -4802,7 +4695,7 @@
                 <a:ea typeface="微软雅黑" pitchFamily="34" charset="-122"/>
                 <a:cs typeface="微软雅黑" pitchFamily="34" charset="-120"/>
               </a:rPr>
-              <a:t>靠内容特征判断类型，而且要写互斥规则——我们曾经把练习题渲染成了一张空的溯源表格</a:t>
+              <a:t>AI 的产物是外部输入：Markdown 进 DOM 前统一过 DOMPurify（35 行单入口，四处共用）</a:t>
             </a:r>
             <a:endParaRPr lang="en-US" sz="1400" dirty="0"/>
           </a:p>
@@ -4810,7 +4703,71 @@
       </p:sp>
       <p:sp>
         <p:nvSpPr>
-          <p:cNvPr id="12" name="Text 10"/>
+          <p:cNvPr id="12" name="Shape 10"/>
+          <p:cNvSpPr/>
+          <p:nvPr/>
+        </p:nvSpPr>
+        <p:spPr>
+          <a:xfrm>
+            <a:off x="457200" y="5440680"/>
+            <a:ext cx="11274552" cy="777240"/>
+          </a:xfrm>
+          <a:prstGeom prst="rect">
+            <a:avLst/>
+          </a:prstGeom>
+          <a:solidFill>
+            <a:srgbClr val="F4F5F6"/>
+          </a:solidFill>
+          <a:ln w="12700">
+            <a:solidFill>
+              <a:srgbClr val="E4E7EB"/>
+            </a:solidFill>
+            <a:prstDash val="solid"/>
+          </a:ln>
+        </p:spPr>
+      </p:sp>
+      <p:sp>
+        <p:nvSpPr>
+          <p:cNvPr id="13" name="Text 11"/>
+          <p:cNvSpPr/>
+          <p:nvPr/>
+        </p:nvSpPr>
+        <p:spPr>
+          <a:xfrm>
+            <a:off x="777240" y="5532120"/>
+            <a:ext cx="10634472" cy="594360"/>
+          </a:xfrm>
+          <a:prstGeom prst="rect">
+            <a:avLst/>
+          </a:prstGeom>
+          <a:noFill/>
+          <a:ln/>
+        </p:spPr>
+        <p:txBody>
+          <a:bodyPr wrap="square" lIns="0" tIns="0" rIns="0" bIns="0" rtlCol="0" anchor="ctr"/>
+          <a:lstStyle/>
+          <a:p>
+            <a:pPr indent="0" marL="0">
+              <a:buNone/>
+            </a:pPr>
+            <a:r>
+              <a:rPr lang="en-US" sz="1500" b="1" dirty="0">
+                <a:solidFill>
+                  <a:srgbClr val="16181D"/>
+                </a:solidFill>
+                <a:latin typeface="微软雅黑" pitchFamily="34" charset="0"/>
+                <a:ea typeface="微软雅黑" pitchFamily="34" charset="-122"/>
+                <a:cs typeface="微软雅黑" pitchFamily="34" charset="-120"/>
+              </a:rPr>
+              <a:t>把 AI 的输出当成「会坏的东西」来设计展示层——能逐条成功、逐条给出原因，才敢上线</a:t>
+            </a:r>
+            <a:endParaRPr lang="en-US" sz="1500" dirty="0"/>
+          </a:p>
+        </p:txBody>
+      </p:sp>
+      <p:sp>
+        <p:nvSpPr>
+          <p:cNvPr id="14" name="Text 12"/>
           <p:cNvSpPr/>
           <p:nvPr/>
         </p:nvSpPr>
@@ -4841,7 +4798,7 @@
                 <a:ea typeface="微软雅黑" pitchFamily="34" charset="-122"/>
                 <a:cs typeface="微软雅黑" pitchFamily="34" charset="-120"/>
               </a:rPr>
-              <a:t>解析与丢弃见 packages/shared/src/drill.ts；展示期不做二次校验见 apps/web/src/utils/drill.ts:9-11</a:t>
+              <a:t>类型嗅探见 apps/web/src/views/RunDetailView.vue:378；消毒见 lib/markdown.ts:32-34；逐条丢弃与原因见 packages/shared/src/drill.ts</a:t>
             </a:r>
             <a:endParaRPr lang="en-US" sz="950" dirty="0"/>
           </a:p>
@@ -4912,7 +4869,7 @@
                 <a:ea typeface="微软雅黑" pitchFamily="34" charset="-122"/>
                 <a:cs typeface="微软雅黑" pitchFamily="34" charset="-120"/>
               </a:rPr>
-              <a:t>03 / 把 AI 的输出当成会坏的东西</a:t>
+              <a:t>03 / 读的时候</a:t>
             </a:r>
             <a:endParaRPr lang="en-US" sz="1200" dirty="0"/>
           </a:p>
@@ -4951,7 +4908,7 @@
                 <a:ea typeface="微软雅黑" pitchFamily="34" charset="-122"/>
                 <a:cs typeface="微软雅黑" pitchFamily="34" charset="-120"/>
               </a:rPr>
-              <a:t>AI 的 Markdown 进 DOM 之前，必须过一遍</a:t>
+              <a:t>想在输入框里选一段字，结果把节点拖跑了</a:t>
             </a:r>
             <a:endParaRPr lang="en-US" sz="3000" dirty="0"/>
           </a:p>
@@ -4959,248 +4916,14 @@
       </p:sp>
       <p:sp>
         <p:nvSpPr>
-          <p:cNvPr id="4" name="Text 2"/>
-          <p:cNvSpPr/>
-          <p:nvPr/>
-        </p:nvSpPr>
-        <p:spPr>
-          <a:xfrm>
-            <a:off x="548640" y="1691640"/>
-            <a:ext cx="2377440" cy="457200"/>
-          </a:xfrm>
-          <a:prstGeom prst="rect">
-            <a:avLst/>
-          </a:prstGeom>
-          <a:noFill/>
-          <a:ln/>
-        </p:spPr>
-        <p:txBody>
-          <a:bodyPr wrap="square" lIns="0" tIns="0" rIns="0" bIns="0" rtlCol="0" anchor="t"/>
-          <a:lstStyle/>
-          <a:p>
-            <a:pPr indent="0" marL="0">
-              <a:buNone/>
-            </a:pPr>
-            <a:r>
-              <a:rPr lang="en-US" sz="1500" b="1" dirty="0">
-                <a:solidFill>
-                  <a:srgbClr val="16181D"/>
-                </a:solidFill>
-                <a:latin typeface="微软雅黑" pitchFamily="34" charset="0"/>
-                <a:ea typeface="微软雅黑" pitchFamily="34" charset="-122"/>
-                <a:cs typeface="微软雅黑" pitchFamily="34" charset="-120"/>
-              </a:rPr>
-              <a:t>为什么危险</a:t>
-            </a:r>
-            <a:endParaRPr lang="en-US" sz="1500" dirty="0"/>
-          </a:p>
-        </p:txBody>
-      </p:sp>
-      <p:sp>
-        <p:nvSpPr>
-          <p:cNvPr id="5" name="Text 3"/>
-          <p:cNvSpPr/>
-          <p:nvPr/>
-        </p:nvSpPr>
-        <p:spPr>
-          <a:xfrm>
-            <a:off x="2926080" y="1691640"/>
-            <a:ext cx="8622792" cy="354330"/>
-          </a:xfrm>
-          <a:prstGeom prst="rect">
-            <a:avLst/>
-          </a:prstGeom>
-          <a:noFill/>
-          <a:ln/>
-        </p:spPr>
-        <p:txBody>
-          <a:bodyPr wrap="square" lIns="0" tIns="0" rIns="0" bIns="0" rtlCol="0" anchor="t"/>
-          <a:lstStyle/>
-          <a:p>
-            <a:pPr indent="0" marL="0">
-              <a:buNone/>
-            </a:pPr>
-            <a:r>
-              <a:rPr lang="en-US" sz="1500" dirty="0">
-                <a:solidFill>
-                  <a:srgbClr val="545B66"/>
-                </a:solidFill>
-                <a:latin typeface="微软雅黑" pitchFamily="34" charset="0"/>
-                <a:ea typeface="微软雅黑" pitchFamily="34" charset="-122"/>
-                <a:cs typeface="微软雅黑" pitchFamily="34" charset="-120"/>
-              </a:rPr>
-              <a:t>AI 的产物是外部输入。它返回的 Markdown 直接插进页面，等于把远端内容当本地内容渲染</a:t>
-            </a:r>
-            <a:endParaRPr lang="en-US" sz="1500" dirty="0"/>
-          </a:p>
-        </p:txBody>
-      </p:sp>
-      <p:sp>
-        <p:nvSpPr>
-          <p:cNvPr id="6" name="Text 4"/>
-          <p:cNvSpPr/>
-          <p:nvPr/>
-        </p:nvSpPr>
-        <p:spPr>
-          <a:xfrm>
-            <a:off x="548640" y="2880360"/>
-            <a:ext cx="2377440" cy="457200"/>
-          </a:xfrm>
-          <a:prstGeom prst="rect">
-            <a:avLst/>
-          </a:prstGeom>
-          <a:noFill/>
-          <a:ln/>
-        </p:spPr>
-        <p:txBody>
-          <a:bodyPr wrap="square" lIns="0" tIns="0" rIns="0" bIns="0" rtlCol="0" anchor="t"/>
-          <a:lstStyle/>
-          <a:p>
-            <a:pPr indent="0" marL="0">
-              <a:buNone/>
-            </a:pPr>
-            <a:r>
-              <a:rPr lang="en-US" sz="1500" b="1" dirty="0">
-                <a:solidFill>
-                  <a:srgbClr val="16181D"/>
-                </a:solidFill>
-                <a:latin typeface="微软雅黑" pitchFamily="34" charset="0"/>
-                <a:ea typeface="微软雅黑" pitchFamily="34" charset="-122"/>
-                <a:cs typeface="微软雅黑" pitchFamily="34" charset="-120"/>
-              </a:rPr>
-              <a:t>做法</a:t>
-            </a:r>
-            <a:endParaRPr lang="en-US" sz="1500" dirty="0"/>
-          </a:p>
-        </p:txBody>
-      </p:sp>
-      <p:sp>
-        <p:nvSpPr>
-          <p:cNvPr id="7" name="Text 5"/>
-          <p:cNvSpPr/>
-          <p:nvPr/>
-        </p:nvSpPr>
-        <p:spPr>
-          <a:xfrm>
-            <a:off x="2926080" y="2880360"/>
-            <a:ext cx="8622792" cy="354330"/>
-          </a:xfrm>
-          <a:prstGeom prst="rect">
-            <a:avLst/>
-          </a:prstGeom>
-          <a:noFill/>
-          <a:ln/>
-        </p:spPr>
-        <p:txBody>
-          <a:bodyPr wrap="square" lIns="0" tIns="0" rIns="0" bIns="0" rtlCol="0" anchor="t"/>
-          <a:lstStyle/>
-          <a:p>
-            <a:pPr indent="0" marL="0">
-              <a:buNone/>
-            </a:pPr>
-            <a:r>
-              <a:rPr lang="en-US" sz="1500" dirty="0">
-                <a:solidFill>
-                  <a:srgbClr val="545B66"/>
-                </a:solidFill>
-                <a:latin typeface="微软雅黑" pitchFamily="34" charset="0"/>
-                <a:ea typeface="微软雅黑" pitchFamily="34" charset="-122"/>
-                <a:cs typeface="微软雅黑" pitchFamily="34" charset="-120"/>
-              </a:rPr>
-              <a:t>统一走 renderMarkdown：先过 DOMPurify.sanitize，再把结果插进 DOM，不让任何一处绕开</a:t>
-            </a:r>
-            <a:endParaRPr lang="en-US" sz="1500" dirty="0"/>
-          </a:p>
-        </p:txBody>
-      </p:sp>
-      <p:sp>
-        <p:nvSpPr>
-          <p:cNvPr id="8" name="Text 6"/>
-          <p:cNvSpPr/>
-          <p:nvPr/>
-        </p:nvSpPr>
-        <p:spPr>
-          <a:xfrm>
-            <a:off x="548640" y="4069080"/>
-            <a:ext cx="2377440" cy="457200"/>
-          </a:xfrm>
-          <a:prstGeom prst="rect">
-            <a:avLst/>
-          </a:prstGeom>
-          <a:noFill/>
-          <a:ln/>
-        </p:spPr>
-        <p:txBody>
-          <a:bodyPr wrap="square" lIns="0" tIns="0" rIns="0" bIns="0" rtlCol="0" anchor="t"/>
-          <a:lstStyle/>
-          <a:p>
-            <a:pPr indent="0" marL="0">
-              <a:buNone/>
-            </a:pPr>
-            <a:r>
-              <a:rPr lang="en-US" sz="1500" b="1" dirty="0">
-                <a:solidFill>
-                  <a:srgbClr val="16181D"/>
-                </a:solidFill>
-                <a:latin typeface="微软雅黑" pitchFamily="34" charset="0"/>
-                <a:ea typeface="微软雅黑" pitchFamily="34" charset="-122"/>
-                <a:cs typeface="微软雅黑" pitchFamily="34" charset="-120"/>
-              </a:rPr>
-              <a:t>不止安全</a:t>
-            </a:r>
-            <a:endParaRPr lang="en-US" sz="1500" dirty="0"/>
-          </a:p>
-        </p:txBody>
-      </p:sp>
-      <p:sp>
-        <p:nvSpPr>
-          <p:cNvPr id="9" name="Text 7"/>
-          <p:cNvSpPr/>
-          <p:nvPr/>
-        </p:nvSpPr>
-        <p:spPr>
-          <a:xfrm>
-            <a:off x="2926080" y="4069080"/>
-            <a:ext cx="8622792" cy="354330"/>
-          </a:xfrm>
-          <a:prstGeom prst="rect">
-            <a:avLst/>
-          </a:prstGeom>
-          <a:noFill/>
-          <a:ln/>
-        </p:spPr>
-        <p:txBody>
-          <a:bodyPr wrap="square" lIns="0" tIns="0" rIns="0" bIns="0" rtlCol="0" anchor="t"/>
-          <a:lstStyle/>
-          <a:p>
-            <a:pPr indent="0" marL="0">
-              <a:buNone/>
-            </a:pPr>
-            <a:r>
-              <a:rPr lang="en-US" sz="1500" dirty="0">
-                <a:solidFill>
-                  <a:srgbClr val="545B66"/>
-                </a:solidFill>
-                <a:latin typeface="微软雅黑" pitchFamily="34" charset="0"/>
-                <a:ea typeface="微软雅黑" pitchFamily="34" charset="-122"/>
-                <a:cs typeface="微软雅黑" pitchFamily="34" charset="-120"/>
-              </a:rPr>
-              <a:t>同一层还要兜住渲染失败：解析不出来时给一句人话，不把原始 JSON 摊给用户</a:t>
-            </a:r>
-            <a:endParaRPr lang="en-US" sz="1500" dirty="0"/>
-          </a:p>
-        </p:txBody>
-      </p:sp>
-      <p:sp>
-        <p:nvSpPr>
-          <p:cNvPr id="10" name="Shape 8"/>
-          <p:cNvSpPr/>
-          <p:nvPr/>
-        </p:nvSpPr>
-        <p:spPr>
-          <a:xfrm>
-            <a:off x="457200" y="5257800"/>
-            <a:ext cx="11274552" cy="777240"/>
+          <p:cNvPr id="4" name="Shape 2"/>
+          <p:cNvSpPr/>
+          <p:nvPr/>
+        </p:nvSpPr>
+        <p:spPr>
+          <a:xfrm>
+            <a:off x="457200" y="2286000"/>
+            <a:ext cx="5454396" cy="1691640"/>
           </a:xfrm>
           <a:prstGeom prst="rect">
             <a:avLst/>
@@ -5218,13 +4941,258 @@
       </p:sp>
       <p:sp>
         <p:nvSpPr>
-          <p:cNvPr id="11" name="Text 9"/>
-          <p:cNvSpPr/>
-          <p:nvPr/>
-        </p:nvSpPr>
-        <p:spPr>
-          <a:xfrm>
-            <a:off x="777240" y="5349240"/>
+          <p:cNvPr id="5" name="Text 3"/>
+          <p:cNvSpPr/>
+          <p:nvPr/>
+        </p:nvSpPr>
+        <p:spPr>
+          <a:xfrm>
+            <a:off x="749808" y="2468880"/>
+            <a:ext cx="4869180" cy="384048"/>
+          </a:xfrm>
+          <a:prstGeom prst="rect">
+            <a:avLst/>
+          </a:prstGeom>
+          <a:noFill/>
+          <a:ln/>
+        </p:spPr>
+        <p:txBody>
+          <a:bodyPr wrap="square" lIns="0" tIns="0" rIns="0" bIns="0" rtlCol="0" anchor="ctr"/>
+          <a:lstStyle/>
+          <a:p>
+            <a:pPr indent="0" marL="0">
+              <a:buNone/>
+            </a:pPr>
+            <a:r>
+              <a:rPr lang="en-US" sz="1600" b="1" dirty="0">
+                <a:solidFill>
+                  <a:srgbClr val="16181D"/>
+                </a:solidFill>
+                <a:latin typeface="微软雅黑" pitchFamily="34" charset="0"/>
+                <a:ea typeface="微软雅黑" pitchFamily="34" charset="-122"/>
+                <a:cs typeface="微软雅黑" pitchFamily="34" charset="-120"/>
+              </a:rPr>
+              <a:t>画布要能拖</a:t>
+            </a:r>
+            <a:endParaRPr lang="en-US" sz="1600" dirty="0"/>
+          </a:p>
+        </p:txBody>
+      </p:sp>
+      <p:sp>
+        <p:nvSpPr>
+          <p:cNvPr id="6" name="Text 4"/>
+          <p:cNvSpPr/>
+          <p:nvPr/>
+        </p:nvSpPr>
+        <p:spPr>
+          <a:xfrm>
+            <a:off x="749808" y="2907792"/>
+            <a:ext cx="4869180" cy="996696"/>
+          </a:xfrm>
+          <a:prstGeom prst="rect">
+            <a:avLst/>
+          </a:prstGeom>
+          <a:noFill/>
+          <a:ln/>
+        </p:spPr>
+        <p:txBody>
+          <a:bodyPr wrap="square" lIns="0" tIns="0" rIns="0" bIns="0" rtlCol="0" anchor="t"/>
+          <a:lstStyle/>
+          <a:p>
+            <a:pPr indent="0" marL="0">
+              <a:buNone/>
+            </a:pPr>
+            <a:r>
+              <a:rPr lang="en-US" sz="1400" dirty="0">
+                <a:solidFill>
+                  <a:srgbClr val="545B66"/>
+                </a:solidFill>
+                <a:latin typeface="微软雅黑" pitchFamily="34" charset="0"/>
+                <a:ea typeface="微软雅黑" pitchFamily="34" charset="-122"/>
+                <a:cs typeface="微软雅黑" pitchFamily="34" charset="-120"/>
+              </a:rPr>
+              <a:t>整张卡片默认跟随鼠标移动——这是画布该有的手感，n8n 也是这么做的。</a:t>
+            </a:r>
+            <a:endParaRPr lang="en-US" sz="1400" dirty="0"/>
+          </a:p>
+        </p:txBody>
+      </p:sp>
+      <p:sp>
+        <p:nvSpPr>
+          <p:cNvPr id="7" name="Shape 5"/>
+          <p:cNvSpPr/>
+          <p:nvPr/>
+        </p:nvSpPr>
+        <p:spPr>
+          <a:xfrm>
+            <a:off x="6277356" y="2286000"/>
+            <a:ext cx="5454396" cy="1691640"/>
+          </a:xfrm>
+          <a:prstGeom prst="rect">
+            <a:avLst/>
+          </a:prstGeom>
+          <a:solidFill>
+            <a:srgbClr val="F4F5F6"/>
+          </a:solidFill>
+          <a:ln w="12700">
+            <a:solidFill>
+              <a:srgbClr val="E4E7EB"/>
+            </a:solidFill>
+            <a:prstDash val="solid"/>
+          </a:ln>
+        </p:spPr>
+      </p:sp>
+      <p:sp>
+        <p:nvSpPr>
+          <p:cNvPr id="8" name="Text 6"/>
+          <p:cNvSpPr/>
+          <p:nvPr/>
+        </p:nvSpPr>
+        <p:spPr>
+          <a:xfrm>
+            <a:off x="6569964" y="2468880"/>
+            <a:ext cx="4869180" cy="384048"/>
+          </a:xfrm>
+          <a:prstGeom prst="rect">
+            <a:avLst/>
+          </a:prstGeom>
+          <a:noFill/>
+          <a:ln/>
+        </p:spPr>
+        <p:txBody>
+          <a:bodyPr wrap="square" lIns="0" tIns="0" rIns="0" bIns="0" rtlCol="0" anchor="ctr"/>
+          <a:lstStyle/>
+          <a:p>
+            <a:pPr indent="0" marL="0">
+              <a:buNone/>
+            </a:pPr>
+            <a:r>
+              <a:rPr lang="en-US" sz="1600" b="1" dirty="0">
+                <a:solidFill>
+                  <a:srgbClr val="16181D"/>
+                </a:solidFill>
+                <a:latin typeface="微软雅黑" pitchFamily="34" charset="0"/>
+                <a:ea typeface="微软雅黑" pitchFamily="34" charset="-122"/>
+                <a:cs typeface="微软雅黑" pitchFamily="34" charset="-120"/>
+              </a:rPr>
+              <a:t>表单要能填</a:t>
+            </a:r>
+            <a:endParaRPr lang="en-US" sz="1600" dirty="0"/>
+          </a:p>
+        </p:txBody>
+      </p:sp>
+      <p:sp>
+        <p:nvSpPr>
+          <p:cNvPr id="9" name="Text 7"/>
+          <p:cNvSpPr/>
+          <p:nvPr/>
+        </p:nvSpPr>
+        <p:spPr>
+          <a:xfrm>
+            <a:off x="6569964" y="2907792"/>
+            <a:ext cx="4869180" cy="996696"/>
+          </a:xfrm>
+          <a:prstGeom prst="rect">
+            <a:avLst/>
+          </a:prstGeom>
+          <a:noFill/>
+          <a:ln/>
+        </p:spPr>
+        <p:txBody>
+          <a:bodyPr wrap="square" lIns="0" tIns="0" rIns="0" bIns="0" rtlCol="0" anchor="t"/>
+          <a:lstStyle/>
+          <a:p>
+            <a:pPr indent="0" marL="0">
+              <a:buNone/>
+            </a:pPr>
+            <a:r>
+              <a:rPr lang="en-US" sz="1400" dirty="0">
+                <a:solidFill>
+                  <a:srgbClr val="545B66"/>
+                </a:solidFill>
+                <a:latin typeface="微软雅黑" pitchFamily="34" charset="0"/>
+                <a:ea typeface="微软雅黑" pitchFamily="34" charset="-122"/>
+                <a:cs typeface="微软雅黑" pitchFamily="34" charset="-120"/>
+              </a:rPr>
+              <a:t>但卡片里还有输入框：要能选文字、要点得到光标、滚轮不该把画布缩放带走。</a:t>
+            </a:r>
+            <a:endParaRPr lang="en-US" sz="1400" dirty="0"/>
+          </a:p>
+        </p:txBody>
+      </p:sp>
+      <p:sp>
+        <p:nvSpPr>
+          <p:cNvPr id="10" name="Text 8"/>
+          <p:cNvSpPr/>
+          <p:nvPr/>
+        </p:nvSpPr>
+        <p:spPr>
+          <a:xfrm>
+            <a:off x="457200" y="4206240"/>
+            <a:ext cx="11274552" cy="407670"/>
+          </a:xfrm>
+          <a:prstGeom prst="rect">
+            <a:avLst/>
+          </a:prstGeom>
+          <a:noFill/>
+          <a:ln/>
+        </p:spPr>
+        <p:txBody>
+          <a:bodyPr wrap="square" lIns="0" tIns="0" rIns="0" bIns="0" rtlCol="0" anchor="ctr"/>
+          <a:lstStyle/>
+          <a:p>
+            <a:pPr indent="0" marL="0">
+              <a:buNone/>
+            </a:pPr>
+            <a:r>
+              <a:rPr lang="en-US" sz="1700" b="1" dirty="0">
+                <a:solidFill>
+                  <a:srgbClr val="16181D"/>
+                </a:solidFill>
+                <a:latin typeface="微软雅黑" pitchFamily="34" charset="0"/>
+                <a:ea typeface="微软雅黑" pitchFamily="34" charset="-122"/>
+                <a:cs typeface="微软雅黑" pitchFamily="34" charset="-120"/>
+              </a:rPr>
+              <a:t>解法：拖拽句柄收敛到卡片头部一处，表单区域标 nodrag，卡片内滚轮不穿透。</a:t>
+            </a:r>
+            <a:endParaRPr lang="en-US" sz="1700" dirty="0"/>
+          </a:p>
+        </p:txBody>
+      </p:sp>
+      <p:sp>
+        <p:nvSpPr>
+          <p:cNvPr id="11" name="Shape 9"/>
+          <p:cNvSpPr/>
+          <p:nvPr/>
+        </p:nvSpPr>
+        <p:spPr>
+          <a:xfrm>
+            <a:off x="457200" y="5029200"/>
+            <a:ext cx="11274552" cy="777240"/>
+          </a:xfrm>
+          <a:prstGeom prst="rect">
+            <a:avLst/>
+          </a:prstGeom>
+          <a:solidFill>
+            <a:srgbClr val="F4F5F6"/>
+          </a:solidFill>
+          <a:ln w="12700">
+            <a:solidFill>
+              <a:srgbClr val="E4E7EB"/>
+            </a:solidFill>
+            <a:prstDash val="solid"/>
+          </a:ln>
+        </p:spPr>
+      </p:sp>
+      <p:sp>
+        <p:nvSpPr>
+          <p:cNvPr id="12" name="Text 10"/>
+          <p:cNvSpPr/>
+          <p:nvPr/>
+        </p:nvSpPr>
+        <p:spPr>
+          <a:xfrm>
+            <a:off x="777240" y="5120640"/>
             <a:ext cx="10634472" cy="594360"/>
           </a:xfrm>
           <a:prstGeom prst="rect">
@@ -5241,7 +5209,7 @@
               <a:buNone/>
             </a:pPr>
             <a:r>
-              <a:rPr lang="en-US" sz="1500" dirty="0">
+              <a:rPr lang="en-US" sz="1500" b="1" dirty="0">
                 <a:solidFill>
                   <a:srgbClr val="16181D"/>
                 </a:solidFill>
@@ -5249,7 +5217,7 @@
                 <a:ea typeface="微软雅黑" pitchFamily="34" charset="-122"/>
                 <a:cs typeface="微软雅黑" pitchFamily="34" charset="-120"/>
               </a:rPr>
-              <a:t>这是全场唯一一条跟安全有关的结论，也是 AI 前端最容易漏的一处。</a:t>
+              <a:t>顺带一条：一按运行整张卡片就变灰锁住，用的是 getter 不是快照——所以不用刷新，界面立刻变</a:t>
             </a:r>
             <a:endParaRPr lang="en-US" sz="1500" dirty="0"/>
           </a:p>
@@ -5257,7 +5225,7 @@
       </p:sp>
       <p:sp>
         <p:nvSpPr>
-          <p:cNvPr id="12" name="Text 10"/>
+          <p:cNvPr id="13" name="Text 11"/>
           <p:cNvSpPr/>
           <p:nvPr/>
         </p:nvSpPr>
@@ -5288,7 +5256,7 @@
                 <a:ea typeface="微软雅黑" pitchFamily="34" charset="-122"/>
                 <a:cs typeface="微软雅黑" pitchFamily="34" charset="-120"/>
               </a:rPr>
-              <a:t>见 apps/web/src/lib/markdown.ts:34 的 DOMPurify.sanitize（:1 引入）；降级与丢弃见 utils/drill.ts</a:t>
+              <a:t>句柄选择器见 apps/web/src/utils/flow.ts:8；dragHandle 见 components/canvas/FlowCanvas.vue:397；只读态见 ScribeNode.vue:404</a:t>
             </a:r>
             <a:endParaRPr lang="en-US" sz="950" dirty="0"/>
           </a:p>
@@ -5359,7 +5327,7 @@
                 <a:ea typeface="微软雅黑" pitchFamily="34" charset="-122"/>
                 <a:cs typeface="微软雅黑" pitchFamily="34" charset="-120"/>
               </a:rPr>
-              <a:t>03 / 把 AI 的输出当成会坏的东西</a:t>
+              <a:t>03 / 读的时候</a:t>
             </a:r>
             <a:endParaRPr lang="en-US" sz="1200" dirty="0"/>
           </a:p>
@@ -5398,7 +5366,7 @@
                 <a:ea typeface="微软雅黑" pitchFamily="34" charset="-122"/>
                 <a:cs typeface="微软雅黑" pitchFamily="34" charset="-120"/>
               </a:rPr>
-              <a:t>分段是推导出来的，不是存下来的</a:t>
+              <a:t>粘过来的是 App 分享文案，不是链接</a:t>
             </a:r>
             <a:endParaRPr lang="en-US" sz="3000" dirty="0"/>
           </a:p>
@@ -5412,8 +5380,8 @@
         </p:nvSpPr>
         <p:spPr>
           <a:xfrm>
-            <a:off x="548640" y="2145030"/>
-            <a:ext cx="2194560" cy="457200"/>
+            <a:off x="548640" y="1645920"/>
+            <a:ext cx="2651760" cy="457200"/>
           </a:xfrm>
           <a:prstGeom prst="rect">
             <a:avLst/>
@@ -5437,7 +5405,7 @@
                 <a:ea typeface="微软雅黑" pitchFamily="34" charset="-122"/>
                 <a:cs typeface="微软雅黑" pitchFamily="34" charset="-120"/>
               </a:rPr>
-              <a:t>引擎为什么拼</a:t>
+              <a:t>用户看到的</a:t>
             </a:r>
             <a:endParaRPr lang="en-US" sz="1400" dirty="0"/>
           </a:p>
@@ -5451,8 +5419,8 @@
         </p:nvSpPr>
         <p:spPr>
           <a:xfrm>
-            <a:off x="2743200" y="2145030"/>
-            <a:ext cx="8805672" cy="336804"/>
+            <a:off x="3200400" y="1645920"/>
+            <a:ext cx="8348472" cy="336804"/>
           </a:xfrm>
           <a:prstGeom prst="rect">
             <a:avLst/>
@@ -5476,7 +5444,7 @@
                 <a:ea typeface="微软雅黑" pitchFamily="34" charset="-122"/>
                 <a:cs typeface="微软雅黑" pitchFamily="34" charset="-120"/>
               </a:rPr>
-              <a:t>用固定分隔符把多份产物接成一份，只服务下游节点与导出</a:t>
+              <a:t>从 B 站 App 复制出来的是一整段话：标题、短链、口令混在一起，粘进去建不了工程</a:t>
             </a:r>
             <a:endParaRPr lang="en-US" sz="1400" dirty="0"/>
           </a:p>
@@ -5490,8 +5458,8 @@
         </p:nvSpPr>
         <p:spPr>
           <a:xfrm>
-            <a:off x="548640" y="3224022"/>
-            <a:ext cx="2194560" cy="457200"/>
+            <a:off x="548640" y="2651760"/>
+            <a:ext cx="2651760" cy="457200"/>
           </a:xfrm>
           <a:prstGeom prst="rect">
             <a:avLst/>
@@ -5515,7 +5483,7 @@
                 <a:ea typeface="微软雅黑" pitchFamily="34" charset="-122"/>
                 <a:cs typeface="微软雅黑" pitchFamily="34" charset="-120"/>
               </a:rPr>
-              <a:t>前端怎么还原</a:t>
+              <a:t>解法</a:t>
             </a:r>
             <a:endParaRPr lang="en-US" sz="1400" dirty="0"/>
           </a:p>
@@ -5529,8 +5497,8 @@
         </p:nvSpPr>
         <p:spPr>
           <a:xfrm>
-            <a:off x="2743200" y="3224022"/>
-            <a:ext cx="8805672" cy="336804"/>
+            <a:off x="3200400" y="2651760"/>
+            <a:ext cx="8348472" cy="336804"/>
           </a:xfrm>
           <a:prstGeom prst="rect">
             <a:avLst/>
@@ -5554,7 +5522,7 @@
                 <a:ea typeface="微软雅黑" pitchFamily="34" charset="-122"/>
                 <a:cs typeface="微软雅黑" pitchFamily="34" charset="-120"/>
               </a:rPr>
-              <a:t>拿运行时记录的「每个输入一行」反推，于是历史运行不用重跑也能分段</a:t>
+              <a:t>从这段文本里抠出链接与标题，链接再拆出分 P 号——粘进去就能用，四步并成一步</a:t>
             </a:r>
             <a:endParaRPr lang="en-US" sz="1400" dirty="0"/>
           </a:p>
@@ -5568,8 +5536,8 @@
         </p:nvSpPr>
         <p:spPr>
           <a:xfrm>
-            <a:off x="548640" y="4303014"/>
-            <a:ext cx="2194560" cy="457200"/>
+            <a:off x="548640" y="3657600"/>
+            <a:ext cx="2651760" cy="457200"/>
           </a:xfrm>
           <a:prstGeom prst="rect">
             <a:avLst/>
@@ -5593,7 +5561,7 @@
                 <a:ea typeface="微软雅黑" pitchFamily="34" charset="-122"/>
                 <a:cs typeface="微软雅黑" pitchFamily="34" charset="-120"/>
               </a:rPr>
-              <a:t>为什么能读得懂</a:t>
+              <a:t>为什么值得单独做</a:t>
             </a:r>
             <a:endParaRPr lang="en-US" sz="1400" dirty="0"/>
           </a:p>
@@ -5607,8 +5575,8 @@
         </p:nvSpPr>
         <p:spPr>
           <a:xfrm>
-            <a:off x="2743200" y="4303014"/>
-            <a:ext cx="8805672" cy="336804"/>
+            <a:off x="3200400" y="3657600"/>
+            <a:ext cx="8348472" cy="336804"/>
           </a:xfrm>
           <a:prstGeom prst="rect">
             <a:avLst/>
@@ -5632,7 +5600,7 @@
                 <a:ea typeface="微软雅黑" pitchFamily="34" charset="-122"/>
                 <a:cs typeface="微软雅黑" pitchFamily="34" charset="-120"/>
               </a:rPr>
-              <a:t>分段标题要沿链路向上游回溯最多 12 层，去取原始视频的标题</a:t>
+              <a:t>用户不会为了你先把粘贴内容清理干净；不接受他的输入格式，就是把他挡在门外</a:t>
             </a:r>
             <a:endParaRPr lang="en-US" sz="1400" dirty="0"/>
           </a:p>
@@ -5646,8 +5614,8 @@
         </p:nvSpPr>
         <p:spPr>
           <a:xfrm>
-            <a:off x="548640" y="5382006"/>
-            <a:ext cx="2194560" cy="457200"/>
+            <a:off x="548640" y="4663440"/>
+            <a:ext cx="2651760" cy="457200"/>
           </a:xfrm>
           <a:prstGeom prst="rect">
             <a:avLst/>
@@ -5671,7 +5639,7 @@
                 <a:ea typeface="微软雅黑" pitchFamily="34" charset="-122"/>
                 <a:cs typeface="微软雅黑" pitchFamily="34" charset="-120"/>
               </a:rPr>
-              <a:t>三级优先级</a:t>
+              <a:t>顺带</a:t>
             </a:r>
             <a:endParaRPr lang="en-US" sz="1400" dirty="0"/>
           </a:p>
@@ -5685,8 +5653,8 @@
         </p:nvSpPr>
         <p:spPr>
           <a:xfrm>
-            <a:off x="2743200" y="5382006"/>
-            <a:ext cx="8805672" cy="336804"/>
+            <a:off x="3200400" y="4663440"/>
+            <a:ext cx="8348472" cy="336804"/>
           </a:xfrm>
           <a:prstGeom prst="rect">
             <a:avLst/>
@@ -5710,7 +5678,7 @@
                 <a:ea typeface="微软雅黑" pitchFamily="34" charset="-122"/>
                 <a:cs typeface="微软雅黑" pitchFamily="34" charset="-120"/>
               </a:rPr>
-              <a:t>先看自己的输入行，再看它交付给同一下游的份数，最后兜底用自己的输入行</a:t>
+              <a:t>短链（b23.tv）也要认，所以判定不能只看域名后缀</a:t>
             </a:r>
             <a:endParaRPr lang="en-US" sz="1400" dirty="0"/>
           </a:p>
@@ -5718,7 +5686,71 @@
       </p:sp>
       <p:sp>
         <p:nvSpPr>
-          <p:cNvPr id="12" name="Text 10"/>
+          <p:cNvPr id="12" name="Shape 10"/>
+          <p:cNvSpPr/>
+          <p:nvPr/>
+        </p:nvSpPr>
+        <p:spPr>
+          <a:xfrm>
+            <a:off x="457200" y="5440680"/>
+            <a:ext cx="11274552" cy="777240"/>
+          </a:xfrm>
+          <a:prstGeom prst="rect">
+            <a:avLst/>
+          </a:prstGeom>
+          <a:solidFill>
+            <a:srgbClr val="F4F5F6"/>
+          </a:solidFill>
+          <a:ln w="12700">
+            <a:solidFill>
+              <a:srgbClr val="E4E7EB"/>
+            </a:solidFill>
+            <a:prstDash val="solid"/>
+          </a:ln>
+        </p:spPr>
+      </p:sp>
+      <p:sp>
+        <p:nvSpPr>
+          <p:cNvPr id="13" name="Text 11"/>
+          <p:cNvSpPr/>
+          <p:nvPr/>
+        </p:nvSpPr>
+        <p:spPr>
+          <a:xfrm>
+            <a:off x="777240" y="5532120"/>
+            <a:ext cx="10634472" cy="594360"/>
+          </a:xfrm>
+          <a:prstGeom prst="rect">
+            <a:avLst/>
+          </a:prstGeom>
+          <a:noFill/>
+          <a:ln/>
+        </p:spPr>
+        <p:txBody>
+          <a:bodyPr wrap="square" lIns="0" tIns="0" rIns="0" bIns="0" rtlCol="0" anchor="ctr"/>
+          <a:lstStyle/>
+          <a:p>
+            <a:pPr indent="0" marL="0">
+              <a:buNone/>
+            </a:pPr>
+            <a:r>
+              <a:rPr lang="en-US" sz="1500" b="1" dirty="0">
+                <a:solidFill>
+                  <a:srgbClr val="16181D"/>
+                </a:solidFill>
+                <a:latin typeface="微软雅黑" pitchFamily="34" charset="0"/>
+                <a:ea typeface="微软雅黑" pitchFamily="34" charset="-122"/>
+                <a:cs typeface="微软雅黑" pitchFamily="34" charset="-120"/>
+              </a:rPr>
+              <a:t>前端最便宜的体验提升，往往就是把用户实际会粘的东西也当成合法输入</a:t>
+            </a:r>
+            <a:endParaRPr lang="en-US" sz="1500" dirty="0"/>
+          </a:p>
+        </p:txBody>
+      </p:sp>
+      <p:sp>
+        <p:nvSpPr>
+          <p:cNvPr id="14" name="Text 12"/>
           <p:cNvSpPr/>
           <p:nvPr/>
         </p:nvSpPr>
@@ -5749,7 +5781,7 @@
                 <a:ea typeface="微软雅黑" pitchFamily="34" charset="-122"/>
                 <a:cs typeface="微软雅黑" pitchFamily="34" charset="-120"/>
               </a:rPr>
-              <a:t>分段重建见 apps/web/src/utils/run-segments.ts（回溯上限 12 层见 :87 与 :131），被结果页、画布预览、日志弹窗四处共用</a:t>
+              <a:t>见 packages/shared/src/bili.ts（87 行、3 个函数，11 条用例）与 components/workspace/QuickCreateDialog.vue</a:t>
             </a:r>
             <a:endParaRPr lang="en-US" sz="950" dirty="0"/>
           </a:p>
@@ -5898,7 +5930,7 @@
                 <a:ea typeface="微软雅黑" pitchFamily="34" charset="-122"/>
                 <a:cs typeface="微软雅黑" pitchFamily="34" charset="-120"/>
               </a:rPr>
-              <a:t>加实时通道之前，先问这条通道能不能丢</a:t>
+              <a:t>「别人也有」不可怕，接不上的位置才是你的位置</a:t>
             </a:r>
             <a:endParaRPr lang="en-US" sz="2000" dirty="0"/>
           </a:p>
@@ -5937,7 +5969,7 @@
                 <a:ea typeface="微软雅黑" pitchFamily="34" charset="-122"/>
                 <a:cs typeface="微软雅黑" pitchFamily="34" charset="-120"/>
               </a:rPr>
-              <a:t>能丢，就必须有一条数据库式的真相通道兜底</a:t>
+              <a:t>固定管线和可编排之间，是两种产品的缝</a:t>
             </a:r>
             <a:endParaRPr lang="en-US" sz="1600" dirty="0"/>
           </a:p>
@@ -5976,7 +6008,7 @@
                 <a:ea typeface="微软雅黑" pitchFamily="34" charset="-122"/>
                 <a:cs typeface="微软雅黑" pitchFamily="34" charset="-120"/>
               </a:rPr>
-              <a:t>接 AI 的产物，先按「会坏一半」设计展示层</a:t>
+              <a:t>用户说「卡住了 / 闪一下 / 没反应」，先别查网络</a:t>
             </a:r>
             <a:endParaRPr lang="en-US" sz="2000" dirty="0"/>
           </a:p>
@@ -6015,7 +6047,7 @@
                 <a:ea typeface="微软雅黑" pitchFamily="34" charset="-122"/>
                 <a:cs typeface="微软雅黑" pitchFamily="34" charset="-120"/>
               </a:rPr>
-              <a:t>能逐条成功、逐条给出原因，才敢上线</a:t>
+              <a:t>这三句里至少有两句是渲染与状态的问题</a:t>
             </a:r>
             <a:endParaRPr lang="en-US" sz="1600" dirty="0"/>
           </a:p>
@@ -6054,7 +6086,7 @@
                 <a:ea typeface="微软雅黑" pitchFamily="34" charset="-122"/>
                 <a:cs typeface="微软雅黑" pitchFamily="34" charset="-120"/>
               </a:rPr>
-              <a:t>做画布或长列表之前，先问一次交互动多少 DOM</a:t>
+              <a:t>每一段数据都要带着身份走完全程</a:t>
             </a:r>
             <a:endParaRPr lang="en-US" sz="2000" dirty="0"/>
           </a:p>
@@ -6093,7 +6125,7 @@
                 <a:ea typeface="微软雅黑" pitchFamily="34" charset="-122"/>
                 <a:cs typeface="微软雅黑" pitchFamily="34" charset="-120"/>
               </a:rPr>
-              <a:t>一屏放不下 + 还在频繁更新，就是同一类问题</a:t>
+              <a:t>素材段不掺下标、状态不靠推送——都是同一件事</a:t>
             </a:r>
             <a:endParaRPr lang="en-US" sz="1600" dirty="0"/>
           </a:p>
@@ -6217,7 +6249,7 @@
         </p:nvSpPr>
         <p:spPr>
           <a:xfrm>
-            <a:off x="548640" y="2474976"/>
+            <a:off x="548640" y="2597658"/>
             <a:ext cx="2743200" cy="457200"/>
           </a:xfrm>
           <a:prstGeom prst="rect">
@@ -6256,7 +6288,7 @@
         </p:nvSpPr>
         <p:spPr>
           <a:xfrm>
-            <a:off x="3291840" y="2474976"/>
+            <a:off x="3291840" y="2597658"/>
             <a:ext cx="8257032" cy="582168"/>
           </a:xfrm>
           <a:prstGeom prst="rect">
@@ -6281,7 +6313,7 @@
                 <a:ea typeface="微软雅黑" pitchFamily="34" charset="-122"/>
                 <a:cs typeface="微软雅黑" pitchFamily="34" charset="-120"/>
               </a:rPr>
-              <a:t>画布抛提示的 3 处调用（节点已达上限两处、自动布局失败一处），父组件一个都没绑定，用户在界面上完全看不到这条反馈</a:t>
+              <a:t>画布有 3 处 emit("notice")（节点已达上限 2 处、自动布局失败 1 处），父组件一个都没绑定——用户在界面上完全看不到这条反馈</a:t>
             </a:r>
             <a:endParaRPr lang="en-US" sz="1400" dirty="0"/>
           </a:p>
@@ -6295,7 +6327,7 @@
         </p:nvSpPr>
         <p:spPr>
           <a:xfrm>
-            <a:off x="548640" y="3709416"/>
+            <a:off x="548640" y="3832098"/>
             <a:ext cx="2743200" cy="457200"/>
           </a:xfrm>
           <a:prstGeom prst="rect">
@@ -6320,7 +6352,7 @@
                 <a:ea typeface="微软雅黑" pitchFamily="34" charset="-122"/>
                 <a:cs typeface="微软雅黑" pitchFamily="34" charset="-120"/>
               </a:rPr>
-              <a:t>规则分了三份</a:t>
+              <a:t>长文档还是一次性渲染</a:t>
             </a:r>
             <a:endParaRPr lang="en-US" sz="1400" dirty="0"/>
           </a:p>
@@ -6334,8 +6366,8 @@
         </p:nvSpPr>
         <p:spPr>
           <a:xfrm>
-            <a:off x="3291840" y="3709416"/>
-            <a:ext cx="8257032" cy="582168"/>
+            <a:off x="3291840" y="3832098"/>
+            <a:ext cx="8257032" cy="336804"/>
           </a:xfrm>
           <a:prstGeom prst="rect">
             <a:avLst/>
@@ -6359,7 +6391,7 @@
                 <a:ea typeface="微软雅黑" pitchFamily="34" charset="-122"/>
                 <a:cs typeface="微软雅黑" pitchFamily="34" charset="-120"/>
               </a:rPr>
-              <a:t>连线合法性有 canConnect / canConnectSpecs / isValidConnection 三处实现，最后那一处只被测试引用，已经不认多类型端口</a:t>
+              <a:t>几万字的正文一次全进 DOM，虚拟化没做；长列表滚动会是下一处要还的债</a:t>
             </a:r>
             <a:endParaRPr lang="en-US" sz="1400" dirty="0"/>
           </a:p>
@@ -6373,7 +6405,7 @@
         </p:nvSpPr>
         <p:spPr>
           <a:xfrm>
-            <a:off x="548640" y="4943856"/>
+            <a:off x="548640" y="5066538"/>
             <a:ext cx="2743200" cy="457200"/>
           </a:xfrm>
           <a:prstGeom prst="rect">
@@ -6412,7 +6444,7 @@
         </p:nvSpPr>
         <p:spPr>
           <a:xfrm>
-            <a:off x="3291840" y="4943856"/>
+            <a:off x="3291840" y="5066538"/>
             <a:ext cx="8257032" cy="582168"/>
           </a:xfrm>
           <a:prstGeom prst="rect">
@@ -6476,7 +6508,7 @@
                 <a:ea typeface="微软雅黑" pitchFamily="34" charset="-122"/>
                 <a:cs typeface="微软雅黑" pitchFamily="34" charset="-120"/>
               </a:rPr>
-              <a:t>自查方式：搜 emit 的定义与父组件的绑定是否对得上；搜同一规则是否在多处重复实现</a:t>
+              <a:t>自查方式：搜 emit 的定义与父组件的绑定是否对得上；搜同一规则是否在多处重复实现；把契约的枚举与样式表对一遍</a:t>
             </a:r>
             <a:endParaRPr lang="en-US" sz="950" dirty="0"/>
           </a:p>
@@ -6703,7 +6735,7 @@
                 <a:ea typeface="微软雅黑" pitchFamily="34" charset="-122"/>
                 <a:cs typeface="微软雅黑" pitchFamily="34" charset="-120"/>
               </a:rPr>
-              <a:t>我想要的是把中间每一步都摊开：转写用什么、校对要不要、提炼用哪套提示词、最后要不要出题，我自己连。</a:t>
+              <a:t>我想要的是把中间每一步都摊开：转写用什么、校对要不要、提炼用哪套提示词、要不要出思维导图，我自己连。</a:t>
             </a:r>
             <a:endParaRPr lang="en-US" sz="1700" dirty="0"/>
           </a:p>
@@ -6773,7 +6805,7 @@
               <a:buNone/>
             </a:pPr>
             <a:r>
-              <a:rPr lang="en-US" sz="1900" b="1" dirty="0">
+              <a:rPr lang="en-US" sz="1800" b="1" dirty="0">
                 <a:solidFill>
                   <a:srgbClr val="00AEEC"/>
                 </a:solidFill>
@@ -6781,9 +6813,9 @@
                 <a:ea typeface="微软雅黑" pitchFamily="34" charset="-122"/>
                 <a:cs typeface="微软雅黑" pitchFamily="34" charset="-120"/>
               </a:rPr>
-              <a:t>下面讲的三件事，都是这张画布上用户看得见的界面</a:t>
-            </a:r>
-            <a:endParaRPr lang="en-US" sz="1900" dirty="0"/>
+              <a:t>先讲它是什么，再讲用户在界面上会碰到的两类事：跑的时候、读的时候</a:t>
+            </a:r>
+            <a:endParaRPr lang="en-US" sz="1800" dirty="0"/>
           </a:p>
         </p:txBody>
       </p:sp>
@@ -6840,7 +6872,7 @@
     <p:bg>
       <p:bgPr>
         <a:solidFill>
-          <a:srgbClr val="16181D"/>
+          <a:srgbClr val="FFFFFF"/>
         </a:solidFill>
       </p:bgPr>
     </p:bg>
@@ -6885,13 +6917,13 @@
             <a:r>
               <a:rPr lang="en-US" sz="1200" spc="300" kern="0" dirty="0">
                 <a:solidFill>
-                  <a:srgbClr val="8A929E"/>
-                </a:solidFill>
-                <a:latin typeface="微软雅黑" pitchFamily="34" charset="0"/>
-                <a:ea typeface="微软雅黑" pitchFamily="34" charset="-122"/>
-                <a:cs typeface="微软雅黑" pitchFamily="34" charset="-120"/>
-              </a:rPr>
-              <a:t>今天讲三件事</a:t>
+                  <a:srgbClr val="545B66"/>
+                </a:solidFill>
+                <a:latin typeface="微软雅黑" pitchFamily="34" charset="0"/>
+                <a:ea typeface="微软雅黑" pitchFamily="34" charset="-122"/>
+                <a:cs typeface="微软雅黑" pitchFamily="34" charset="-120"/>
+              </a:rPr>
+              <a:t>01 / 它是什么</a:t>
             </a:r>
             <a:endParaRPr lang="en-US" sz="1200" dirty="0"/>
           </a:p>
@@ -6924,13 +6956,13 @@
             <a:r>
               <a:rPr lang="en-US" sz="3000" b="1" dirty="0">
                 <a:solidFill>
-                  <a:srgbClr val="FFFFFF"/>
-                </a:solidFill>
-                <a:latin typeface="微软雅黑" pitchFamily="34" charset="0"/>
-                <a:ea typeface="微软雅黑" pitchFamily="34" charset="-122"/>
-                <a:cs typeface="微软雅黑" pitchFamily="34" charset="-120"/>
-              </a:rPr>
-              <a:t>都是产品的主体界面，不是工程配置</a:t>
+                  <a:srgbClr val="16181D"/>
+                </a:solidFill>
+                <a:latin typeface="微软雅黑" pitchFamily="34" charset="0"/>
+                <a:ea typeface="微软雅黑" pitchFamily="34" charset="-122"/>
+                <a:cs typeface="微软雅黑" pitchFamily="34" charset="-120"/>
+              </a:rPr>
+              <a:t>一张画布，三个界面</a:t>
             </a:r>
             <a:endParaRPr lang="en-US" sz="3000" dirty="0"/>
           </a:p>
@@ -6944,8 +6976,345 @@
         </p:nvSpPr>
         <p:spPr>
           <a:xfrm>
-            <a:off x="457200" y="2240280"/>
-            <a:ext cx="868680" cy="777240"/>
+            <a:off x="548640" y="1645920"/>
+            <a:ext cx="2377440" cy="457200"/>
+          </a:xfrm>
+          <a:prstGeom prst="rect">
+            <a:avLst/>
+          </a:prstGeom>
+          <a:noFill/>
+          <a:ln/>
+        </p:spPr>
+        <p:txBody>
+          <a:bodyPr wrap="square" lIns="0" tIns="0" rIns="0" bIns="0" rtlCol="0" anchor="t"/>
+          <a:lstStyle/>
+          <a:p>
+            <a:pPr indent="0" marL="0">
+              <a:buNone/>
+            </a:pPr>
+            <a:r>
+              <a:rPr lang="en-US" sz="1400" b="1" dirty="0">
+                <a:solidFill>
+                  <a:srgbClr val="16181D"/>
+                </a:solidFill>
+                <a:latin typeface="微软雅黑" pitchFamily="34" charset="0"/>
+                <a:ea typeface="微软雅黑" pitchFamily="34" charset="-122"/>
+                <a:cs typeface="微软雅黑" pitchFamily="34" charset="-120"/>
+              </a:rPr>
+              <a:t>画布上放什么</a:t>
+            </a:r>
+            <a:endParaRPr lang="en-US" sz="1400" dirty="0"/>
+          </a:p>
+        </p:txBody>
+      </p:sp>
+      <p:sp>
+        <p:nvSpPr>
+          <p:cNvPr id="5" name="Text 3"/>
+          <p:cNvSpPr/>
+          <p:nvPr/>
+        </p:nvSpPr>
+        <p:spPr>
+          <a:xfrm>
+            <a:off x="2926080" y="1645920"/>
+            <a:ext cx="8622792" cy="336804"/>
+          </a:xfrm>
+          <a:prstGeom prst="rect">
+            <a:avLst/>
+          </a:prstGeom>
+          <a:noFill/>
+          <a:ln/>
+        </p:spPr>
+        <p:txBody>
+          <a:bodyPr wrap="square" lIns="0" tIns="0" rIns="0" bIns="0" rtlCol="0" anchor="t"/>
+          <a:lstStyle/>
+          <a:p>
+            <a:pPr indent="0" marL="0">
+              <a:buNone/>
+            </a:pPr>
+            <a:r>
+              <a:rPr lang="en-US" sz="1400" dirty="0">
+                <a:solidFill>
+                  <a:srgbClr val="545B66"/>
+                </a:solidFill>
+                <a:latin typeface="微软雅黑" pitchFamily="34" charset="0"/>
+                <a:ea typeface="微软雅黑" pitchFamily="34" charset="-122"/>
+                <a:cs typeface="微软雅黑" pitchFamily="34" charset="-120"/>
+              </a:rPr>
+              <a:t>B 站链接（能选合集与多 P）、本地音视频、已有文稿——三种来源</a:t>
+            </a:r>
+            <a:endParaRPr lang="en-US" sz="1400" dirty="0"/>
+          </a:p>
+        </p:txBody>
+      </p:sp>
+      <p:sp>
+        <p:nvSpPr>
+          <p:cNvPr id="6" name="Text 4"/>
+          <p:cNvSpPr/>
+          <p:nvPr/>
+        </p:nvSpPr>
+        <p:spPr>
+          <a:xfrm>
+            <a:off x="548640" y="2651760"/>
+            <a:ext cx="2377440" cy="457200"/>
+          </a:xfrm>
+          <a:prstGeom prst="rect">
+            <a:avLst/>
+          </a:prstGeom>
+          <a:noFill/>
+          <a:ln/>
+        </p:spPr>
+        <p:txBody>
+          <a:bodyPr wrap="square" lIns="0" tIns="0" rIns="0" bIns="0" rtlCol="0" anchor="t"/>
+          <a:lstStyle/>
+          <a:p>
+            <a:pPr indent="0" marL="0">
+              <a:buNone/>
+            </a:pPr>
+            <a:r>
+              <a:rPr lang="en-US" sz="1400" b="1" dirty="0">
+                <a:solidFill>
+                  <a:srgbClr val="16181D"/>
+                </a:solidFill>
+                <a:latin typeface="微软雅黑" pitchFamily="34" charset="0"/>
+                <a:ea typeface="微软雅黑" pitchFamily="34" charset="-122"/>
+                <a:cs typeface="微软雅黑" pitchFamily="34" charset="-120"/>
+              </a:rPr>
+              <a:t>中间接什么</a:t>
+            </a:r>
+            <a:endParaRPr lang="en-US" sz="1400" dirty="0"/>
+          </a:p>
+        </p:txBody>
+      </p:sp>
+      <p:sp>
+        <p:nvSpPr>
+          <p:cNvPr id="7" name="Text 5"/>
+          <p:cNvSpPr/>
+          <p:nvPr/>
+        </p:nvSpPr>
+        <p:spPr>
+          <a:xfrm>
+            <a:off x="2926080" y="2651760"/>
+            <a:ext cx="8622792" cy="336804"/>
+          </a:xfrm>
+          <a:prstGeom prst="rect">
+            <a:avLst/>
+          </a:prstGeom>
+          <a:noFill/>
+          <a:ln/>
+        </p:spPr>
+        <p:txBody>
+          <a:bodyPr wrap="square" lIns="0" tIns="0" rIns="0" bIns="0" rtlCol="0" anchor="t"/>
+          <a:lstStyle/>
+          <a:p>
+            <a:pPr indent="0" marL="0">
+              <a:buNone/>
+            </a:pPr>
+            <a:r>
+              <a:rPr lang="en-US" sz="1400" dirty="0">
+                <a:solidFill>
+                  <a:srgbClr val="545B66"/>
+                </a:solidFill>
+                <a:latin typeface="微软雅黑" pitchFamily="34" charset="0"/>
+                <a:ea typeface="微软雅黑" pitchFamily="34" charset="-122"/>
+                <a:cs typeface="微软雅黑" pitchFamily="34" charset="-120"/>
+              </a:rPr>
+              <a:t>16 种节点：转写、AI 校对、AI 加工、章节切分、思维导图、Obsidian 笔记、练一练…</a:t>
+            </a:r>
+            <a:endParaRPr lang="en-US" sz="1400" dirty="0"/>
+          </a:p>
+        </p:txBody>
+      </p:sp>
+      <p:sp>
+        <p:nvSpPr>
+          <p:cNvPr id="8" name="Text 6"/>
+          <p:cNvSpPr/>
+          <p:nvPr/>
+        </p:nvSpPr>
+        <p:spPr>
+          <a:xfrm>
+            <a:off x="548640" y="3657600"/>
+            <a:ext cx="2377440" cy="457200"/>
+          </a:xfrm>
+          <a:prstGeom prst="rect">
+            <a:avLst/>
+          </a:prstGeom>
+          <a:noFill/>
+          <a:ln/>
+        </p:spPr>
+        <p:txBody>
+          <a:bodyPr wrap="square" lIns="0" tIns="0" rIns="0" bIns="0" rtlCol="0" anchor="t"/>
+          <a:lstStyle/>
+          <a:p>
+            <a:pPr indent="0" marL="0">
+              <a:buNone/>
+            </a:pPr>
+            <a:r>
+              <a:rPr lang="en-US" sz="1400" b="1" dirty="0">
+                <a:solidFill>
+                  <a:srgbClr val="16181D"/>
+                </a:solidFill>
+                <a:latin typeface="微软雅黑" pitchFamily="34" charset="0"/>
+                <a:ea typeface="微软雅黑" pitchFamily="34" charset="-122"/>
+                <a:cs typeface="微软雅黑" pitchFamily="34" charset="-120"/>
+              </a:rPr>
+              <a:t>不用从零连</a:t>
+            </a:r>
+            <a:endParaRPr lang="en-US" sz="1400" dirty="0"/>
+          </a:p>
+        </p:txBody>
+      </p:sp>
+      <p:sp>
+        <p:nvSpPr>
+          <p:cNvPr id="9" name="Text 7"/>
+          <p:cNvSpPr/>
+          <p:nvPr/>
+        </p:nvSpPr>
+        <p:spPr>
+          <a:xfrm>
+            <a:off x="2926080" y="3657600"/>
+            <a:ext cx="8622792" cy="336804"/>
+          </a:xfrm>
+          <a:prstGeom prst="rect">
+            <a:avLst/>
+          </a:prstGeom>
+          <a:noFill/>
+          <a:ln/>
+        </p:spPr>
+        <p:txBody>
+          <a:bodyPr wrap="square" lIns="0" tIns="0" rIns="0" bIns="0" rtlCol="0" anchor="t"/>
+          <a:lstStyle/>
+          <a:p>
+            <a:pPr indent="0" marL="0">
+              <a:buNone/>
+            </a:pPr>
+            <a:r>
+              <a:rPr lang="en-US" sz="1400" dirty="0">
+                <a:solidFill>
+                  <a:srgbClr val="545B66"/>
+                </a:solidFill>
+                <a:latin typeface="微软雅黑" pitchFamily="34" charset="0"/>
+                <a:ea typeface="微软雅黑" pitchFamily="34" charset="-122"/>
+                <a:cs typeface="微软雅黑" pitchFamily="34" charset="-120"/>
+              </a:rPr>
+              <a:t>内置 9 条常用链路（单线笔记、多路对照、思维导图、分章笔记…），名字与来源无关，也可以自己连</a:t>
+            </a:r>
+            <a:endParaRPr lang="en-US" sz="1400" dirty="0"/>
+          </a:p>
+        </p:txBody>
+      </p:sp>
+      <p:sp>
+        <p:nvSpPr>
+          <p:cNvPr id="10" name="Text 8"/>
+          <p:cNvSpPr/>
+          <p:nvPr/>
+        </p:nvSpPr>
+        <p:spPr>
+          <a:xfrm>
+            <a:off x="548640" y="4663440"/>
+            <a:ext cx="2377440" cy="457200"/>
+          </a:xfrm>
+          <a:prstGeom prst="rect">
+            <a:avLst/>
+          </a:prstGeom>
+          <a:noFill/>
+          <a:ln/>
+        </p:spPr>
+        <p:txBody>
+          <a:bodyPr wrap="square" lIns="0" tIns="0" rIns="0" bIns="0" rtlCol="0" anchor="t"/>
+          <a:lstStyle/>
+          <a:p>
+            <a:pPr indent="0" marL="0">
+              <a:buNone/>
+            </a:pPr>
+            <a:r>
+              <a:rPr lang="en-US" sz="1400" b="1" dirty="0">
+                <a:solidFill>
+                  <a:srgbClr val="16181D"/>
+                </a:solidFill>
+                <a:latin typeface="微软雅黑" pitchFamily="34" charset="0"/>
+                <a:ea typeface="微软雅黑" pitchFamily="34" charset="-122"/>
+                <a:cs typeface="微软雅黑" pitchFamily="34" charset="-120"/>
+              </a:rPr>
+              <a:t>跑完看什么</a:t>
+            </a:r>
+            <a:endParaRPr lang="en-US" sz="1400" dirty="0"/>
+          </a:p>
+        </p:txBody>
+      </p:sp>
+      <p:sp>
+        <p:nvSpPr>
+          <p:cNvPr id="11" name="Text 9"/>
+          <p:cNvSpPr/>
+          <p:nvPr/>
+        </p:nvSpPr>
+        <p:spPr>
+          <a:xfrm>
+            <a:off x="2926080" y="4663440"/>
+            <a:ext cx="8622792" cy="336804"/>
+          </a:xfrm>
+          <a:prstGeom prst="rect">
+            <a:avLst/>
+          </a:prstGeom>
+          <a:noFill/>
+          <a:ln/>
+        </p:spPr>
+        <p:txBody>
+          <a:bodyPr wrap="square" lIns="0" tIns="0" rIns="0" bIns="0" rtlCol="0" anchor="t"/>
+          <a:lstStyle/>
+          <a:p>
+            <a:pPr indent="0" marL="0">
+              <a:buNone/>
+            </a:pPr>
+            <a:r>
+              <a:rPr lang="en-US" sz="1400" dirty="0">
+                <a:solidFill>
+                  <a:srgbClr val="545B66"/>
+                </a:solidFill>
+                <a:latin typeface="微软雅黑" pitchFamily="34" charset="0"/>
+                <a:ea typeface="微软雅黑" pitchFamily="34" charset="-122"/>
+                <a:cs typeface="微软雅黑" pitchFamily="34" charset="-120"/>
+              </a:rPr>
+              <a:t>结果页：正文、按视频分段、思维导图、练一练、节点流水——后两个有产物才出现</a:t>
+            </a:r>
+            <a:endParaRPr lang="en-US" sz="1400" dirty="0"/>
+          </a:p>
+        </p:txBody>
+      </p:sp>
+      <p:sp>
+        <p:nvSpPr>
+          <p:cNvPr id="12" name="Shape 10"/>
+          <p:cNvSpPr/>
+          <p:nvPr/>
+        </p:nvSpPr>
+        <p:spPr>
+          <a:xfrm>
+            <a:off x="457200" y="5440680"/>
+            <a:ext cx="11274552" cy="777240"/>
+          </a:xfrm>
+          <a:prstGeom prst="rect">
+            <a:avLst/>
+          </a:prstGeom>
+          <a:solidFill>
+            <a:srgbClr val="F4F5F6"/>
+          </a:solidFill>
+          <a:ln w="12700">
+            <a:solidFill>
+              <a:srgbClr val="E4E7EB"/>
+            </a:solidFill>
+            <a:prstDash val="solid"/>
+          </a:ln>
+        </p:spPr>
+      </p:sp>
+      <p:sp>
+        <p:nvSpPr>
+          <p:cNvPr id="13" name="Text 11"/>
+          <p:cNvSpPr/>
+          <p:nvPr/>
+        </p:nvSpPr>
+        <p:spPr>
+          <a:xfrm>
+            <a:off x="777240" y="5532120"/>
+            <a:ext cx="10634472" cy="594360"/>
           </a:xfrm>
           <a:prstGeom prst="rect">
             <a:avLst/>
@@ -6961,30 +7330,30 @@
               <a:buNone/>
             </a:pPr>
             <a:r>
-              <a:rPr lang="en-US" sz="3400" b="1" dirty="0">
-                <a:solidFill>
-                  <a:srgbClr val="00AEEC"/>
-                </a:solidFill>
-                <a:latin typeface="Consolas" pitchFamily="34" charset="0"/>
-                <a:ea typeface="Consolas" pitchFamily="34" charset="-122"/>
-                <a:cs typeface="Consolas" pitchFamily="34" charset="-120"/>
-              </a:rPr>
-              <a:t>01</a:t>
-            </a:r>
-            <a:endParaRPr lang="en-US" sz="3400" dirty="0"/>
-          </a:p>
-        </p:txBody>
-      </p:sp>
-      <p:sp>
-        <p:nvSpPr>
-          <p:cNvPr id="5" name="Text 3"/>
-          <p:cNvSpPr/>
-          <p:nvPr/>
-        </p:nvSpPr>
-        <p:spPr>
-          <a:xfrm>
-            <a:off x="1417320" y="2194560"/>
-            <a:ext cx="10314432" cy="457200"/>
+              <a:rPr lang="en-US" sz="1500" b="1" dirty="0">
+                <a:solidFill>
+                  <a:srgbClr val="16181D"/>
+                </a:solidFill>
+                <a:latin typeface="微软雅黑" pitchFamily="34" charset="0"/>
+                <a:ea typeface="微软雅黑" pitchFamily="34" charset="-122"/>
+                <a:cs typeface="微软雅黑" pitchFamily="34" charset="-120"/>
+              </a:rPr>
+              <a:t>把视频和文稿放进画布，连出「转写 → 加工」，跑完得到一份能带走的 Markdown 笔记</a:t>
+            </a:r>
+            <a:endParaRPr lang="en-US" sz="1500" dirty="0"/>
+          </a:p>
+        </p:txBody>
+      </p:sp>
+      <p:sp>
+        <p:nvSpPr>
+          <p:cNvPr id="14" name="Text 12"/>
+          <p:cNvSpPr/>
+          <p:nvPr/>
+        </p:nvSpPr>
+        <p:spPr>
+          <a:xfrm>
+            <a:off x="457200" y="6327648"/>
+            <a:ext cx="11274552" cy="274320"/>
           </a:xfrm>
           <a:prstGeom prst="rect">
             <a:avLst/>
@@ -7000,290 +7369,17 @@
               <a:buNone/>
             </a:pPr>
             <a:r>
-              <a:rPr lang="en-US" sz="2200" b="1" dirty="0">
-                <a:solidFill>
-                  <a:srgbClr val="FFFFFF"/>
-                </a:solidFill>
-                <a:latin typeface="微软雅黑" pitchFamily="34" charset="0"/>
-                <a:ea typeface="微软雅黑" pitchFamily="34" charset="-122"/>
-                <a:cs typeface="微软雅黑" pitchFamily="34" charset="-120"/>
-              </a:rPr>
-              <a:t>节点编排画布</a:t>
-            </a:r>
-            <a:endParaRPr lang="en-US" sz="2200" dirty="0"/>
-          </a:p>
-        </p:txBody>
-      </p:sp>
-      <p:sp>
-        <p:nvSpPr>
-          <p:cNvPr id="6" name="Text 4"/>
-          <p:cNvSpPr/>
-          <p:nvPr/>
-        </p:nvSpPr>
-        <p:spPr>
-          <a:xfrm>
-            <a:off x="1417320" y="2624328"/>
-            <a:ext cx="10314432" cy="411480"/>
-          </a:xfrm>
-          <a:prstGeom prst="rect">
-            <a:avLst/>
-          </a:prstGeom>
-          <a:noFill/>
-          <a:ln/>
-        </p:spPr>
-        <p:txBody>
-          <a:bodyPr wrap="square" lIns="0" tIns="0" rIns="0" bIns="0" rtlCol="0" anchor="ctr"/>
-          <a:lstStyle/>
-          <a:p>
-            <a:pPr indent="0" marL="0">
-              <a:buNone/>
-            </a:pPr>
-            <a:r>
-              <a:rPr lang="en-US" sz="1600" dirty="0">
-                <a:solidFill>
-                  <a:srgbClr val="8A929E"/>
-                </a:solidFill>
-                <a:latin typeface="微软雅黑" pitchFamily="34" charset="0"/>
-                <a:ea typeface="微软雅黑" pitchFamily="34" charset="-122"/>
-                <a:cs typeface="微软雅黑" pitchFamily="34" charset="-120"/>
-              </a:rPr>
-              <a:t>16 种节点、5913 行代码，画布是这个产品的核心界面</a:t>
-            </a:r>
-            <a:endParaRPr lang="en-US" sz="1600" dirty="0"/>
-          </a:p>
-        </p:txBody>
-      </p:sp>
-      <p:sp>
-        <p:nvSpPr>
-          <p:cNvPr id="7" name="Text 5"/>
-          <p:cNvSpPr/>
-          <p:nvPr/>
-        </p:nvSpPr>
-        <p:spPr>
-          <a:xfrm>
-            <a:off x="457200" y="3474720"/>
-            <a:ext cx="868680" cy="777240"/>
-          </a:xfrm>
-          <a:prstGeom prst="rect">
-            <a:avLst/>
-          </a:prstGeom>
-          <a:noFill/>
-          <a:ln/>
-        </p:spPr>
-        <p:txBody>
-          <a:bodyPr wrap="square" lIns="0" tIns="0" rIns="0" bIns="0" rtlCol="0" anchor="ctr"/>
-          <a:lstStyle/>
-          <a:p>
-            <a:pPr indent="0" marL="0">
-              <a:buNone/>
-            </a:pPr>
-            <a:r>
-              <a:rPr lang="en-US" sz="3400" b="1" dirty="0">
-                <a:solidFill>
-                  <a:srgbClr val="00AEEC"/>
-                </a:solidFill>
-                <a:latin typeface="Consolas" pitchFamily="34" charset="0"/>
-                <a:ea typeface="Consolas" pitchFamily="34" charset="-122"/>
-                <a:cs typeface="Consolas" pitchFamily="34" charset="-120"/>
-              </a:rPr>
-              <a:t>02</a:t>
-            </a:r>
-            <a:endParaRPr lang="en-US" sz="3400" dirty="0"/>
-          </a:p>
-        </p:txBody>
-      </p:sp>
-      <p:sp>
-        <p:nvSpPr>
-          <p:cNvPr id="8" name="Text 6"/>
-          <p:cNvSpPr/>
-          <p:nvPr/>
-        </p:nvSpPr>
-        <p:spPr>
-          <a:xfrm>
-            <a:off x="1417320" y="3429000"/>
-            <a:ext cx="10314432" cy="457200"/>
-          </a:xfrm>
-          <a:prstGeom prst="rect">
-            <a:avLst/>
-          </a:prstGeom>
-          <a:noFill/>
-          <a:ln/>
-        </p:spPr>
-        <p:txBody>
-          <a:bodyPr wrap="square" lIns="0" tIns="0" rIns="0" bIns="0" rtlCol="0" anchor="ctr"/>
-          <a:lstStyle/>
-          <a:p>
-            <a:pPr indent="0" marL="0">
-              <a:buNone/>
-            </a:pPr>
-            <a:r>
-              <a:rPr lang="en-US" sz="2200" b="1" dirty="0">
-                <a:solidFill>
-                  <a:srgbClr val="FFFFFF"/>
-                </a:solidFill>
-                <a:latin typeface="微软雅黑" pitchFamily="34" charset="0"/>
-                <a:ea typeface="微软雅黑" pitchFamily="34" charset="-122"/>
-                <a:cs typeface="微软雅黑" pitchFamily="34" charset="-120"/>
-              </a:rPr>
-              <a:t>推送会撒谎，数据库不会</a:t>
-            </a:r>
-            <a:endParaRPr lang="en-US" sz="2200" dirty="0"/>
-          </a:p>
-        </p:txBody>
-      </p:sp>
-      <p:sp>
-        <p:nvSpPr>
-          <p:cNvPr id="9" name="Text 7"/>
-          <p:cNvSpPr/>
-          <p:nvPr/>
-        </p:nvSpPr>
-        <p:spPr>
-          <a:xfrm>
-            <a:off x="1417320" y="3858768"/>
-            <a:ext cx="10314432" cy="411480"/>
-          </a:xfrm>
-          <a:prstGeom prst="rect">
-            <a:avLst/>
-          </a:prstGeom>
-          <a:noFill/>
-          <a:ln/>
-        </p:spPr>
-        <p:txBody>
-          <a:bodyPr wrap="square" lIns="0" tIns="0" rIns="0" bIns="0" rtlCol="0" anchor="ctr"/>
-          <a:lstStyle/>
-          <a:p>
-            <a:pPr indent="0" marL="0">
-              <a:buNone/>
-            </a:pPr>
-            <a:r>
-              <a:rPr lang="en-US" sz="1600" dirty="0">
-                <a:solidFill>
-                  <a:srgbClr val="8A929E"/>
-                </a:solidFill>
-                <a:latin typeface="微软雅黑" pitchFamily="34" charset="0"/>
-                <a:ea typeface="微软雅黑" pitchFamily="34" charset="-122"/>
-                <a:cs typeface="微软雅黑" pitchFamily="34" charset="-120"/>
-              </a:rPr>
-              <a:t>一次运行可能跑十几分钟，中途断线、切页面、重启都是常态</a:t>
-            </a:r>
-            <a:endParaRPr lang="en-US" sz="1600" dirty="0"/>
-          </a:p>
-        </p:txBody>
-      </p:sp>
-      <p:sp>
-        <p:nvSpPr>
-          <p:cNvPr id="10" name="Text 8"/>
-          <p:cNvSpPr/>
-          <p:nvPr/>
-        </p:nvSpPr>
-        <p:spPr>
-          <a:xfrm>
-            <a:off x="457200" y="4709160"/>
-            <a:ext cx="868680" cy="777240"/>
-          </a:xfrm>
-          <a:prstGeom prst="rect">
-            <a:avLst/>
-          </a:prstGeom>
-          <a:noFill/>
-          <a:ln/>
-        </p:spPr>
-        <p:txBody>
-          <a:bodyPr wrap="square" lIns="0" tIns="0" rIns="0" bIns="0" rtlCol="0" anchor="ctr"/>
-          <a:lstStyle/>
-          <a:p>
-            <a:pPr indent="0" marL="0">
-              <a:buNone/>
-            </a:pPr>
-            <a:r>
-              <a:rPr lang="en-US" sz="3400" b="1" dirty="0">
-                <a:solidFill>
-                  <a:srgbClr val="00AEEC"/>
-                </a:solidFill>
-                <a:latin typeface="Consolas" pitchFamily="34" charset="0"/>
-                <a:ea typeface="Consolas" pitchFamily="34" charset="-122"/>
-                <a:cs typeface="Consolas" pitchFamily="34" charset="-120"/>
-              </a:rPr>
-              <a:t>03</a:t>
-            </a:r>
-            <a:endParaRPr lang="en-US" sz="3400" dirty="0"/>
-          </a:p>
-        </p:txBody>
-      </p:sp>
-      <p:sp>
-        <p:nvSpPr>
-          <p:cNvPr id="11" name="Text 9"/>
-          <p:cNvSpPr/>
-          <p:nvPr/>
-        </p:nvSpPr>
-        <p:spPr>
-          <a:xfrm>
-            <a:off x="1417320" y="4663440"/>
-            <a:ext cx="10314432" cy="457200"/>
-          </a:xfrm>
-          <a:prstGeom prst="rect">
-            <a:avLst/>
-          </a:prstGeom>
-          <a:noFill/>
-          <a:ln/>
-        </p:spPr>
-        <p:txBody>
-          <a:bodyPr wrap="square" lIns="0" tIns="0" rIns="0" bIns="0" rtlCol="0" anchor="ctr"/>
-          <a:lstStyle/>
-          <a:p>
-            <a:pPr indent="0" marL="0">
-              <a:buNone/>
-            </a:pPr>
-            <a:r>
-              <a:rPr lang="en-US" sz="2200" b="1" dirty="0">
-                <a:solidFill>
-                  <a:srgbClr val="FFFFFF"/>
-                </a:solidFill>
-                <a:latin typeface="微软雅黑" pitchFamily="34" charset="0"/>
-                <a:ea typeface="微软雅黑" pitchFamily="34" charset="-122"/>
-                <a:cs typeface="微软雅黑" pitchFamily="34" charset="-120"/>
-              </a:rPr>
-              <a:t>把 AI 的输出当成会坏的东西</a:t>
-            </a:r>
-            <a:endParaRPr lang="en-US" sz="2200" dirty="0"/>
-          </a:p>
-        </p:txBody>
-      </p:sp>
-      <p:sp>
-        <p:nvSpPr>
-          <p:cNvPr id="12" name="Text 10"/>
-          <p:cNvSpPr/>
-          <p:nvPr/>
-        </p:nvSpPr>
-        <p:spPr>
-          <a:xfrm>
-            <a:off x="1417320" y="5093208"/>
-            <a:ext cx="10314432" cy="411480"/>
-          </a:xfrm>
-          <a:prstGeom prst="rect">
-            <a:avLst/>
-          </a:prstGeom>
-          <a:noFill/>
-          <a:ln/>
-        </p:spPr>
-        <p:txBody>
-          <a:bodyPr wrap="square" lIns="0" tIns="0" rIns="0" bIns="0" rtlCol="0" anchor="ctr"/>
-          <a:lstStyle/>
-          <a:p>
-            <a:pPr indent="0" marL="0">
-              <a:buNone/>
-            </a:pPr>
-            <a:r>
-              <a:rPr lang="en-US" sz="1600" dirty="0">
-                <a:solidFill>
-                  <a:srgbClr val="8A929E"/>
-                </a:solidFill>
-                <a:latin typeface="微软雅黑" pitchFamily="34" charset="0"/>
-                <a:ea typeface="微软雅黑" pitchFamily="34" charset="-122"/>
-                <a:cs typeface="微软雅黑" pitchFamily="34" charset="-120"/>
-              </a:rPr>
-              <a:t>引擎给一份拼接产物，用户要按视频逐段读</a:t>
-            </a:r>
-            <a:endParaRPr lang="en-US" sz="1600" dirty="0"/>
+              <a:rPr lang="en-US" sz="950" dirty="0">
+                <a:solidFill>
+                  <a:srgbClr val="545B66"/>
+                </a:solidFill>
+                <a:latin typeface="微软雅黑" pitchFamily="34" charset="0"/>
+                <a:ea typeface="微软雅黑" pitchFamily="34" charset="-122"/>
+                <a:cs typeface="微软雅黑" pitchFamily="34" charset="-120"/>
+              </a:rPr>
+              <a:t>16 种节点与三种来源见 packages/shared/src/graph.ts 的 NODE_TYPE_LABELS；9 条内置链路的名称见 packages/shared/src/templates.ts</a:t>
+            </a:r>
+            <a:endParaRPr lang="en-US" sz="950" dirty="0"/>
           </a:p>
         </p:txBody>
       </p:sp>
@@ -7301,7 +7397,7 @@
     <p:bg>
       <p:bgPr>
         <a:solidFill>
-          <a:srgbClr val="16181D"/>
+          <a:srgbClr val="FFFFFF"/>
         </a:solidFill>
       </p:bgPr>
     </p:bg>
@@ -7346,13 +7442,13 @@
             <a:r>
               <a:rPr lang="en-US" sz="1200" spc="300" kern="0" dirty="0">
                 <a:solidFill>
-                  <a:srgbClr val="8A929E"/>
-                </a:solidFill>
-                <a:latin typeface="微软雅黑" pitchFamily="34" charset="0"/>
-                <a:ea typeface="微软雅黑" pitchFamily="34" charset="-122"/>
-                <a:cs typeface="微软雅黑" pitchFamily="34" charset="-120"/>
-              </a:rPr>
-              <a:t>01 / 节点编排画布</a:t>
+                  <a:srgbClr val="545B66"/>
+                </a:solidFill>
+                <a:latin typeface="微软雅黑" pitchFamily="34" charset="0"/>
+                <a:ea typeface="微软雅黑" pitchFamily="34" charset="-122"/>
+                <a:cs typeface="微软雅黑" pitchFamily="34" charset="-120"/>
+              </a:rPr>
+              <a:t>01 / 它是什么</a:t>
             </a:r>
             <a:endParaRPr lang="en-US" sz="1200" dirty="0"/>
           </a:p>
@@ -7366,8 +7462,8 @@
         </p:nvSpPr>
         <p:spPr>
           <a:xfrm>
-            <a:off x="457200" y="2331720"/>
-            <a:ext cx="11274552" cy="868680"/>
+            <a:off x="457200" y="804672"/>
+            <a:ext cx="11274552" cy="841248"/>
           </a:xfrm>
           <a:prstGeom prst="rect">
             <a:avLst/>
@@ -7383,30 +7479,55 @@
               <a:buNone/>
             </a:pPr>
             <a:r>
-              <a:rPr lang="en-US" sz="3800" b="1" dirty="0">
-                <a:solidFill>
-                  <a:srgbClr val="FFFFFF"/>
-                </a:solidFill>
-                <a:latin typeface="微软雅黑" pitchFamily="34" charset="0"/>
-                <a:ea typeface="微软雅黑" pitchFamily="34" charset="-122"/>
-                <a:cs typeface="微软雅黑" pitchFamily="34" charset="-120"/>
-              </a:rPr>
-              <a:t>用了画布库</a:t>
-            </a:r>
-            <a:endParaRPr lang="en-US" sz="3800" dirty="0"/>
-          </a:p>
-        </p:txBody>
-      </p:sp>
-      <p:sp>
-        <p:nvSpPr>
-          <p:cNvPr id="4" name="Text 2"/>
-          <p:cNvSpPr/>
-          <p:nvPr/>
-        </p:nvSpPr>
-        <p:spPr>
-          <a:xfrm>
-            <a:off x="457200" y="3200400"/>
-            <a:ext cx="11274552" cy="868680"/>
+              <a:rPr lang="en-US" sz="3000" b="1" dirty="0">
+                <a:solidFill>
+                  <a:srgbClr val="16181D"/>
+                </a:solidFill>
+                <a:latin typeface="微软雅黑" pitchFamily="34" charset="0"/>
+                <a:ea typeface="微软雅黑" pitchFamily="34" charset="-122"/>
+                <a:cs typeface="微软雅黑" pitchFamily="34" charset="-120"/>
+              </a:rPr>
+              <a:t>它站在两类现成产品中间</a:t>
+            </a:r>
+            <a:endParaRPr lang="en-US" sz="3000" dirty="0"/>
+          </a:p>
+        </p:txBody>
+      </p:sp>
+      <p:sp>
+        <p:nvSpPr>
+          <p:cNvPr id="4" name="Shape 2"/>
+          <p:cNvSpPr/>
+          <p:nvPr/>
+        </p:nvSpPr>
+        <p:spPr>
+          <a:xfrm>
+            <a:off x="457200" y="2286000"/>
+            <a:ext cx="5454396" cy="1691640"/>
+          </a:xfrm>
+          <a:prstGeom prst="rect">
+            <a:avLst/>
+          </a:prstGeom>
+          <a:solidFill>
+            <a:srgbClr val="F4F5F6"/>
+          </a:solidFill>
+          <a:ln w="12700">
+            <a:solidFill>
+              <a:srgbClr val="E4E7EB"/>
+            </a:solidFill>
+            <a:prstDash val="solid"/>
+          </a:ln>
+        </p:spPr>
+      </p:sp>
+      <p:sp>
+        <p:nvSpPr>
+          <p:cNvPr id="5" name="Text 3"/>
+          <p:cNvSpPr/>
+          <p:nvPr/>
+        </p:nvSpPr>
+        <p:spPr>
+          <a:xfrm>
+            <a:off x="749808" y="2468880"/>
+            <a:ext cx="4869180" cy="384048"/>
           </a:xfrm>
           <a:prstGeom prst="rect">
             <a:avLst/>
@@ -7422,30 +7543,94 @@
               <a:buNone/>
             </a:pPr>
             <a:r>
-              <a:rPr lang="en-US" sz="3800" b="1" dirty="0">
-                <a:solidFill>
-                  <a:srgbClr val="00AEEC"/>
-                </a:solidFill>
-                <a:latin typeface="微软雅黑" pitchFamily="34" charset="0"/>
-                <a:ea typeface="微软雅黑" pitchFamily="34" charset="-122"/>
-                <a:cs typeface="微软雅黑" pitchFamily="34" charset="-120"/>
-              </a:rPr>
-              <a:t>也不省产品级画布的工作量</a:t>
-            </a:r>
-            <a:endParaRPr lang="en-US" sz="3800" dirty="0"/>
-          </a:p>
-        </p:txBody>
-      </p:sp>
-      <p:sp>
-        <p:nvSpPr>
-          <p:cNvPr id="5" name="Text 3"/>
-          <p:cNvSpPr/>
-          <p:nvPr/>
-        </p:nvSpPr>
-        <p:spPr>
-          <a:xfrm>
-            <a:off x="457200" y="4251960"/>
-            <a:ext cx="11274552" cy="365760"/>
+              <a:rPr lang="en-US" sz="1600" b="1" dirty="0">
+                <a:solidFill>
+                  <a:srgbClr val="16181D"/>
+                </a:solidFill>
+                <a:latin typeface="微软雅黑" pitchFamily="34" charset="0"/>
+                <a:ea typeface="微软雅黑" pitchFamily="34" charset="-122"/>
+                <a:cs typeface="微软雅黑" pitchFamily="34" charset="-120"/>
+              </a:rPr>
+              <a:t>一类：AI 音视频转笔记</a:t>
+            </a:r>
+            <a:endParaRPr lang="en-US" sz="1600" dirty="0"/>
+          </a:p>
+        </p:txBody>
+      </p:sp>
+      <p:sp>
+        <p:nvSpPr>
+          <p:cNvPr id="6" name="Text 4"/>
+          <p:cNvSpPr/>
+          <p:nvPr/>
+        </p:nvSpPr>
+        <p:spPr>
+          <a:xfrm>
+            <a:off x="749808" y="2907792"/>
+            <a:ext cx="4869180" cy="996696"/>
+          </a:xfrm>
+          <a:prstGeom prst="rect">
+            <a:avLst/>
+          </a:prstGeom>
+          <a:noFill/>
+          <a:ln/>
+        </p:spPr>
+        <p:txBody>
+          <a:bodyPr wrap="square" lIns="0" tIns="0" rIns="0" bIns="0" rtlCol="0" anchor="t"/>
+          <a:lstStyle/>
+          <a:p>
+            <a:pPr indent="0" marL="0">
+              <a:buNone/>
+            </a:pPr>
+            <a:r>
+              <a:rPr lang="en-US" sz="1400" dirty="0">
+                <a:solidFill>
+                  <a:srgbClr val="545B66"/>
+                </a:solidFill>
+                <a:latin typeface="微软雅黑" pitchFamily="34" charset="0"/>
+                <a:ea typeface="微软雅黑" pitchFamily="34" charset="-122"/>
+                <a:cs typeface="微软雅黑" pitchFamily="34" charset="-120"/>
+              </a:rPr>
+              <a:t>BibiGPT、通义听悟、飞书妙记、Ai好记——贴个链接、选个模板、出一份摘要，管线是固定的。</a:t>
+            </a:r>
+            <a:endParaRPr lang="en-US" sz="1400" dirty="0"/>
+          </a:p>
+        </p:txBody>
+      </p:sp>
+      <p:sp>
+        <p:nvSpPr>
+          <p:cNvPr id="7" name="Shape 5"/>
+          <p:cNvSpPr/>
+          <p:nvPr/>
+        </p:nvSpPr>
+        <p:spPr>
+          <a:xfrm>
+            <a:off x="6277356" y="2286000"/>
+            <a:ext cx="5454396" cy="1691640"/>
+          </a:xfrm>
+          <a:prstGeom prst="rect">
+            <a:avLst/>
+          </a:prstGeom>
+          <a:solidFill>
+            <a:srgbClr val="F4F5F6"/>
+          </a:solidFill>
+          <a:ln w="12700">
+            <a:solidFill>
+              <a:srgbClr val="E4E7EB"/>
+            </a:solidFill>
+            <a:prstDash val="solid"/>
+          </a:ln>
+        </p:spPr>
+      </p:sp>
+      <p:sp>
+        <p:nvSpPr>
+          <p:cNvPr id="8" name="Text 6"/>
+          <p:cNvSpPr/>
+          <p:nvPr/>
+        </p:nvSpPr>
+        <p:spPr>
+          <a:xfrm>
+            <a:off x="6569964" y="2468880"/>
+            <a:ext cx="4869180" cy="384048"/>
           </a:xfrm>
           <a:prstGeom prst="rect">
             <a:avLst/>
@@ -7461,17 +7646,198 @@
               <a:buNone/>
             </a:pPr>
             <a:r>
-              <a:rPr lang="en-US" sz="1500" dirty="0">
-                <a:solidFill>
-                  <a:srgbClr val="8A929E"/>
-                </a:solidFill>
-                <a:latin typeface="微软雅黑" pitchFamily="34" charset="0"/>
-                <a:ea typeface="微软雅黑" pitchFamily="34" charset="-122"/>
-                <a:cs typeface="微软雅黑" pitchFamily="34" charset="-120"/>
-              </a:rPr>
-              <a:t>5913 行画布代码里，真正调库 API 的不到 200 行</a:t>
+              <a:rPr lang="en-US" sz="1600" b="1" dirty="0">
+                <a:solidFill>
+                  <a:srgbClr val="16181D"/>
+                </a:solidFill>
+                <a:latin typeface="微软雅黑" pitchFamily="34" charset="0"/>
+                <a:ea typeface="微软雅黑" pitchFamily="34" charset="-122"/>
+                <a:cs typeface="微软雅黑" pitchFamily="34" charset="-120"/>
+              </a:rPr>
+              <a:t>一类：工作流编排</a:t>
+            </a:r>
+            <a:endParaRPr lang="en-US" sz="1600" dirty="0"/>
+          </a:p>
+        </p:txBody>
+      </p:sp>
+      <p:sp>
+        <p:nvSpPr>
+          <p:cNvPr id="9" name="Text 7"/>
+          <p:cNvSpPr/>
+          <p:nvPr/>
+        </p:nvSpPr>
+        <p:spPr>
+          <a:xfrm>
+            <a:off x="6569964" y="2907792"/>
+            <a:ext cx="4869180" cy="996696"/>
+          </a:xfrm>
+          <a:prstGeom prst="rect">
+            <a:avLst/>
+          </a:prstGeom>
+          <a:noFill/>
+          <a:ln/>
+        </p:spPr>
+        <p:txBody>
+          <a:bodyPr wrap="square" lIns="0" tIns="0" rIns="0" bIns="0" rtlCol="0" anchor="t"/>
+          <a:lstStyle/>
+          <a:p>
+            <a:pPr indent="0" marL="0">
+              <a:buNone/>
+            </a:pPr>
+            <a:r>
+              <a:rPr lang="en-US" sz="1400" dirty="0">
+                <a:solidFill>
+                  <a:srgbClr val="545B66"/>
+                </a:solidFill>
+                <a:latin typeface="微软雅黑" pitchFamily="34" charset="0"/>
+                <a:ea typeface="微软雅黑" pitchFamily="34" charset="-122"/>
+                <a:cs typeface="微软雅黑" pitchFamily="34" charset="-120"/>
+              </a:rPr>
+              <a:t>n8n、Dify、扣子、Flowise——有画布，但做的是自动化与 AI 应用，不是为了把视频变成笔记。</a:t>
+            </a:r>
+            <a:endParaRPr lang="en-US" sz="1400" dirty="0"/>
+          </a:p>
+        </p:txBody>
+      </p:sp>
+      <p:sp>
+        <p:nvSpPr>
+          <p:cNvPr id="10" name="Text 8"/>
+          <p:cNvSpPr/>
+          <p:nvPr/>
+        </p:nvSpPr>
+        <p:spPr>
+          <a:xfrm>
+            <a:off x="457200" y="4206240"/>
+            <a:ext cx="11274552" cy="407670"/>
+          </a:xfrm>
+          <a:prstGeom prst="rect">
+            <a:avLst/>
+          </a:prstGeom>
+          <a:noFill/>
+          <a:ln/>
+        </p:spPr>
+        <p:txBody>
+          <a:bodyPr wrap="square" lIns="0" tIns="0" rIns="0" bIns="0" rtlCol="0" anchor="ctr"/>
+          <a:lstStyle/>
+          <a:p>
+            <a:pPr indent="0" marL="0">
+              <a:buNone/>
+            </a:pPr>
+            <a:r>
+              <a:rPr lang="en-US" sz="1700" b="1" dirty="0">
+                <a:solidFill>
+                  <a:srgbClr val="16181D"/>
+                </a:solidFill>
+                <a:latin typeface="微软雅黑" pitchFamily="34" charset="0"/>
+                <a:ea typeface="微软雅黑" pitchFamily="34" charset="-122"/>
+                <a:cs typeface="微软雅黑" pitchFamily="34" charset="-120"/>
+              </a:rPr>
+              <a:t>可编排的画布 × 音视频素材 × 产物是能带走的 Markdown——这个位置是空的</a:t>
+            </a:r>
+            <a:endParaRPr lang="en-US" sz="1700" dirty="0"/>
+          </a:p>
+        </p:txBody>
+      </p:sp>
+      <p:sp>
+        <p:nvSpPr>
+          <p:cNvPr id="11" name="Shape 9"/>
+          <p:cNvSpPr/>
+          <p:nvPr/>
+        </p:nvSpPr>
+        <p:spPr>
+          <a:xfrm>
+            <a:off x="457200" y="5029200"/>
+            <a:ext cx="11274552" cy="777240"/>
+          </a:xfrm>
+          <a:prstGeom prst="rect">
+            <a:avLst/>
+          </a:prstGeom>
+          <a:solidFill>
+            <a:srgbClr val="F4F5F6"/>
+          </a:solidFill>
+          <a:ln w="12700">
+            <a:solidFill>
+              <a:srgbClr val="E4E7EB"/>
+            </a:solidFill>
+            <a:prstDash val="solid"/>
+          </a:ln>
+        </p:spPr>
+      </p:sp>
+      <p:sp>
+        <p:nvSpPr>
+          <p:cNvPr id="12" name="Text 10"/>
+          <p:cNvSpPr/>
+          <p:nvPr/>
+        </p:nvSpPr>
+        <p:spPr>
+          <a:xfrm>
+            <a:off x="777240" y="5120640"/>
+            <a:ext cx="10634472" cy="594360"/>
+          </a:xfrm>
+          <a:prstGeom prst="rect">
+            <a:avLst/>
+          </a:prstGeom>
+          <a:noFill/>
+          <a:ln/>
+        </p:spPr>
+        <p:txBody>
+          <a:bodyPr wrap="square" lIns="0" tIns="0" rIns="0" bIns="0" rtlCol="0" anchor="ctr"/>
+          <a:lstStyle/>
+          <a:p>
+            <a:pPr indent="0" marL="0">
+              <a:buNone/>
+            </a:pPr>
+            <a:r>
+              <a:rPr lang="en-US" sz="1500" b="1" dirty="0">
+                <a:solidFill>
+                  <a:srgbClr val="16181D"/>
+                </a:solidFill>
+                <a:latin typeface="微软雅黑" pitchFamily="34" charset="0"/>
+                <a:ea typeface="微软雅黑" pitchFamily="34" charset="-122"/>
+                <a:cs typeface="微软雅黑" pitchFamily="34" charset="-120"/>
+              </a:rPr>
+              <a:t>差别不在功能清单上，而在两处：形态是固定管线还是你自己连；数据是别人的账号还是你自己的库</a:t>
             </a:r>
             <a:endParaRPr lang="en-US" sz="1500" dirty="0"/>
+          </a:p>
+        </p:txBody>
+      </p:sp>
+      <p:sp>
+        <p:nvSpPr>
+          <p:cNvPr id="13" name="Text 11"/>
+          <p:cNvSpPr/>
+          <p:nvPr/>
+        </p:nvSpPr>
+        <p:spPr>
+          <a:xfrm>
+            <a:off x="457200" y="6327648"/>
+            <a:ext cx="11274552" cy="274320"/>
+          </a:xfrm>
+          <a:prstGeom prst="rect">
+            <a:avLst/>
+          </a:prstGeom>
+          <a:noFill/>
+          <a:ln/>
+        </p:spPr>
+        <p:txBody>
+          <a:bodyPr wrap="square" lIns="0" tIns="0" rIns="0" bIns="0" rtlCol="0" anchor="ctr"/>
+          <a:lstStyle/>
+          <a:p>
+            <a:pPr indent="0" marL="0">
+              <a:buNone/>
+            </a:pPr>
+            <a:r>
+              <a:rPr lang="en-US" sz="950" dirty="0">
+                <a:solidFill>
+                  <a:srgbClr val="545B66"/>
+                </a:solidFill>
+                <a:latin typeface="微软雅黑" pitchFamily="34" charset="0"/>
+                <a:ea typeface="微软雅黑" pitchFamily="34" charset="-122"/>
+                <a:cs typeface="微软雅黑" pitchFamily="34" charset="-120"/>
+              </a:rPr>
+              <a:t>对标结论见 docs/research/r1-desktop-research.md（20 个产品、14 维矩阵）与 sharing/ROOM.md 的「三个必答题」</a:t>
+            </a:r>
+            <a:endParaRPr lang="en-US" sz="950" dirty="0"/>
           </a:p>
         </p:txBody>
       </p:sp>
@@ -7540,7 +7906,7 @@
                 <a:ea typeface="微软雅黑" pitchFamily="34" charset="-122"/>
                 <a:cs typeface="微软雅黑" pitchFamily="34" charset="-120"/>
               </a:rPr>
-              <a:t>01 / 节点编排画布</a:t>
+              <a:t>01 / 它是什么</a:t>
             </a:r>
             <a:endParaRPr lang="en-US" sz="1200" dirty="0"/>
           </a:p>
@@ -7579,7 +7945,7 @@
                 <a:ea typeface="微软雅黑" pitchFamily="34" charset="-122"/>
                 <a:cs typeface="微软雅黑" pitchFamily="34" charset="-120"/>
               </a:rPr>
-              <a:t>16 种节点，只注册 1 个 nodeType</a:t>
+              <a:t>这一类的技术底座，用的都是当下一线</a:t>
             </a:r>
             <a:endParaRPr lang="en-US" sz="3000" dirty="0"/>
           </a:p>
@@ -7593,24 +7959,24 @@
         </p:nvSpPr>
         <p:spPr>
           <a:xfrm>
-            <a:off x="457200" y="1600200"/>
-            <a:ext cx="11274552" cy="390144"/>
-          </a:xfrm>
-          <a:prstGeom prst="rect">
-            <a:avLst/>
-          </a:prstGeom>
-          <a:noFill/>
-          <a:ln/>
-        </p:spPr>
-        <p:txBody>
-          <a:bodyPr wrap="square" lIns="0" tIns="0" rIns="0" bIns="0" rtlCol="0" anchor="ctr"/>
-          <a:lstStyle/>
-          <a:p>
-            <a:pPr indent="0" marL="0">
-              <a:buNone/>
-            </a:pPr>
-            <a:r>
-              <a:rPr lang="en-US" sz="1600" dirty="0">
+            <a:off x="548640" y="1645920"/>
+            <a:ext cx="2468880" cy="457200"/>
+          </a:xfrm>
+          <a:prstGeom prst="rect">
+            <a:avLst/>
+          </a:prstGeom>
+          <a:noFill/>
+          <a:ln/>
+        </p:spPr>
+        <p:txBody>
+          <a:bodyPr wrap="square" lIns="0" tIns="0" rIns="0" bIns="0" rtlCol="0" anchor="t"/>
+          <a:lstStyle/>
+          <a:p>
+            <a:pPr indent="0" marL="0">
+              <a:buNone/>
+            </a:pPr>
+            <a:r>
+              <a:rPr lang="en-US" sz="1400" b="1" dirty="0">
                 <a:solidFill>
                   <a:srgbClr val="16181D"/>
                 </a:solidFill>
@@ -7618,22 +7984,295 @@
                 <a:ea typeface="微软雅黑" pitchFamily="34" charset="-122"/>
                 <a:cs typeface="微软雅黑" pitchFamily="34" charset="-120"/>
               </a:rPr>
-              <a:t>业务类型不放进画布的 type 字段，而是放进 data.nodeType；画布只认一个组件，卡片按类型分派。</a:t>
-            </a:r>
-            <a:endParaRPr lang="en-US" sz="1600" dirty="0"/>
-          </a:p>
-        </p:txBody>
-      </p:sp>
-      <p:sp>
-        <p:nvSpPr>
-          <p:cNvPr id="5" name="Shape 3"/>
-          <p:cNvSpPr/>
-          <p:nvPr/>
-        </p:nvSpPr>
-        <p:spPr>
-          <a:xfrm>
-            <a:off x="457200" y="2377440"/>
-            <a:ext cx="5454396" cy="1481328"/>
+              <a:t>前端与构建</a:t>
+            </a:r>
+            <a:endParaRPr lang="en-US" sz="1400" dirty="0"/>
+          </a:p>
+        </p:txBody>
+      </p:sp>
+      <p:sp>
+        <p:nvSpPr>
+          <p:cNvPr id="5" name="Text 3"/>
+          <p:cNvSpPr/>
+          <p:nvPr/>
+        </p:nvSpPr>
+        <p:spPr>
+          <a:xfrm>
+            <a:off x="3017520" y="1645920"/>
+            <a:ext cx="8531352" cy="336804"/>
+          </a:xfrm>
+          <a:prstGeom prst="rect">
+            <a:avLst/>
+          </a:prstGeom>
+          <a:noFill/>
+          <a:ln/>
+        </p:spPr>
+        <p:txBody>
+          <a:bodyPr wrap="square" lIns="0" tIns="0" rIns="0" bIns="0" rtlCol="0" anchor="t"/>
+          <a:lstStyle/>
+          <a:p>
+            <a:pPr indent="0" marL="0">
+              <a:buNone/>
+            </a:pPr>
+            <a:r>
+              <a:rPr lang="en-US" sz="1400" dirty="0">
+                <a:solidFill>
+                  <a:srgbClr val="545B66"/>
+                </a:solidFill>
+                <a:latin typeface="微软雅黑" pitchFamily="34" charset="0"/>
+                <a:ea typeface="微软雅黑" pitchFamily="34" charset="-122"/>
+                <a:cs typeface="微软雅黑" pitchFamily="34" charset="-120"/>
+              </a:rPr>
+              <a:t>Vue 3 组合式 API、TypeScript 5.9、Vite 7；Pinia 管状态，路由按页面拆包</a:t>
+            </a:r>
+            <a:endParaRPr lang="en-US" sz="1400" dirty="0"/>
+          </a:p>
+        </p:txBody>
+      </p:sp>
+      <p:sp>
+        <p:nvSpPr>
+          <p:cNvPr id="6" name="Text 4"/>
+          <p:cNvSpPr/>
+          <p:nvPr/>
+        </p:nvSpPr>
+        <p:spPr>
+          <a:xfrm>
+            <a:off x="548640" y="2788920"/>
+            <a:ext cx="2468880" cy="457200"/>
+          </a:xfrm>
+          <a:prstGeom prst="rect">
+            <a:avLst/>
+          </a:prstGeom>
+          <a:noFill/>
+          <a:ln/>
+        </p:spPr>
+        <p:txBody>
+          <a:bodyPr wrap="square" lIns="0" tIns="0" rIns="0" bIns="0" rtlCol="0" anchor="t"/>
+          <a:lstStyle/>
+          <a:p>
+            <a:pPr indent="0" marL="0">
+              <a:buNone/>
+            </a:pPr>
+            <a:r>
+              <a:rPr lang="en-US" sz="1400" b="1" dirty="0">
+                <a:solidFill>
+                  <a:srgbClr val="16181D"/>
+                </a:solidFill>
+                <a:latin typeface="微软雅黑" pitchFamily="34" charset="0"/>
+                <a:ea typeface="微软雅黑" pitchFamily="34" charset="-122"/>
+                <a:cs typeface="微软雅黑" pitchFamily="34" charset="-120"/>
+              </a:rPr>
+              <a:t>画布与布局</a:t>
+            </a:r>
+            <a:endParaRPr lang="en-US" sz="1400" dirty="0"/>
+          </a:p>
+        </p:txBody>
+      </p:sp>
+      <p:sp>
+        <p:nvSpPr>
+          <p:cNvPr id="7" name="Text 5"/>
+          <p:cNvSpPr/>
+          <p:nvPr/>
+        </p:nvSpPr>
+        <p:spPr>
+          <a:xfrm>
+            <a:off x="3017520" y="2788920"/>
+            <a:ext cx="8531352" cy="336804"/>
+          </a:xfrm>
+          <a:prstGeom prst="rect">
+            <a:avLst/>
+          </a:prstGeom>
+          <a:noFill/>
+          <a:ln/>
+        </p:spPr>
+        <p:txBody>
+          <a:bodyPr wrap="square" lIns="0" tIns="0" rIns="0" bIns="0" rtlCol="0" anchor="t"/>
+          <a:lstStyle/>
+          <a:p>
+            <a:pPr indent="0" marL="0">
+              <a:buNone/>
+            </a:pPr>
+            <a:r>
+              <a:rPr lang="en-US" sz="1400" dirty="0">
+                <a:solidFill>
+                  <a:srgbClr val="545B66"/>
+                </a:solidFill>
+                <a:latin typeface="微软雅黑" pitchFamily="34" charset="0"/>
+                <a:ea typeface="微软雅黑" pitchFamily="34" charset="-122"/>
+                <a:cs typeface="微软雅黑" pitchFamily="34" charset="-120"/>
+              </a:rPr>
+              <a:t>画布用 Vue Flow 1.48；自动布局用 ELK 0.12，整块跑在 Web Worker 里</a:t>
+            </a:r>
+            <a:endParaRPr lang="en-US" sz="1400" dirty="0"/>
+          </a:p>
+        </p:txBody>
+      </p:sp>
+      <p:sp>
+        <p:nvSpPr>
+          <p:cNvPr id="8" name="Text 6"/>
+          <p:cNvSpPr/>
+          <p:nvPr/>
+        </p:nvSpPr>
+        <p:spPr>
+          <a:xfrm>
+            <a:off x="548640" y="3931920"/>
+            <a:ext cx="2468880" cy="457200"/>
+          </a:xfrm>
+          <a:prstGeom prst="rect">
+            <a:avLst/>
+          </a:prstGeom>
+          <a:noFill/>
+          <a:ln/>
+        </p:spPr>
+        <p:txBody>
+          <a:bodyPr wrap="square" lIns="0" tIns="0" rIns="0" bIns="0" rtlCol="0" anchor="t"/>
+          <a:lstStyle/>
+          <a:p>
+            <a:pPr indent="0" marL="0">
+              <a:buNone/>
+            </a:pPr>
+            <a:r>
+              <a:rPr lang="en-US" sz="1400" b="1" dirty="0">
+                <a:solidFill>
+                  <a:srgbClr val="16181D"/>
+                </a:solidFill>
+                <a:latin typeface="微软雅黑" pitchFamily="34" charset="0"/>
+                <a:ea typeface="微软雅黑" pitchFamily="34" charset="-122"/>
+                <a:cs typeface="微软雅黑" pitchFamily="34" charset="-120"/>
+              </a:rPr>
+              <a:t>组件与渲染</a:t>
+            </a:r>
+            <a:endParaRPr lang="en-US" sz="1400" dirty="0"/>
+          </a:p>
+        </p:txBody>
+      </p:sp>
+      <p:sp>
+        <p:nvSpPr>
+          <p:cNvPr id="9" name="Text 7"/>
+          <p:cNvSpPr/>
+          <p:nvPr/>
+        </p:nvSpPr>
+        <p:spPr>
+          <a:xfrm>
+            <a:off x="3017520" y="3931920"/>
+            <a:ext cx="8531352" cy="582168"/>
+          </a:xfrm>
+          <a:prstGeom prst="rect">
+            <a:avLst/>
+          </a:prstGeom>
+          <a:noFill/>
+          <a:ln/>
+        </p:spPr>
+        <p:txBody>
+          <a:bodyPr wrap="square" lIns="0" tIns="0" rIns="0" bIns="0" rtlCol="0" anchor="t"/>
+          <a:lstStyle/>
+          <a:p>
+            <a:pPr indent="0" marL="0">
+              <a:buNone/>
+            </a:pPr>
+            <a:r>
+              <a:rPr lang="en-US" sz="1400" dirty="0">
+                <a:solidFill>
+                  <a:srgbClr val="545B66"/>
+                </a:solidFill>
+                <a:latin typeface="微软雅黑" pitchFamily="34" charset="0"/>
+                <a:ea typeface="微软雅黑" pitchFamily="34" charset="-122"/>
+                <a:cs typeface="微软雅黑" pitchFamily="34" charset="-120"/>
+              </a:rPr>
+              <a:t>Element Plus 2 配 Reka UI 的无样式原语，颜色只有一份设计令牌；长文本走 marked 加 DOMPurify 渲染，进度用 SSE 推</a:t>
+            </a:r>
+            <a:endParaRPr lang="en-US" sz="1400" dirty="0"/>
+          </a:p>
+        </p:txBody>
+      </p:sp>
+      <p:sp>
+        <p:nvSpPr>
+          <p:cNvPr id="10" name="Text 8"/>
+          <p:cNvSpPr/>
+          <p:nvPr/>
+        </p:nvSpPr>
+        <p:spPr>
+          <a:xfrm>
+            <a:off x="548640" y="5074920"/>
+            <a:ext cx="2468880" cy="457200"/>
+          </a:xfrm>
+          <a:prstGeom prst="rect">
+            <a:avLst/>
+          </a:prstGeom>
+          <a:noFill/>
+          <a:ln/>
+        </p:spPr>
+        <p:txBody>
+          <a:bodyPr wrap="square" lIns="0" tIns="0" rIns="0" bIns="0" rtlCol="0" anchor="t"/>
+          <a:lstStyle/>
+          <a:p>
+            <a:pPr indent="0" marL="0">
+              <a:buNone/>
+            </a:pPr>
+            <a:r>
+              <a:rPr lang="en-US" sz="1400" b="1" dirty="0">
+                <a:solidFill>
+                  <a:srgbClr val="16181D"/>
+                </a:solidFill>
+                <a:latin typeface="微软雅黑" pitchFamily="34" charset="0"/>
+                <a:ea typeface="微软雅黑" pitchFamily="34" charset="-122"/>
+                <a:cs typeface="微软雅黑" pitchFamily="34" charset="-120"/>
+              </a:rPr>
+              <a:t>服务端与数据</a:t>
+            </a:r>
+            <a:endParaRPr lang="en-US" sz="1400" dirty="0"/>
+          </a:p>
+        </p:txBody>
+      </p:sp>
+      <p:sp>
+        <p:nvSpPr>
+          <p:cNvPr id="11" name="Text 9"/>
+          <p:cNvSpPr/>
+          <p:nvPr/>
+        </p:nvSpPr>
+        <p:spPr>
+          <a:xfrm>
+            <a:off x="3017520" y="5074920"/>
+            <a:ext cx="8531352" cy="336804"/>
+          </a:xfrm>
+          <a:prstGeom prst="rect">
+            <a:avLst/>
+          </a:prstGeom>
+          <a:noFill/>
+          <a:ln/>
+        </p:spPr>
+        <p:txBody>
+          <a:bodyPr wrap="square" lIns="0" tIns="0" rIns="0" bIns="0" rtlCol="0" anchor="t"/>
+          <a:lstStyle/>
+          <a:p>
+            <a:pPr indent="0" marL="0">
+              <a:buNone/>
+            </a:pPr>
+            <a:r>
+              <a:rPr lang="en-US" sz="1400" dirty="0">
+                <a:solidFill>
+                  <a:srgbClr val="545B66"/>
+                </a:solidFill>
+                <a:latin typeface="微软雅黑" pitchFamily="34" charset="0"/>
+                <a:ea typeface="微软雅黑" pitchFamily="34" charset="-122"/>
+                <a:cs typeface="微软雅黑" pitchFamily="34" charset="-120"/>
+              </a:rPr>
+              <a:t>Hono 4 + Drizzle ORM + SQLite；图模型的校验用 Zod 4，三个包共用同一份</a:t>
+            </a:r>
+            <a:endParaRPr lang="en-US" sz="1400" dirty="0"/>
+          </a:p>
+        </p:txBody>
+      </p:sp>
+      <p:sp>
+        <p:nvSpPr>
+          <p:cNvPr id="12" name="Shape 10"/>
+          <p:cNvSpPr/>
+          <p:nvPr/>
+        </p:nvSpPr>
+        <p:spPr>
+          <a:xfrm>
+            <a:off x="457200" y="5486400"/>
+            <a:ext cx="11274552" cy="777240"/>
           </a:xfrm>
           <a:prstGeom prst="rect">
             <a:avLst/>
@@ -7651,14 +8290,14 @@
       </p:sp>
       <p:sp>
         <p:nvSpPr>
-          <p:cNvPr id="6" name="Text 4"/>
-          <p:cNvSpPr/>
-          <p:nvPr/>
-        </p:nvSpPr>
-        <p:spPr>
-          <a:xfrm>
-            <a:off x="749808" y="2560320"/>
-            <a:ext cx="4869180" cy="384048"/>
+          <p:cNvPr id="13" name="Text 11"/>
+          <p:cNvSpPr/>
+          <p:nvPr/>
+        </p:nvSpPr>
+        <p:spPr>
+          <a:xfrm>
+            <a:off x="777240" y="5577840"/>
+            <a:ext cx="10634472" cy="594360"/>
           </a:xfrm>
           <a:prstGeom prst="rect">
             <a:avLst/>
@@ -7674,7 +8313,7 @@
               <a:buNone/>
             </a:pPr>
             <a:r>
-              <a:rPr lang="en-US" sz="1600" b="1" dirty="0">
+              <a:rPr lang="en-US" sz="1500" b="1" dirty="0">
                 <a:solidFill>
                   <a:srgbClr val="16181D"/>
                 </a:solidFill>
@@ -7682,46 +8321,7 @@
                 <a:ea typeface="微软雅黑" pitchFamily="34" charset="-122"/>
                 <a:cs typeface="微软雅黑" pitchFamily="34" charset="-120"/>
               </a:rPr>
-              <a:t>收益</a:t>
-            </a:r>
-            <a:endParaRPr lang="en-US" sz="1600" dirty="0"/>
-          </a:p>
-        </p:txBody>
-      </p:sp>
-      <p:sp>
-        <p:nvSpPr>
-          <p:cNvPr id="7" name="Text 5"/>
-          <p:cNvSpPr/>
-          <p:nvPr/>
-        </p:nvSpPr>
-        <p:spPr>
-          <a:xfrm>
-            <a:off x="749808" y="3035808"/>
-            <a:ext cx="4869180" cy="635508"/>
-          </a:xfrm>
-          <a:prstGeom prst="rect">
-            <a:avLst/>
-          </a:prstGeom>
-          <a:noFill/>
-          <a:ln/>
-        </p:spPr>
-        <p:txBody>
-          <a:bodyPr wrap="square" lIns="0" tIns="0" rIns="0" bIns="0" rtlCol="0" anchor="t"/>
-          <a:lstStyle/>
-          <a:p>
-            <a:pPr indent="0" marL="0">
-              <a:buNone/>
-            </a:pPr>
-            <a:r>
-              <a:rPr lang="en-US" sz="1500" dirty="0">
-                <a:solidFill>
-                  <a:srgbClr val="545B66"/>
-                </a:solidFill>
-                <a:latin typeface="微软雅黑" pitchFamily="34" charset="0"/>
-                <a:ea typeface="微软雅黑" pitchFamily="34" charset="-122"/>
-                <a:cs typeface="微软雅黑" pitchFamily="34" charset="-120"/>
-              </a:rPr>
-              <a:t>端口、右键菜单、运行按钮、状态条、悬停预览、只读控制只写一遍，16 种节点共用同一个外壳。</a:t>
+              <a:t>没有一处是十年前那套写法——jQuery、Options API、Webpack、手写主题色，都不在这个仓库里</a:t>
             </a:r>
             <a:endParaRPr lang="en-US" sz="1500" dirty="0"/>
           </a:p>
@@ -7729,149 +8329,7 @@
       </p:sp>
       <p:sp>
         <p:nvSpPr>
-          <p:cNvPr id="8" name="Shape 6"/>
-          <p:cNvSpPr/>
-          <p:nvPr/>
-        </p:nvSpPr>
-        <p:spPr>
-          <a:xfrm>
-            <a:off x="6277356" y="2377440"/>
-            <a:ext cx="5454396" cy="1481328"/>
-          </a:xfrm>
-          <a:prstGeom prst="rect">
-            <a:avLst/>
-          </a:prstGeom>
-          <a:solidFill>
-            <a:srgbClr val="F4F5F6"/>
-          </a:solidFill>
-          <a:ln w="12700">
-            <a:solidFill>
-              <a:srgbClr val="E4E7EB"/>
-            </a:solidFill>
-            <a:prstDash val="solid"/>
-          </a:ln>
-        </p:spPr>
-      </p:sp>
-      <p:sp>
-        <p:nvSpPr>
-          <p:cNvPr id="9" name="Text 7"/>
-          <p:cNvSpPr/>
-          <p:nvPr/>
-        </p:nvSpPr>
-        <p:spPr>
-          <a:xfrm>
-            <a:off x="6569964" y="2560320"/>
-            <a:ext cx="4869180" cy="384048"/>
-          </a:xfrm>
-          <a:prstGeom prst="rect">
-            <a:avLst/>
-          </a:prstGeom>
-          <a:noFill/>
-          <a:ln/>
-        </p:spPr>
-        <p:txBody>
-          <a:bodyPr wrap="square" lIns="0" tIns="0" rIns="0" bIns="0" rtlCol="0" anchor="ctr"/>
-          <a:lstStyle/>
-          <a:p>
-            <a:pPr indent="0" marL="0">
-              <a:buNone/>
-            </a:pPr>
-            <a:r>
-              <a:rPr lang="en-US" sz="1600" b="1" dirty="0">
-                <a:solidFill>
-                  <a:srgbClr val="D23F4E"/>
-                </a:solidFill>
-                <a:latin typeface="微软雅黑" pitchFamily="34" charset="0"/>
-                <a:ea typeface="微软雅黑" pitchFamily="34" charset="-122"/>
-                <a:cs typeface="微软雅黑" pitchFamily="34" charset="-120"/>
-              </a:rPr>
-              <a:t>代价</a:t>
-            </a:r>
-            <a:endParaRPr lang="en-US" sz="1600" dirty="0"/>
-          </a:p>
-        </p:txBody>
-      </p:sp>
-      <p:sp>
-        <p:nvSpPr>
-          <p:cNvPr id="10" name="Text 8"/>
-          <p:cNvSpPr/>
-          <p:nvPr/>
-        </p:nvSpPr>
-        <p:spPr>
-          <a:xfrm>
-            <a:off x="6569964" y="3035808"/>
-            <a:ext cx="4869180" cy="635508"/>
-          </a:xfrm>
-          <a:prstGeom prst="rect">
-            <a:avLst/>
-          </a:prstGeom>
-          <a:noFill/>
-          <a:ln/>
-        </p:spPr>
-        <p:txBody>
-          <a:bodyPr wrap="square" lIns="0" tIns="0" rIns="0" bIns="0" rtlCol="0" anchor="t"/>
-          <a:lstStyle/>
-          <a:p>
-            <a:pPr indent="0" marL="0">
-              <a:buNone/>
-            </a:pPr>
-            <a:r>
-              <a:rPr lang="en-US" sz="1500" dirty="0">
-                <a:solidFill>
-                  <a:srgbClr val="545B66"/>
-                </a:solidFill>
-                <a:latin typeface="微软雅黑" pitchFamily="34" charset="0"/>
-                <a:ea typeface="微软雅黑" pitchFamily="34" charset="-122"/>
-                <a:cs typeface="微软雅黑" pitchFamily="34" charset="-120"/>
-              </a:rPr>
-              <a:t>外壳文件长到 3028 行，卡片分派是一条 16 段的 v-if 链；只有 6 张卡片拆成了独立组件。</a:t>
-            </a:r>
-            <a:endParaRPr lang="en-US" sz="1500" dirty="0"/>
-          </a:p>
-        </p:txBody>
-      </p:sp>
-      <p:sp>
-        <p:nvSpPr>
-          <p:cNvPr id="11" name="Text 9"/>
-          <p:cNvSpPr/>
-          <p:nvPr/>
-        </p:nvSpPr>
-        <p:spPr>
-          <a:xfrm>
-            <a:off x="457200" y="4434840"/>
-            <a:ext cx="11274552" cy="457200"/>
-          </a:xfrm>
-          <a:prstGeom prst="rect">
-            <a:avLst/>
-          </a:prstGeom>
-          <a:noFill/>
-          <a:ln/>
-        </p:spPr>
-        <p:txBody>
-          <a:bodyPr wrap="square" lIns="0" tIns="0" rIns="0" bIns="0" rtlCol="0" anchor="ctr"/>
-          <a:lstStyle/>
-          <a:p>
-            <a:pPr indent="0" marL="0">
-              <a:buNone/>
-            </a:pPr>
-            <a:r>
-              <a:rPr lang="en-US" sz="1800" b="1" dirty="0">
-                <a:solidFill>
-                  <a:srgbClr val="16181D"/>
-                </a:solidFill>
-                <a:latin typeface="微软雅黑" pitchFamily="34" charset="0"/>
-                <a:ea typeface="微软雅黑" pitchFamily="34" charset="-122"/>
-                <a:cs typeface="微软雅黑" pitchFamily="34" charset="-120"/>
-              </a:rPr>
-              <a:t>要决策的是边界：哪些该共享外壳，哪些该拆成卡片</a:t>
-            </a:r>
-            <a:endParaRPr lang="en-US" sz="1800" dirty="0"/>
-          </a:p>
-        </p:txBody>
-      </p:sp>
-      <p:sp>
-        <p:nvSpPr>
-          <p:cNvPr id="12" name="Text 10"/>
+          <p:cNvPr id="14" name="Text 12"/>
           <p:cNvSpPr/>
           <p:nvPr/>
         </p:nvSpPr>
@@ -7902,7 +8360,7 @@
                 <a:ea typeface="微软雅黑" pitchFamily="34" charset="-122"/>
                 <a:cs typeface="微软雅黑" pitchFamily="34" charset="-120"/>
               </a:rPr>
-              <a:t>FlowCanvas.vue 只注册 1 个 nodeType（:93）；卡片分派见 ScribeNode.vue（3028 行，:1014 起 16 段分支）</a:t>
+              <a:t>版本取自四个 package.json（2026-09-29）；图标与字体走 @fontsource 本地托管，不依赖外部 CDN</a:t>
             </a:r>
             <a:endParaRPr lang="en-US" sz="950" dirty="0"/>
           </a:p>
@@ -7973,7 +8431,7 @@
                 <a:ea typeface="微软雅黑" pitchFamily="34" charset="-122"/>
                 <a:cs typeface="微软雅黑" pitchFamily="34" charset="-120"/>
               </a:rPr>
-              <a:t>01 / 节点编排画布</a:t>
+              <a:t>01 / 它是什么</a:t>
             </a:r>
             <a:endParaRPr lang="en-US" sz="1200" dirty="0"/>
           </a:p>
@@ -8012,7 +8470,7 @@
                 <a:ea typeface="微软雅黑" pitchFamily="34" charset="-122"/>
                 <a:cs typeface="微软雅黑" pitchFamily="34" charset="-120"/>
               </a:rPr>
-              <a:t>快照式撤销，和它带来的两个副作用</a:t>
+              <a:t>这些别人也做了，老实说</a:t>
             </a:r>
             <a:endParaRPr lang="en-US" sz="3000" dirty="0"/>
           </a:p>
@@ -8026,24 +8484,24 @@
         </p:nvSpPr>
         <p:spPr>
           <a:xfrm>
-            <a:off x="457200" y="1600200"/>
-            <a:ext cx="11274552" cy="390144"/>
-          </a:xfrm>
-          <a:prstGeom prst="rect">
-            <a:avLst/>
-          </a:prstGeom>
-          <a:noFill/>
-          <a:ln/>
-        </p:spPr>
-        <p:txBody>
-          <a:bodyPr wrap="square" lIns="0" tIns="0" rIns="0" bIns="0" rtlCol="0" anchor="ctr"/>
-          <a:lstStyle/>
-          <a:p>
-            <a:pPr indent="0" marL="0">
-              <a:buNone/>
-            </a:pPr>
-            <a:r>
-              <a:rPr lang="en-US" sz="1600" dirty="0">
+            <a:off x="548640" y="1645920"/>
+            <a:ext cx="3108960" cy="457200"/>
+          </a:xfrm>
+          <a:prstGeom prst="rect">
+            <a:avLst/>
+          </a:prstGeom>
+          <a:noFill/>
+          <a:ln/>
+        </p:spPr>
+        <p:txBody>
+          <a:bodyPr wrap="square" lIns="0" tIns="0" rIns="0" bIns="0" rtlCol="0" anchor="t"/>
+          <a:lstStyle/>
+          <a:p>
+            <a:pPr indent="0" marL="0">
+              <a:buNone/>
+            </a:pPr>
+            <a:r>
+              <a:rPr lang="en-US" sz="1400" b="1" dirty="0">
                 <a:solidFill>
                   <a:srgbClr val="16181D"/>
                 </a:solidFill>
@@ -8051,9 +8509,9 @@
                 <a:ea typeface="微软雅黑" pitchFamily="34" charset="-122"/>
                 <a:cs typeface="微软雅黑" pitchFamily="34" charset="-120"/>
               </a:rPr>
-              <a:t>不记命令，直接存整图快照；上限 50 步，出图时把运行态字段剥掉，刷新后不会卡在运行中。</a:t>
-            </a:r>
-            <a:endParaRPr lang="en-US" sz="1600" dirty="0"/>
+              <a:t>视频转写 + 摘要 + 章节 + 思维导图</a:t>
+            </a:r>
+            <a:endParaRPr lang="en-US" sz="1400" dirty="0"/>
           </a:p>
         </p:txBody>
       </p:sp>
@@ -8065,24 +8523,63 @@
         </p:nvSpPr>
         <p:spPr>
           <a:xfrm>
-            <a:off x="457200" y="2103120"/>
-            <a:ext cx="11274552" cy="425196"/>
-          </a:xfrm>
-          <a:prstGeom prst="rect">
-            <a:avLst/>
-          </a:prstGeom>
-          <a:noFill/>
-          <a:ln/>
-        </p:spPr>
-        <p:txBody>
-          <a:bodyPr wrap="square" lIns="0" tIns="0" rIns="0" bIns="0" rtlCol="0" anchor="ctr"/>
-          <a:lstStyle/>
-          <a:p>
-            <a:pPr indent="0" marL="0">
-              <a:buNone/>
-            </a:pPr>
-            <a:r>
-              <a:rPr lang="en-US" sz="1800" b="1" dirty="0">
+            <a:off x="3657600" y="1645920"/>
+            <a:ext cx="7891272" cy="336804"/>
+          </a:xfrm>
+          <a:prstGeom prst="rect">
+            <a:avLst/>
+          </a:prstGeom>
+          <a:noFill/>
+          <a:ln/>
+        </p:spPr>
+        <p:txBody>
+          <a:bodyPr wrap="square" lIns="0" tIns="0" rIns="0" bIns="0" rtlCol="0" anchor="t"/>
+          <a:lstStyle/>
+          <a:p>
+            <a:pPr indent="0" marL="0">
+              <a:buNone/>
+            </a:pPr>
+            <a:r>
+              <a:rPr lang="en-US" sz="1400" dirty="0">
+                <a:solidFill>
+                  <a:srgbClr val="545B66"/>
+                </a:solidFill>
+                <a:latin typeface="微软雅黑" pitchFamily="34" charset="0"/>
+                <a:ea typeface="微软雅黑" pitchFamily="34" charset="-122"/>
+                <a:cs typeface="微软雅黑" pitchFamily="34" charset="-120"/>
+              </a:rPr>
+              <a:t>对，BibiGPT、通义听悟、飞书妙记都有，有些比我们成熟</a:t>
+            </a:r>
+            <a:endParaRPr lang="en-US" sz="1400" dirty="0"/>
+          </a:p>
+        </p:txBody>
+      </p:sp>
+      <p:sp>
+        <p:nvSpPr>
+          <p:cNvPr id="6" name="Text 4"/>
+          <p:cNvSpPr/>
+          <p:nvPr/>
+        </p:nvSpPr>
+        <p:spPr>
+          <a:xfrm>
+            <a:off x="548640" y="2651760"/>
+            <a:ext cx="3108960" cy="457200"/>
+          </a:xfrm>
+          <a:prstGeom prst="rect">
+            <a:avLst/>
+          </a:prstGeom>
+          <a:noFill/>
+          <a:ln/>
+        </p:spPr>
+        <p:txBody>
+          <a:bodyPr wrap="square" lIns="0" tIns="0" rIns="0" bIns="0" rtlCol="0" anchor="t"/>
+          <a:lstStyle/>
+          <a:p>
+            <a:pPr indent="0" marL="0">
+              <a:buNone/>
+            </a:pPr>
+            <a:r>
+              <a:rPr lang="en-US" sz="1400" b="1" dirty="0">
                 <a:solidFill>
                   <a:srgbClr val="16181D"/>
                 </a:solidFill>
@@ -8090,22 +8587,217 @@
                 <a:ea typeface="微软雅黑" pitchFamily="34" charset="-122"/>
                 <a:cs typeface="微软雅黑" pitchFamily="34" charset="-120"/>
               </a:rPr>
-              <a:t>提交走双通道：输入框逐字改图但不记历史，失焦时才提交一次历史。</a:t>
-            </a:r>
-            <a:endParaRPr lang="en-US" sz="1800" dirty="0"/>
-          </a:p>
-        </p:txBody>
-      </p:sp>
-      <p:sp>
-        <p:nvSpPr>
-          <p:cNvPr id="6" name="Shape 4"/>
-          <p:cNvSpPr/>
-          <p:nvPr/>
-        </p:nvSpPr>
-        <p:spPr>
-          <a:xfrm>
-            <a:off x="457200" y="2788920"/>
-            <a:ext cx="5454396" cy="1481328"/>
+              <a:t>导出 Obsidian、批量处理</a:t>
+            </a:r>
+            <a:endParaRPr lang="en-US" sz="1400" dirty="0"/>
+          </a:p>
+        </p:txBody>
+      </p:sp>
+      <p:sp>
+        <p:nvSpPr>
+          <p:cNvPr id="7" name="Text 5"/>
+          <p:cNvSpPr/>
+          <p:nvPr/>
+        </p:nvSpPr>
+        <p:spPr>
+          <a:xfrm>
+            <a:off x="3657600" y="2651760"/>
+            <a:ext cx="7891272" cy="336804"/>
+          </a:xfrm>
+          <a:prstGeom prst="rect">
+            <a:avLst/>
+          </a:prstGeom>
+          <a:noFill/>
+          <a:ln/>
+        </p:spPr>
+        <p:txBody>
+          <a:bodyPr wrap="square" lIns="0" tIns="0" rIns="0" bIns="0" rtlCol="0" anchor="t"/>
+          <a:lstStyle/>
+          <a:p>
+            <a:pPr indent="0" marL="0">
+              <a:buNone/>
+            </a:pPr>
+            <a:r>
+              <a:rPr lang="en-US" sz="1400" dirty="0">
+                <a:solidFill>
+                  <a:srgbClr val="545B66"/>
+                </a:solidFill>
+                <a:latin typeface="微软雅黑" pitchFamily="34" charset="0"/>
+                <a:ea typeface="微软雅黑" pitchFamily="34" charset="-122"/>
+                <a:cs typeface="微软雅黑" pitchFamily="34" charset="-120"/>
+              </a:rPr>
+              <a:t>也有，BibiGPT 支持 Notion / Obsidian / flomo</a:t>
+            </a:r>
+            <a:endParaRPr lang="en-US" sz="1400" dirty="0"/>
+          </a:p>
+        </p:txBody>
+      </p:sp>
+      <p:sp>
+        <p:nvSpPr>
+          <p:cNvPr id="8" name="Text 6"/>
+          <p:cNvSpPr/>
+          <p:nvPr/>
+        </p:nvSpPr>
+        <p:spPr>
+          <a:xfrm>
+            <a:off x="548640" y="3657600"/>
+            <a:ext cx="3108960" cy="457200"/>
+          </a:xfrm>
+          <a:prstGeom prst="rect">
+            <a:avLst/>
+          </a:prstGeom>
+          <a:noFill/>
+          <a:ln/>
+        </p:spPr>
+        <p:txBody>
+          <a:bodyPr wrap="square" lIns="0" tIns="0" rIns="0" bIns="0" rtlCol="0" anchor="t"/>
+          <a:lstStyle/>
+          <a:p>
+            <a:pPr indent="0" marL="0">
+              <a:buNone/>
+            </a:pPr>
+            <a:r>
+              <a:rPr lang="en-US" sz="1400" b="1" dirty="0">
+                <a:solidFill>
+                  <a:srgbClr val="16181D"/>
+                </a:solidFill>
+                <a:latin typeface="微软雅黑" pitchFamily="34" charset="0"/>
+                <a:ea typeface="微软雅黑" pitchFamily="34" charset="-122"/>
+                <a:cs typeface="微软雅黑" pitchFamily="34" charset="-120"/>
+              </a:rPr>
+              <a:t>条件分支、失败重试、定时触发</a:t>
+            </a:r>
+            <a:endParaRPr lang="en-US" sz="1400" dirty="0"/>
+          </a:p>
+        </p:txBody>
+      </p:sp>
+      <p:sp>
+        <p:nvSpPr>
+          <p:cNvPr id="9" name="Text 7"/>
+          <p:cNvSpPr/>
+          <p:nvPr/>
+        </p:nvSpPr>
+        <p:spPr>
+          <a:xfrm>
+            <a:off x="3657600" y="3657600"/>
+            <a:ext cx="7891272" cy="336804"/>
+          </a:xfrm>
+          <a:prstGeom prst="rect">
+            <a:avLst/>
+          </a:prstGeom>
+          <a:noFill/>
+          <a:ln/>
+        </p:spPr>
+        <p:txBody>
+          <a:bodyPr wrap="square" lIns="0" tIns="0" rIns="0" bIns="0" rtlCol="0" anchor="t"/>
+          <a:lstStyle/>
+          <a:p>
+            <a:pPr indent="0" marL="0">
+              <a:buNone/>
+            </a:pPr>
+            <a:r>
+              <a:rPr lang="en-US" sz="1400" dirty="0">
+                <a:solidFill>
+                  <a:srgbClr val="545B66"/>
+                </a:solidFill>
+                <a:latin typeface="微软雅黑" pitchFamily="34" charset="0"/>
+                <a:ea typeface="微软雅黑" pitchFamily="34" charset="-122"/>
+                <a:cs typeface="微软雅黑" pitchFamily="34" charset="-120"/>
+              </a:rPr>
+              <a:t>这些是工作流产品的默认能力，n8n / Dify / Airflow 全都有</a:t>
+            </a:r>
+            <a:endParaRPr lang="en-US" sz="1400" dirty="0"/>
+          </a:p>
+        </p:txBody>
+      </p:sp>
+      <p:sp>
+        <p:nvSpPr>
+          <p:cNvPr id="10" name="Text 8"/>
+          <p:cNvSpPr/>
+          <p:nvPr/>
+        </p:nvSpPr>
+        <p:spPr>
+          <a:xfrm>
+            <a:off x="548640" y="4663440"/>
+            <a:ext cx="3108960" cy="457200"/>
+          </a:xfrm>
+          <a:prstGeom prst="rect">
+            <a:avLst/>
+          </a:prstGeom>
+          <a:noFill/>
+          <a:ln/>
+        </p:spPr>
+        <p:txBody>
+          <a:bodyPr wrap="square" lIns="0" tIns="0" rIns="0" bIns="0" rtlCol="0" anchor="t"/>
+          <a:lstStyle/>
+          <a:p>
+            <a:pPr indent="0" marL="0">
+              <a:buNone/>
+            </a:pPr>
+            <a:r>
+              <a:rPr lang="en-US" sz="1400" b="1" dirty="0">
+                <a:solidFill>
+                  <a:srgbClr val="16181D"/>
+                </a:solidFill>
+                <a:latin typeface="微软雅黑" pitchFamily="34" charset="0"/>
+                <a:ea typeface="微软雅黑" pitchFamily="34" charset="-122"/>
+                <a:cs typeface="微软雅黑" pitchFamily="34" charset="-120"/>
+              </a:rPr>
+              <a:t>真正站得住的三条</a:t>
+            </a:r>
+            <a:endParaRPr lang="en-US" sz="1400" dirty="0"/>
+          </a:p>
+        </p:txBody>
+      </p:sp>
+      <p:sp>
+        <p:nvSpPr>
+          <p:cNvPr id="11" name="Text 9"/>
+          <p:cNvSpPr/>
+          <p:nvPr/>
+        </p:nvSpPr>
+        <p:spPr>
+          <a:xfrm>
+            <a:off x="3657600" y="4663440"/>
+            <a:ext cx="7891272" cy="336804"/>
+          </a:xfrm>
+          <a:prstGeom prst="rect">
+            <a:avLst/>
+          </a:prstGeom>
+          <a:noFill/>
+          <a:ln/>
+        </p:spPr>
+        <p:txBody>
+          <a:bodyPr wrap="square" lIns="0" tIns="0" rIns="0" bIns="0" rtlCol="0" anchor="t"/>
+          <a:lstStyle/>
+          <a:p>
+            <a:pPr indent="0" marL="0">
+              <a:buNone/>
+            </a:pPr>
+            <a:r>
+              <a:rPr lang="en-US" sz="1400" dirty="0">
+                <a:solidFill>
+                  <a:srgbClr val="545B66"/>
+                </a:solidFill>
+                <a:latin typeface="微软雅黑" pitchFamily="34" charset="0"/>
+                <a:ea typeface="微软雅黑" pitchFamily="34" charset="-122"/>
+                <a:cs typeface="微软雅黑" pitchFamily="34" charset="-120"/>
+              </a:rPr>
+              <a:t>① 两类产品接起来的位置是空的 ② 多素材在编排里保持身份 ③ 逐节点产物 + 历史运行可重新分段</a:t>
+            </a:r>
+            <a:endParaRPr lang="en-US" sz="1400" dirty="0"/>
+          </a:p>
+        </p:txBody>
+      </p:sp>
+      <p:sp>
+        <p:nvSpPr>
+          <p:cNvPr id="12" name="Shape 10"/>
+          <p:cNvSpPr/>
+          <p:nvPr/>
+        </p:nvSpPr>
+        <p:spPr>
+          <a:xfrm>
+            <a:off x="457200" y="5440680"/>
+            <a:ext cx="11274552" cy="777240"/>
           </a:xfrm>
           <a:prstGeom prst="rect">
             <a:avLst/>
@@ -8123,14 +8815,14 @@
       </p:sp>
       <p:sp>
         <p:nvSpPr>
-          <p:cNvPr id="7" name="Text 5"/>
-          <p:cNvSpPr/>
-          <p:nvPr/>
-        </p:nvSpPr>
-        <p:spPr>
-          <a:xfrm>
-            <a:off x="749808" y="2971800"/>
-            <a:ext cx="4869180" cy="384048"/>
+          <p:cNvPr id="13" name="Text 11"/>
+          <p:cNvSpPr/>
+          <p:nvPr/>
+        </p:nvSpPr>
+        <p:spPr>
+          <a:xfrm>
+            <a:off x="777240" y="5532120"/>
+            <a:ext cx="10634472" cy="594360"/>
           </a:xfrm>
           <a:prstGeom prst="rect">
             <a:avLst/>
@@ -8146,54 +8838,15 @@
               <a:buNone/>
             </a:pPr>
             <a:r>
-              <a:rPr lang="en-US" sz="1600" b="1" dirty="0">
-                <a:solidFill>
-                  <a:srgbClr val="D23F4E"/>
-                </a:solidFill>
-                <a:latin typeface="微软雅黑" pitchFamily="34" charset="0"/>
-                <a:ea typeface="微软雅黑" pitchFamily="34" charset="-122"/>
-                <a:cs typeface="微软雅黑" pitchFamily="34" charset="-120"/>
-              </a:rPr>
-              <a:t>副作用一</a:t>
-            </a:r>
-            <a:endParaRPr lang="en-US" sz="1600" dirty="0"/>
-          </a:p>
-        </p:txBody>
-      </p:sp>
-      <p:sp>
-        <p:nvSpPr>
-          <p:cNvPr id="8" name="Text 6"/>
-          <p:cNvSpPr/>
-          <p:nvPr/>
-        </p:nvSpPr>
-        <p:spPr>
-          <a:xfrm>
-            <a:off x="749808" y="3447288"/>
-            <a:ext cx="4869180" cy="635508"/>
-          </a:xfrm>
-          <a:prstGeom prst="rect">
-            <a:avLst/>
-          </a:prstGeom>
-          <a:noFill/>
-          <a:ln/>
-        </p:spPr>
-        <p:txBody>
-          <a:bodyPr wrap="square" lIns="0" tIns="0" rIns="0" bIns="0" rtlCol="0" anchor="t"/>
-          <a:lstStyle/>
-          <a:p>
-            <a:pPr indent="0" marL="0">
-              <a:buNone/>
-            </a:pPr>
-            <a:r>
-              <a:rPr lang="en-US" sz="1500" dirty="0">
-                <a:solidFill>
-                  <a:srgbClr val="545B66"/>
-                </a:solidFill>
-                <a:latin typeface="微软雅黑" pitchFamily="34" charset="0"/>
-                <a:ea typeface="微软雅黑" pitchFamily="34" charset="-122"/>
-                <a:cs typeface="微软雅黑" pitchFamily="34" charset="-120"/>
-              </a:rPr>
-              <a:t>提交时不做去重，点进输入框再点空白会压入一模一样的快照，用户按撤销会觉得没反应。</a:t>
+              <a:rPr lang="en-US" sz="1500" b="1" dirty="0">
+                <a:solidFill>
+                  <a:srgbClr val="16181D"/>
+                </a:solidFill>
+                <a:latin typeface="微软雅黑" pitchFamily="34" charset="0"/>
+                <a:ea typeface="微软雅黑" pitchFamily="34" charset="-122"/>
+                <a:cs typeface="微软雅黑" pitchFamily="34" charset="-120"/>
+              </a:rPr>
+              <a:t>别装成都是自己发明的——先把「别人也做了」认下来，后面讲「我怎么做的」才有人听</a:t>
             </a:r>
             <a:endParaRPr lang="en-US" sz="1500" dirty="0"/>
           </a:p>
@@ -8201,110 +8854,7 @@
       </p:sp>
       <p:sp>
         <p:nvSpPr>
-          <p:cNvPr id="9" name="Shape 7"/>
-          <p:cNvSpPr/>
-          <p:nvPr/>
-        </p:nvSpPr>
-        <p:spPr>
-          <a:xfrm>
-            <a:off x="6277356" y="2788920"/>
-            <a:ext cx="5454396" cy="1481328"/>
-          </a:xfrm>
-          <a:prstGeom prst="rect">
-            <a:avLst/>
-          </a:prstGeom>
-          <a:solidFill>
-            <a:srgbClr val="F4F5F6"/>
-          </a:solidFill>
-          <a:ln w="12700">
-            <a:solidFill>
-              <a:srgbClr val="E4E7EB"/>
-            </a:solidFill>
-            <a:prstDash val="solid"/>
-          </a:ln>
-        </p:spPr>
-      </p:sp>
-      <p:sp>
-        <p:nvSpPr>
-          <p:cNvPr id="10" name="Text 8"/>
-          <p:cNvSpPr/>
-          <p:nvPr/>
-        </p:nvSpPr>
-        <p:spPr>
-          <a:xfrm>
-            <a:off x="6569964" y="2971800"/>
-            <a:ext cx="4869180" cy="384048"/>
-          </a:xfrm>
-          <a:prstGeom prst="rect">
-            <a:avLst/>
-          </a:prstGeom>
-          <a:noFill/>
-          <a:ln/>
-        </p:spPr>
-        <p:txBody>
-          <a:bodyPr wrap="square" lIns="0" tIns="0" rIns="0" bIns="0" rtlCol="0" anchor="ctr"/>
-          <a:lstStyle/>
-          <a:p>
-            <a:pPr indent="0" marL="0">
-              <a:buNone/>
-            </a:pPr>
-            <a:r>
-              <a:rPr lang="en-US" sz="1600" b="1" dirty="0">
-                <a:solidFill>
-                  <a:srgbClr val="D23F4E"/>
-                </a:solidFill>
-                <a:latin typeface="微软雅黑" pitchFamily="34" charset="0"/>
-                <a:ea typeface="微软雅黑" pitchFamily="34" charset="-122"/>
-                <a:cs typeface="微软雅黑" pitchFamily="34" charset="-120"/>
-              </a:rPr>
-              <a:t>副作用二</a:t>
-            </a:r>
-            <a:endParaRPr lang="en-US" sz="1600" dirty="0"/>
-          </a:p>
-        </p:txBody>
-      </p:sp>
-      <p:sp>
-        <p:nvSpPr>
-          <p:cNvPr id="11" name="Text 9"/>
-          <p:cNvSpPr/>
-          <p:nvPr/>
-        </p:nvSpPr>
-        <p:spPr>
-          <a:xfrm>
-            <a:off x="6569964" y="3447288"/>
-            <a:ext cx="4869180" cy="635508"/>
-          </a:xfrm>
-          <a:prstGeom prst="rect">
-            <a:avLst/>
-          </a:prstGeom>
-          <a:noFill/>
-          <a:ln/>
-        </p:spPr>
-        <p:txBody>
-          <a:bodyPr wrap="square" lIns="0" tIns="0" rIns="0" bIns="0" rtlCol="0" anchor="t"/>
-          <a:lstStyle/>
-          <a:p>
-            <a:pPr indent="0" marL="0">
-              <a:buNone/>
-            </a:pPr>
-            <a:r>
-              <a:rPr lang="en-US" sz="1500" dirty="0">
-                <a:solidFill>
-                  <a:srgbClr val="545B66"/>
-                </a:solidFill>
-                <a:latin typeface="微软雅黑" pitchFamily="34" charset="0"/>
-                <a:ea typeface="微软雅黑" pitchFamily="34" charset="-122"/>
-                <a:cs typeface="微软雅黑" pitchFamily="34" charset="-120"/>
-              </a:rPr>
-              <a:t>视角本身也在快照里，所以撤销会顺带把镜头弹回当时的画面，这点容易被忽略。</a:t>
-            </a:r>
-            <a:endParaRPr lang="en-US" sz="1500" dirty="0"/>
-          </a:p>
-        </p:txBody>
-      </p:sp>
-      <p:sp>
-        <p:nvSpPr>
-          <p:cNvPr id="12" name="Text 10"/>
+          <p:cNvPr id="14" name="Text 12"/>
           <p:cNvSpPr/>
           <p:nvPr/>
         </p:nvSpPr>
@@ -8335,7 +8885,7 @@
                 <a:ea typeface="微软雅黑" pitchFamily="34" charset="-122"/>
                 <a:cs typeface="微软雅黑" pitchFamily="34" charset="-120"/>
               </a:rPr>
-              <a:t>快照与 50 步上限见 FlowCanvas.vue:82-111；失焦提交约定见 utils/flow.ts:39-40</a:t>
+              <a:t>承认表与三条差别见 sharing/ROOM.md；三个 P0（条件分支/失败重试/文本工具/章节切分）在代码里都能查到</a:t>
             </a:r>
             <a:endParaRPr lang="en-US" sz="950" dirty="0"/>
           </a:p>
@@ -8406,7 +8956,7 @@
                 <a:ea typeface="微软雅黑" pitchFamily="34" charset="-122"/>
                 <a:cs typeface="微软雅黑" pitchFamily="34" charset="-120"/>
               </a:rPr>
-              <a:t>01 / 节点编排画布</a:t>
+              <a:t>01 / 它是什么</a:t>
             </a:r>
             <a:endParaRPr lang="en-US" sz="1200" dirty="0"/>
           </a:p>
@@ -8445,7 +8995,7 @@
                 <a:ea typeface="微软雅黑" pitchFamily="34" charset="-122"/>
                 <a:cs typeface="微软雅黑" pitchFamily="34" charset="-120"/>
               </a:rPr>
-              <a:t>画布缩放之后，浮层怎么还对得上</a:t>
+              <a:t>八个视频进同一条链路，我只要其中三段</a:t>
             </a:r>
             <a:endParaRPr lang="en-US" sz="3000" dirty="0"/>
           </a:p>
@@ -8459,8 +9009,8 @@
         </p:nvSpPr>
         <p:spPr>
           <a:xfrm>
-            <a:off x="548640" y="2145030"/>
-            <a:ext cx="2194560" cy="457200"/>
+            <a:off x="548640" y="1645920"/>
+            <a:ext cx="2468880" cy="457200"/>
           </a:xfrm>
           <a:prstGeom prst="rect">
             <a:avLst/>
@@ -8484,7 +9034,7 @@
                 <a:ea typeface="微软雅黑" pitchFamily="34" charset="-122"/>
                 <a:cs typeface="微软雅黑" pitchFamily="34" charset="-120"/>
               </a:rPr>
-              <a:t>问题</a:t>
+              <a:t>别人怎么做</a:t>
             </a:r>
             <a:endParaRPr lang="en-US" sz="1400" dirty="0"/>
           </a:p>
@@ -8498,8 +9048,8 @@
         </p:nvSpPr>
         <p:spPr>
           <a:xfrm>
-            <a:off x="2743200" y="2145030"/>
-            <a:ext cx="8805672" cy="336804"/>
+            <a:off x="3017520" y="1645920"/>
+            <a:ext cx="8531352" cy="336804"/>
           </a:xfrm>
           <a:prstGeom prst="rect">
             <a:avLst/>
@@ -8523,7 +9073,7 @@
                 <a:ea typeface="微软雅黑" pitchFamily="34" charset="-122"/>
                 <a:cs typeface="微软雅黑" pitchFamily="34" charset="-120"/>
               </a:rPr>
-              <a:t>浮层被传送到 body，脱离了画布的缩放坐标系——画布缩到 60% 时，浮层还是原尺寸</a:t>
+              <a:t>要么每个视频单独跑一遍，要么全并成一份——挑不出来，也说不清用了哪几段</a:t>
             </a:r>
             <a:endParaRPr lang="en-US" sz="1400" dirty="0"/>
           </a:p>
@@ -8537,8 +9087,8 @@
         </p:nvSpPr>
         <p:spPr>
           <a:xfrm>
-            <a:off x="548640" y="3224022"/>
-            <a:ext cx="2194560" cy="457200"/>
+            <a:off x="548640" y="2651760"/>
+            <a:ext cx="2468880" cy="457200"/>
           </a:xfrm>
           <a:prstGeom prst="rect">
             <a:avLst/>
@@ -8562,7 +9112,7 @@
                 <a:ea typeface="微软雅黑" pitchFamily="34" charset="-122"/>
                 <a:cs typeface="微软雅黑" pitchFamily="34" charset="-120"/>
               </a:rPr>
-              <a:t>解法</a:t>
+              <a:t>段身份怎么给</a:t>
             </a:r>
             <a:endParaRPr lang="en-US" sz="1400" dirty="0"/>
           </a:p>
@@ -8576,8 +9126,8 @@
         </p:nvSpPr>
         <p:spPr>
           <a:xfrm>
-            <a:off x="2743200" y="3224022"/>
-            <a:ext cx="8805672" cy="336804"/>
+            <a:off x="3017520" y="2651760"/>
+            <a:ext cx="8531352" cy="336804"/>
           </a:xfrm>
           <a:prstGeom prst="rect">
             <a:avLst/>
@@ -8601,7 +9151,7 @@
                 <a:ea typeface="微软雅黑" pitchFamily="34" charset="-122"/>
                 <a:cs typeface="微软雅黑" pitchFamily="34" charset="-120"/>
               </a:rPr>
-              <a:t>从画布取当前缩放，沿组件树传给所有浮层，浮层用 CSS zoom 补偿</a:t>
+              <a:t>bvid:分P / file:id / node:来源——只用素材自身的稳定信息，不掺数组下标</a:t>
             </a:r>
             <a:endParaRPr lang="en-US" sz="1400" dirty="0"/>
           </a:p>
@@ -8615,8 +9165,8 @@
         </p:nvSpPr>
         <p:spPr>
           <a:xfrm>
-            <a:off x="548640" y="4303014"/>
-            <a:ext cx="2194560" cy="457200"/>
+            <a:off x="548640" y="3657600"/>
+            <a:ext cx="2468880" cy="457200"/>
           </a:xfrm>
           <a:prstGeom prst="rect">
             <a:avLst/>
@@ -8640,7 +9190,7 @@
                 <a:ea typeface="微软雅黑" pitchFamily="34" charset="-122"/>
                 <a:cs typeface="微软雅黑" pitchFamily="34" charset="-120"/>
               </a:rPr>
-              <a:t>两个细节</a:t>
+              <a:t>没配就是全选</a:t>
             </a:r>
             <a:endParaRPr lang="en-US" sz="1400" dirty="0"/>
           </a:p>
@@ -8654,8 +9204,8 @@
         </p:nvSpPr>
         <p:spPr>
           <a:xfrm>
-            <a:off x="2743200" y="4303014"/>
-            <a:ext cx="8805672" cy="336804"/>
+            <a:off x="3017520" y="3657600"/>
+            <a:ext cx="8531352" cy="336804"/>
           </a:xfrm>
           <a:prstGeom prst="rect">
             <a:avLst/>
@@ -8679,7 +9229,7 @@
                 <a:ea typeface="微软雅黑" pitchFamily="34" charset="-122"/>
                 <a:cs typeface="微软雅黑" pitchFamily="34" charset="-120"/>
               </a:rPr>
-              <a:t>位置不用补（浮层库按屏幕矩形定位，缩放后矩形已经是对的），只有尺寸要补</a:t>
+              <a:t>缺这个来源 = 全部选中（兼容旧工程）；空数组 = 全部排除，运行前会被拒绝</a:t>
             </a:r>
             <a:endParaRPr lang="en-US" sz="1400" dirty="0"/>
           </a:p>
@@ -8693,8 +9243,8 @@
         </p:nvSpPr>
         <p:spPr>
           <a:xfrm>
-            <a:off x="548640" y="5382006"/>
-            <a:ext cx="2194560" cy="457200"/>
+            <a:off x="548640" y="4663440"/>
+            <a:ext cx="2468880" cy="457200"/>
           </a:xfrm>
           <a:prstGeom prst="rect">
             <a:avLst/>
@@ -8718,7 +9268,7 @@
                 <a:ea typeface="微软雅黑" pitchFamily="34" charset="-122"/>
                 <a:cs typeface="微软雅黑" pitchFamily="34" charset="-120"/>
               </a:rPr>
-              <a:t>为什么用 zoom</a:t>
+              <a:t>下游怎么解释</a:t>
             </a:r>
             <a:endParaRPr lang="en-US" sz="1400" dirty="0"/>
           </a:p>
@@ -8732,8 +9282,8 @@
         </p:nvSpPr>
         <p:spPr>
           <a:xfrm>
-            <a:off x="2743200" y="5382006"/>
-            <a:ext cx="8805672" cy="336804"/>
+            <a:off x="3017520" y="4663440"/>
+            <a:ext cx="8531352" cy="336804"/>
           </a:xfrm>
           <a:prstGeom prst="rect">
             <a:avLst/>
@@ -8757,7 +9307,7 @@
                 <a:ea typeface="微软雅黑" pitchFamily="34" charset="-122"/>
                 <a:cs typeface="微软雅黑" pitchFamily="34" charset="-120"/>
               </a:rPr>
-              <a:t>CSS zoom 参与布局计算，而 transform: scale 会干扰浮层库自己的测量与定位原点</a:t>
+              <a:t>结果页能按视频切开读，节点摘要会说清「8 段里的哪 3 段」</a:t>
             </a:r>
             <a:endParaRPr lang="en-US" sz="1400" dirty="0"/>
           </a:p>
@@ -8765,7 +9315,71 @@
       </p:sp>
       <p:sp>
         <p:nvSpPr>
-          <p:cNvPr id="12" name="Text 10"/>
+          <p:cNvPr id="12" name="Shape 10"/>
+          <p:cNvSpPr/>
+          <p:nvPr/>
+        </p:nvSpPr>
+        <p:spPr>
+          <a:xfrm>
+            <a:off x="457200" y="5440680"/>
+            <a:ext cx="11274552" cy="777240"/>
+          </a:xfrm>
+          <a:prstGeom prst="rect">
+            <a:avLst/>
+          </a:prstGeom>
+          <a:solidFill>
+            <a:srgbClr val="F4F5F6"/>
+          </a:solidFill>
+          <a:ln w="12700">
+            <a:solidFill>
+              <a:srgbClr val="E4E7EB"/>
+            </a:solidFill>
+            <a:prstDash val="solid"/>
+          </a:ln>
+        </p:spPr>
+      </p:sp>
+      <p:sp>
+        <p:nvSpPr>
+          <p:cNvPr id="13" name="Text 11"/>
+          <p:cNvSpPr/>
+          <p:nvPr/>
+        </p:nvSpPr>
+        <p:spPr>
+          <a:xfrm>
+            <a:off x="777240" y="5532120"/>
+            <a:ext cx="10634472" cy="594360"/>
+          </a:xfrm>
+          <a:prstGeom prst="rect">
+            <a:avLst/>
+          </a:prstGeom>
+          <a:noFill/>
+          <a:ln/>
+        </p:spPr>
+        <p:txBody>
+          <a:bodyPr wrap="square" lIns="0" tIns="0" rIns="0" bIns="0" rtlCol="0" anchor="ctr"/>
+          <a:lstStyle/>
+          <a:p>
+            <a:pPr indent="0" marL="0">
+              <a:buNone/>
+            </a:pPr>
+            <a:r>
+              <a:rPr lang="en-US" sz="1500" b="1" dirty="0">
+                <a:solidFill>
+                  <a:srgbClr val="16181D"/>
+                </a:solidFill>
+                <a:latin typeface="微软雅黑" pitchFamily="34" charset="0"/>
+                <a:ea typeface="微软雅黑" pitchFamily="34" charset="-122"/>
+                <a:cs typeface="微软雅黑" pitchFamily="34" charset="-120"/>
+              </a:rPr>
+              <a:t>增量下标是这里最容易埋的坑：上游改了选区，下游的挑选就会静默错位——所以标识只用素材自己的信息</a:t>
+            </a:r>
+            <a:endParaRPr lang="en-US" sz="1500" dirty="0"/>
+          </a:p>
+        </p:txBody>
+      </p:sp>
+      <p:sp>
+        <p:nvSpPr>
+          <p:cNvPr id="14" name="Text 12"/>
           <p:cNvSpPr/>
           <p:nvPr/>
         </p:nvSpPr>
@@ -8796,7 +9410,7 @@
                 <a:ea typeface="微软雅黑" pitchFamily="34" charset="-122"/>
                 <a:cs typeface="微软雅黑" pitchFamily="34" charset="-120"/>
               </a:rPr>
-              <a:t>补偿见 ScribeNode.vue:50-52 的 provide 与三个浮层容器；更麻烦的一处见 ModelSelect.vue（屏幕宽度要除以缩放才是节点局部宽度）</a:t>
+              <a:t>segmentKey 与「不掺下标」的理由见 packages/shared/src/segment.ts:17-29；pick 的两种语义见 graph.ts:215-218</a:t>
             </a:r>
             <a:endParaRPr lang="en-US" sz="950" dirty="0"/>
           </a:p>
@@ -8867,7 +9481,7 @@
                 <a:ea typeface="微软雅黑" pitchFamily="34" charset="-122"/>
                 <a:cs typeface="微软雅黑" pitchFamily="34" charset="-120"/>
               </a:rPr>
-              <a:t>02 / 推送会撒谎，数据库不会</a:t>
+              <a:t>02 / 跑的时候</a:t>
             </a:r>
             <a:endParaRPr lang="en-US" sz="1200" dirty="0"/>
           </a:p>
@@ -8906,7 +9520,7 @@
                 <a:ea typeface="微软雅黑" pitchFamily="34" charset="-122"/>
                 <a:cs typeface="微软雅黑" pitchFamily="34" charset="-120"/>
               </a:rPr>
-              <a:t>一次运行跑十几分钟</a:t>
+              <a:t>最长的一次跑了 39 分钟</a:t>
             </a:r>
             <a:endParaRPr lang="en-US" sz="3800" dirty="0"/>
           </a:p>
@@ -8945,7 +9559,7 @@
                 <a:ea typeface="微软雅黑" pitchFamily="34" charset="-122"/>
                 <a:cs typeface="微软雅黑" pitchFamily="34" charset="-120"/>
               </a:rPr>
-              <a:t>前端得一直说真话</a:t>
+              <a:t>界面得一直说真话</a:t>
             </a:r>
             <a:endParaRPr lang="en-US" sz="3800" dirty="0"/>
           </a:p>
@@ -8984,7 +9598,7 @@
                 <a:ea typeface="微软雅黑" pitchFamily="34" charset="-122"/>
                 <a:cs typeface="微软雅黑" pitchFamily="34" charset="-120"/>
               </a:rPr>
-              <a:t>转写和 AI 加工都可能很久，而且中途断线、切页面、服务重启都是常态</a:t>
+              <a:t>8 个视频那条链路：转写 23.6 分钟、AI 校对 9.3 分钟、下载 2.4 分钟——断线、刷新、重启都是常规情况</a:t>
             </a:r>
             <a:endParaRPr lang="en-US" sz="1500" dirty="0"/>
           </a:p>
@@ -9055,7 +9669,7 @@
                 <a:ea typeface="微软雅黑" pitchFamily="34" charset="-122"/>
                 <a:cs typeface="微软雅黑" pitchFamily="34" charset="-120"/>
               </a:rPr>
-              <a:t>02 / 推送会撒谎，数据库不会</a:t>
+              <a:t>02 / 跑的时候</a:t>
             </a:r>
             <a:endParaRPr lang="en-US" sz="1200" dirty="0"/>
           </a:p>
@@ -9094,7 +9708,7 @@
                 <a:ea typeface="微软雅黑" pitchFamily="34" charset="-122"/>
                 <a:cs typeface="微软雅黑" pitchFamily="34" charset="-120"/>
               </a:rPr>
-              <a:t>有了推送，反而更需要轮询</a:t>
+              <a:t>进度动到一半就不动了——刷新回来还算数吗</a:t>
             </a:r>
             <a:endParaRPr lang="en-US" sz="3000" dirty="0"/>
           </a:p>
@@ -9108,8 +9722,8 @@
         </p:nvSpPr>
         <p:spPr>
           <a:xfrm>
-            <a:off x="548640" y="2145030"/>
-            <a:ext cx="2194560" cy="457200"/>
+            <a:off x="548640" y="1645920"/>
+            <a:ext cx="2468880" cy="457200"/>
           </a:xfrm>
           <a:prstGeom prst="rect">
             <a:avLst/>
@@ -9133,7 +9747,7 @@
                 <a:ea typeface="微软雅黑" pitchFamily="34" charset="-122"/>
                 <a:cs typeface="微软雅黑" pitchFamily="34" charset="-120"/>
               </a:rPr>
-              <a:t>直觉</a:t>
+              <a:t>用户看到的</a:t>
             </a:r>
             <a:endParaRPr lang="en-US" sz="1400" dirty="0"/>
           </a:p>
@@ -9147,8 +9761,8 @@
         </p:nvSpPr>
         <p:spPr>
           <a:xfrm>
-            <a:off x="2743200" y="2145030"/>
-            <a:ext cx="8805672" cy="336804"/>
+            <a:off x="3017520" y="1645920"/>
+            <a:ext cx="8531352" cy="336804"/>
           </a:xfrm>
           <a:prstGeom prst="rect">
             <a:avLst/>
@@ -9172,7 +9786,7 @@
                 <a:ea typeface="微软雅黑" pitchFamily="34" charset="-122"/>
                 <a:cs typeface="微软雅黑" pitchFamily="34" charset="-120"/>
               </a:rPr>
-              <a:t>已经有实时推送了，轮询是多余的老办法</a:t>
+              <a:t>进度停在某个节点不动；或者刷新之后，整屏回到「什么都没跑过」的样子</a:t>
             </a:r>
             <a:endParaRPr lang="en-US" sz="1400" dirty="0"/>
           </a:p>
@@ -9186,8 +9800,8 @@
         </p:nvSpPr>
         <p:spPr>
           <a:xfrm>
-            <a:off x="548640" y="3224022"/>
-            <a:ext cx="2194560" cy="457200"/>
+            <a:off x="548640" y="2651760"/>
+            <a:ext cx="2468880" cy="457200"/>
           </a:xfrm>
           <a:prstGeom prst="rect">
             <a:avLst/>
@@ -9211,7 +9825,7 @@
                 <a:ea typeface="微软雅黑" pitchFamily="34" charset="-122"/>
                 <a:cs typeface="微软雅黑" pitchFamily="34" charset="-120"/>
               </a:rPr>
-              <a:t>实际</a:t>
+              <a:t>为什么会停</a:t>
             </a:r>
             <a:endParaRPr lang="en-US" sz="1400" dirty="0"/>
           </a:p>
@@ -9225,8 +9839,8 @@
         </p:nvSpPr>
         <p:spPr>
           <a:xfrm>
-            <a:off x="2743200" y="3224022"/>
-            <a:ext cx="8805672" cy="336804"/>
+            <a:off x="3017520" y="2651760"/>
+            <a:ext cx="8531352" cy="336804"/>
           </a:xfrm>
           <a:prstGeom prst="rect">
             <a:avLst/>
@@ -9250,7 +9864,7 @@
                 <a:ea typeface="微软雅黑" pitchFamily="34" charset="-122"/>
                 <a:cs typeface="微软雅黑" pitchFamily="34" charset="-120"/>
               </a:rPr>
-              <a:t>推送是唯一会静默失效的通道：断线、丢帧、服务重启，它都不报错，只是不说话了</a:t>
+              <a:t>推送是唯一会静默失效的通道：断线、丢帧、服务重启它都不报错，只是不说话了</a:t>
             </a:r>
             <a:endParaRPr lang="en-US" sz="1400" dirty="0"/>
           </a:p>
@@ -9264,8 +9878,8 @@
         </p:nvSpPr>
         <p:spPr>
           <a:xfrm>
-            <a:off x="548640" y="4303014"/>
-            <a:ext cx="2194560" cy="457200"/>
+            <a:off x="548640" y="3657600"/>
+            <a:ext cx="2468880" cy="457200"/>
           </a:xfrm>
           <a:prstGeom prst="rect">
             <a:avLst/>
@@ -9289,7 +9903,7 @@
                 <a:ea typeface="微软雅黑" pitchFamily="34" charset="-122"/>
                 <a:cs typeface="微软雅黑" pitchFamily="34" charset="-120"/>
               </a:rPr>
-              <a:t>所以</a:t>
+              <a:t>怎么不撒谎</a:t>
             </a:r>
             <a:endParaRPr lang="en-US" sz="1400" dirty="0"/>
           </a:p>
@@ -9303,8 +9917,8 @@
         </p:nvSpPr>
         <p:spPr>
           <a:xfrm>
-            <a:off x="2743200" y="4303014"/>
-            <a:ext cx="8805672" cy="336804"/>
+            <a:off x="3017520" y="3657600"/>
+            <a:ext cx="8531352" cy="336804"/>
           </a:xfrm>
           <a:prstGeom prst="rect">
             <a:avLst/>
@@ -9328,7 +9942,7 @@
                 <a:ea typeface="微软雅黑" pitchFamily="34" charset="-122"/>
                 <a:cs typeface="微软雅黑" pitchFamily="34" charset="-120"/>
               </a:rPr>
-              <a:t>数据库是真相通道，推送只是加速通道；轮询不是推送的备份，是它的正确性校正器</a:t>
+              <a:t>推送只当加速，状态以列表与详情为准——断线 2 秒自动重连，另有全局 5 秒对账</a:t>
             </a:r>
             <a:endParaRPr lang="en-US" sz="1400" dirty="0"/>
           </a:p>
@@ -9342,8 +9956,8 @@
         </p:nvSpPr>
         <p:spPr>
           <a:xfrm>
-            <a:off x="548640" y="5382006"/>
-            <a:ext cx="2194560" cy="457200"/>
+            <a:off x="548640" y="4663440"/>
+            <a:ext cx="2468880" cy="457200"/>
           </a:xfrm>
           <a:prstGeom prst="rect">
             <a:avLst/>
@@ -9367,7 +9981,7 @@
                 <a:ea typeface="微软雅黑" pitchFamily="34" charset="-122"/>
                 <a:cs typeface="微软雅黑" pitchFamily="34" charset="-120"/>
               </a:rPr>
-              <a:t>四层兜底</a:t>
+              <a:t>刷新回来怎么算</a:t>
             </a:r>
             <a:endParaRPr lang="en-US" sz="1400" dirty="0"/>
           </a:p>
@@ -9381,8 +9995,8 @@
         </p:nvSpPr>
         <p:spPr>
           <a:xfrm>
-            <a:off x="2743200" y="5382006"/>
-            <a:ext cx="8805672" cy="336804"/>
+            <a:off x="3017520" y="4663440"/>
+            <a:ext cx="8531352" cy="336804"/>
           </a:xfrm>
           <a:prstGeom prst="rect">
             <a:avLst/>
@@ -9406,7 +10020,7 @@
                 <a:ea typeface="微软雅黑" pitchFamily="34" charset="-122"/>
                 <a:cs typeface="微软雅黑" pitchFamily="34" charset="-120"/>
               </a:rPr>
-              <a:t>断线 2 秒重连、全局 5 秒轮询对账、运行结束补一次终局快照、进页面时恢复上次运行</a:t>
+              <a:t>三条恢复路径走同一套规则，规则是 3 个纯函数（45 行，带单测）</a:t>
             </a:r>
             <a:endParaRPr lang="en-US" sz="1400" dirty="0"/>
           </a:p>
@@ -9414,7 +10028,71 @@
       </p:sp>
       <p:sp>
         <p:nvSpPr>
-          <p:cNvPr id="12" name="Text 10"/>
+          <p:cNvPr id="12" name="Shape 10"/>
+          <p:cNvSpPr/>
+          <p:nvPr/>
+        </p:nvSpPr>
+        <p:spPr>
+          <a:xfrm>
+            <a:off x="457200" y="5440680"/>
+            <a:ext cx="11274552" cy="777240"/>
+          </a:xfrm>
+          <a:prstGeom prst="rect">
+            <a:avLst/>
+          </a:prstGeom>
+          <a:solidFill>
+            <a:srgbClr val="F4F5F6"/>
+          </a:solidFill>
+          <a:ln w="12700">
+            <a:solidFill>
+              <a:srgbClr val="E4E7EB"/>
+            </a:solidFill>
+            <a:prstDash val="solid"/>
+          </a:ln>
+        </p:spPr>
+      </p:sp>
+      <p:sp>
+        <p:nvSpPr>
+          <p:cNvPr id="13" name="Text 11"/>
+          <p:cNvSpPr/>
+          <p:nvPr/>
+        </p:nvSpPr>
+        <p:spPr>
+          <a:xfrm>
+            <a:off x="777240" y="5532120"/>
+            <a:ext cx="10634472" cy="594360"/>
+          </a:xfrm>
+          <a:prstGeom prst="rect">
+            <a:avLst/>
+          </a:prstGeom>
+          <a:noFill/>
+          <a:ln/>
+        </p:spPr>
+        <p:txBody>
+          <a:bodyPr wrap="square" lIns="0" tIns="0" rIns="0" bIns="0" rtlCol="0" anchor="ctr"/>
+          <a:lstStyle/>
+          <a:p>
+            <a:pPr indent="0" marL="0">
+              <a:buNone/>
+            </a:pPr>
+            <a:r>
+              <a:rPr lang="en-US" sz="1500" b="1" dirty="0">
+                <a:solidFill>
+                  <a:srgbClr val="16181D"/>
+                </a:solidFill>
+                <a:latin typeface="微软雅黑" pitchFamily="34" charset="0"/>
+                <a:ea typeface="微软雅黑" pitchFamily="34" charset="-122"/>
+                <a:cs typeface="微软雅黑" pitchFamily="34" charset="-120"/>
+              </a:rPr>
+              <a:t>回填的三条纪律：不覆盖当前结果、只认画布上还在的节点、失败的运行里已完成的那几个照样算数</a:t>
+            </a:r>
+            <a:endParaRPr lang="en-US" sz="1500" dirty="0"/>
+          </a:p>
+        </p:txBody>
+      </p:sp>
+      <p:sp>
+        <p:nvSpPr>
+          <p:cNvPr id="14" name="Text 12"/>
           <p:cNvSpPr/>
           <p:nvPr/>
         </p:nvSpPr>
@@ -9445,7 +10123,7 @@
                 <a:ea typeface="微软雅黑" pitchFamily="34" charset="-122"/>
                 <a:cs typeface="微软雅黑" pitchFamily="34" charset="-120"/>
               </a:rPr>
-              <a:t>重连见 sse.ts:37；轮询见 layouts/AppLayout.vue:37；对账与恢复见 ProjectEditorView.vue 的 resumeRun / reconcileActiveRun / restoreLastRun</a:t>
+              <a:t>重连 sse.ts:37；5 秒对账 AppLayout.vue:80；恢复规则 run-restore.ts（45 行 3 纯函数）；回填上限 200 条 ProjectEditorView.vue:425；时长实测自本机 114 次运行记录</a:t>
             </a:r>
             <a:endParaRPr lang="en-US" sz="950" dirty="0"/>
           </a:p>
